--- a/docs/tema5/diapositivas/iam-aplicado.pptx
+++ b/docs/tema5/diapositivas/iam-aplicado.pptx
@@ -4,9 +4,6 @@
   <p:sldMasterIdLst>
     <p:sldMasterId id="2147483648" r:id="rId1"/>
   </p:sldMasterIdLst>
-  <p:notesMasterIdLst>
-    <p:notesMasterId r:id="rId17"/>
-  </p:notesMasterIdLst>
   <p:sldIdLst>
     <p:sldId id="256" r:id="rId2"/>
     <p:sldId id="257" r:id="rId3"/>
@@ -20,10 +17,10 @@
     <p:sldId id="265" r:id="rId11"/>
     <p:sldId id="266" r:id="rId12"/>
     <p:sldId id="267" r:id="rId13"/>
-    <p:sldId id="268" r:id="rId14"/>
-    <p:sldId id="269" r:id="rId15"/>
-    <p:sldId id="270" r:id="rId16"/>
   </p:sldIdLst>
+  <p:notesMasterIdLst>
+    <p:notesMasterId r:id="rId14"/>
+  </p:notesMasterIdLst>
   <p:sldSz cx="12192000" cy="6858000"/>
   <p:notesSz cx="6858000" cy="12192000"/>
   <p:defaultTextStyle>
@@ -118,11 +115,6 @@
       </a:defRPr>
     </a:lvl9pPr>
   </p:defaultTextStyle>
-  <p:extLst>
-    <p:ext uri="{EFAFB233-063F-42B5-8137-9DF3F51BA10A}">
-      <p15:sldGuideLst xmlns:p15="http://schemas.microsoft.com/office/powerpoint/2012/main"/>
-    </p:ext>
-  </p:extLst>
 </p:presentation>
 </file>
 
@@ -148,10 +140,234 @@
           <a:chExt cx="0" cy="0"/>
         </a:xfrm>
       </p:grpSpPr>
+      <p:sp>
+        <p:nvSpPr>
+          <p:cNvPr id="2" name="Header Placeholder 1"/>
+          <p:cNvSpPr>
+            <a:spLocks noGrp="1"/>
+          </p:cNvSpPr>
+          <p:nvPr>
+            <p:ph type="hdr" sz="quarter"/>
+          </p:nvPr>
+        </p:nvSpPr>
+        <p:spPr>
+          <a:xfrm>
+            <a:off x="0" y="0"/>
+            <a:ext cx="2971800" cy="458788"/>
+          </a:xfrm>
+          <a:prstGeom prst="rect">
+            <a:avLst/>
+          </a:prstGeom>
+        </p:spPr>
+        <p:txBody>
+          <a:bodyPr vert="horz" lIns="91440" tIns="45720" rIns="91440" bIns="45720" rtlCol="0"/>
+          <a:lstStyle>
+            <a:lvl1pPr algn="l">
+              <a:defRPr sz="1200"/>
+            </a:lvl1pPr>
+          </a:lstStyle>
+          <a:p>
+            <a:endParaRPr lang="en-US"/>
+          </a:p>
+        </p:txBody>
+      </p:sp>
+      <p:sp>
+        <p:nvSpPr>
+          <p:cNvPr id="3" name="Date Placeholder 2"/>
+          <p:cNvSpPr>
+            <a:spLocks noGrp="1"/>
+          </p:cNvSpPr>
+          <p:nvPr>
+            <p:ph type="dt" idx="1"/>
+          </p:nvPr>
+        </p:nvSpPr>
+        <p:spPr>
+          <a:xfrm>
+            <a:off x="3884613" y="0"/>
+            <a:ext cx="2971800" cy="458788"/>
+          </a:xfrm>
+          <a:prstGeom prst="rect">
+            <a:avLst/>
+          </a:prstGeom>
+        </p:spPr>
+        <p:txBody>
+          <a:bodyPr vert="horz" lIns="91440" tIns="45720" rIns="91440" bIns="45720" rtlCol="0"/>
+          <a:lstStyle>
+            <a:lvl1pPr algn="r">
+              <a:defRPr sz="1200"/>
+            </a:lvl1pPr>
+          </a:lstStyle>
+          <a:p>
+            <a:fld id="{5282F153-3F37-0F45-9E97-73ACFA13230C}" type="datetimeFigureOut">
+              <a:rPr lang="en-US"/>
+              <a:t>7/23/19</a:t>
+            </a:fld>
+            <a:endParaRPr lang="en-US"/>
+          </a:p>
+        </p:txBody>
+      </p:sp>
+      <p:sp>
+        <p:nvSpPr>
+          <p:cNvPr id="4" name="Slide Image Placeholder 3"/>
+          <p:cNvSpPr>
+            <a:spLocks noGrp="1" noRot="1" noChangeAspect="1"/>
+          </p:cNvSpPr>
+          <p:nvPr>
+            <p:ph type="sldImg" idx="2"/>
+          </p:nvPr>
+        </p:nvSpPr>
+        <p:spPr>
+          <a:xfrm>
+            <a:off x="685800" y="1143000"/>
+            <a:ext cx="5486400" cy="3086100"/>
+          </a:xfrm>
+          <a:prstGeom prst="rect">
+            <a:avLst/>
+          </a:prstGeom>
+          <a:noFill/>
+          <a:ln w="12700">
+            <a:solidFill>
+              <a:prstClr val="black"/>
+            </a:solidFill>
+          </a:ln>
+        </p:spPr>
+        <p:txBody>
+          <a:bodyPr vert="horz" lIns="91440" tIns="45720" rIns="91440" bIns="45720" rtlCol="0" anchor="ctr"/>
+          <a:lstStyle/>
+          <a:p>
+            <a:endParaRPr lang="en-US"/>
+          </a:p>
+        </p:txBody>
+      </p:sp>
+      <p:sp>
+        <p:nvSpPr>
+          <p:cNvPr id="5" name="Notes Placeholder 4"/>
+          <p:cNvSpPr>
+            <a:spLocks noGrp="1"/>
+          </p:cNvSpPr>
+          <p:nvPr>
+            <p:ph type="body" sz="quarter" idx="3"/>
+          </p:nvPr>
+        </p:nvSpPr>
+        <p:spPr>
+          <a:xfrm>
+            <a:off x="685800" y="4400550"/>
+            <a:ext cx="5486400" cy="3600450"/>
+          </a:xfrm>
+          <a:prstGeom prst="rect">
+            <a:avLst/>
+          </a:prstGeom>
+        </p:spPr>
+        <p:txBody>
+          <a:bodyPr vert="horz" lIns="91440" tIns="45720" rIns="91440" bIns="45720" rtlCol="0"/>
+          <a:lstStyle/>
+          <a:p>
+            <a:pPr lvl="0"/>
+            <a:r>
+              <a:rPr lang="en-US"/>
+              <a:t>Click to edit Master text styles</a:t>
+            </a:r>
+          </a:p>
+          <a:p>
+            <a:pPr lvl="1"/>
+            <a:r>
+              <a:rPr lang="en-US"/>
+              <a:t>Second level</a:t>
+            </a:r>
+          </a:p>
+          <a:p>
+            <a:pPr lvl="2"/>
+            <a:r>
+              <a:rPr lang="en-US"/>
+              <a:t>Third level</a:t>
+            </a:r>
+          </a:p>
+          <a:p>
+            <a:pPr lvl="3"/>
+            <a:r>
+              <a:rPr lang="en-US"/>
+              <a:t>Fourth level</a:t>
+            </a:r>
+          </a:p>
+          <a:p>
+            <a:pPr lvl="4"/>
+            <a:r>
+              <a:rPr lang="en-US"/>
+              <a:t>Fifth level</a:t>
+            </a:r>
+          </a:p>
+        </p:txBody>
+      </p:sp>
+      <p:sp>
+        <p:nvSpPr>
+          <p:cNvPr id="6" name="Footer Placeholder 5"/>
+          <p:cNvSpPr>
+            <a:spLocks noGrp="1"/>
+          </p:cNvSpPr>
+          <p:nvPr>
+            <p:ph type="ftr" sz="quarter" idx="4"/>
+          </p:nvPr>
+        </p:nvSpPr>
+        <p:spPr>
+          <a:xfrm>
+            <a:off x="0" y="8685213"/>
+            <a:ext cx="2971800" cy="458787"/>
+          </a:xfrm>
+          <a:prstGeom prst="rect">
+            <a:avLst/>
+          </a:prstGeom>
+        </p:spPr>
+        <p:txBody>
+          <a:bodyPr vert="horz" lIns="91440" tIns="45720" rIns="91440" bIns="45720" rtlCol="0" anchor="b"/>
+          <a:lstStyle>
+            <a:lvl1pPr algn="l">
+              <a:defRPr sz="1200"/>
+            </a:lvl1pPr>
+          </a:lstStyle>
+          <a:p>
+            <a:endParaRPr lang="en-US"/>
+          </a:p>
+        </p:txBody>
+      </p:sp>
+      <p:sp>
+        <p:nvSpPr>
+          <p:cNvPr id="7" name="Slide Number Placeholder 6"/>
+          <p:cNvSpPr>
+            <a:spLocks noGrp="1"/>
+          </p:cNvSpPr>
+          <p:nvPr>
+            <p:ph type="sldNum" sz="quarter" idx="5"/>
+          </p:nvPr>
+        </p:nvSpPr>
+        <p:spPr>
+          <a:xfrm>
+            <a:off x="3884613" y="8685213"/>
+            <a:ext cx="2971800" cy="458787"/>
+          </a:xfrm>
+          <a:prstGeom prst="rect">
+            <a:avLst/>
+          </a:prstGeom>
+        </p:spPr>
+        <p:txBody>
+          <a:bodyPr vert="horz" lIns="91440" tIns="45720" rIns="91440" bIns="45720" rtlCol="0" anchor="b"/>
+          <a:lstStyle>
+            <a:lvl1pPr algn="r">
+              <a:defRPr sz="1200"/>
+            </a:lvl1pPr>
+          </a:lstStyle>
+          <a:p>
+            <a:fld id="{CE5E9CC1-C706-0F49-92D6-E571CC5EEA8F}" type="slidenum">
+              <a:rPr lang="en-US"/>
+              <a:t>‹#›</a:t>
+            </a:fld>
+            <a:endParaRPr lang="en-US"/>
+          </a:p>
+        </p:txBody>
+      </p:sp>
     </p:spTree>
     <p:extLst>
       <p:ext uri="{BB962C8B-B14F-4D97-AF65-F5344CB8AC3E}">
-        <p14:creationId xmlns:p14="http://schemas.microsoft.com/office/powerpoint/2010/main" val="274172426"/>
+        <p14:creationId xmlns:p14="http://schemas.microsoft.com/office/powerpoint/2010/main" val="1024086991"/>
       </p:ext>
     </p:extLst>
   </p:cSld>
@@ -295,6 +511,10 @@
           <a:bodyPr/>
           <a:lstStyle/>
           <a:p>
+            <a:r>
+              <a:rPr lang="en-US" dirty="0"/>
+              <a:t/>
+            </a:r>
             <a:endParaRPr lang="en-US" dirty="0"/>
           </a:p>
         </p:txBody>
@@ -379,6 +599,10 @@
           <a:bodyPr/>
           <a:lstStyle/>
           <a:p>
+            <a:r>
+              <a:rPr lang="en-US" dirty="0"/>
+              <a:t/>
+            </a:r>
             <a:endParaRPr lang="en-US" dirty="0"/>
           </a:p>
         </p:txBody>
@@ -463,6 +687,10 @@
           <a:bodyPr/>
           <a:lstStyle/>
           <a:p>
+            <a:r>
+              <a:rPr lang="en-US" dirty="0"/>
+              <a:t/>
+            </a:r>
             <a:endParaRPr lang="en-US" dirty="0"/>
           </a:p>
         </p:txBody>
@@ -547,6 +775,10 @@
           <a:bodyPr/>
           <a:lstStyle/>
           <a:p>
+            <a:r>
+              <a:rPr lang="en-US" dirty="0"/>
+              <a:t/>
+            </a:r>
             <a:endParaRPr lang="en-US" dirty="0"/>
           </a:p>
         </p:txBody>
@@ -569,258 +801,6 @@
             <a:fld id="{F7021451-1387-4CA6-816F-3879F97B5CBC}" type="slidenum">
               <a:rPr lang="en-US"/>
               <a:t>12</a:t>
-            </a:fld>
-            <a:endParaRPr lang="en-US"/>
-          </a:p>
-        </p:txBody>
-      </p:sp>
-    </p:spTree>
-    <p:extLst>
-      <p:ext uri="{BB962C8B-B14F-4D97-AF65-F5344CB8AC3E}">
-        <p14:creationId xmlns:p14="http://schemas.microsoft.com/office/powerpoint/2010/main" val="1024086991"/>
-      </p:ext>
-    </p:extLst>
-  </p:cSld>
-  <p:clrMapOvr>
-    <a:masterClrMapping/>
-  </p:clrMapOvr>
-</p:notes>
-</file>
-
-<file path=ppt/notesSlides/notesSlide13.xml><?xml version="1.0" encoding="utf-8"?>
-<p:notes xmlns:a="http://schemas.openxmlformats.org/drawingml/2006/main" xmlns:r="http://schemas.openxmlformats.org/officeDocument/2006/relationships" xmlns:p="http://schemas.openxmlformats.org/presentationml/2006/main">
-  <p:cSld>
-    <p:spTree>
-      <p:nvGrpSpPr>
-        <p:cNvPr id="1" name=""/>
-        <p:cNvGrpSpPr/>
-        <p:nvPr/>
-      </p:nvGrpSpPr>
-      <p:grpSpPr>
-        <a:xfrm>
-          <a:off x="0" y="0"/>
-          <a:ext cx="0" cy="0"/>
-          <a:chOff x="0" y="0"/>
-          <a:chExt cx="0" cy="0"/>
-        </a:xfrm>
-      </p:grpSpPr>
-      <p:sp>
-        <p:nvSpPr>
-          <p:cNvPr id="2" name="Slide Image Placeholder 1"/>
-          <p:cNvSpPr>
-            <a:spLocks noGrp="1" noRot="1" noChangeAspect="1"/>
-          </p:cNvSpPr>
-          <p:nvPr>
-            <p:ph type="sldImg"/>
-          </p:nvPr>
-        </p:nvSpPr>
-        <p:spPr/>
-      </p:sp>
-      <p:sp>
-        <p:nvSpPr>
-          <p:cNvPr id="3" name="Notes Placeholder 2"/>
-          <p:cNvSpPr>
-            <a:spLocks noGrp="1"/>
-          </p:cNvSpPr>
-          <p:nvPr>
-            <p:ph type="body" idx="1"/>
-          </p:nvPr>
-        </p:nvSpPr>
-        <p:spPr/>
-        <p:txBody>
-          <a:bodyPr/>
-          <a:lstStyle/>
-          <a:p>
-            <a:endParaRPr lang="en-US" dirty="0"/>
-          </a:p>
-        </p:txBody>
-      </p:sp>
-      <p:sp>
-        <p:nvSpPr>
-          <p:cNvPr id="4" name="Slide Number Placeholder 3"/>
-          <p:cNvSpPr>
-            <a:spLocks noGrp="1"/>
-          </p:cNvSpPr>
-          <p:nvPr>
-            <p:ph type="sldNum" sz="quarter" idx="10"/>
-          </p:nvPr>
-        </p:nvSpPr>
-        <p:spPr/>
-        <p:txBody>
-          <a:bodyPr/>
-          <a:lstStyle/>
-          <a:p>
-            <a:fld id="{F7021451-1387-4CA6-816F-3879F97B5CBC}" type="slidenum">
-              <a:rPr lang="en-US"/>
-              <a:t>13</a:t>
-            </a:fld>
-            <a:endParaRPr lang="en-US"/>
-          </a:p>
-        </p:txBody>
-      </p:sp>
-    </p:spTree>
-    <p:extLst>
-      <p:ext uri="{BB962C8B-B14F-4D97-AF65-F5344CB8AC3E}">
-        <p14:creationId xmlns:p14="http://schemas.microsoft.com/office/powerpoint/2010/main" val="1024086991"/>
-      </p:ext>
-    </p:extLst>
-  </p:cSld>
-  <p:clrMapOvr>
-    <a:masterClrMapping/>
-  </p:clrMapOvr>
-</p:notes>
-</file>
-
-<file path=ppt/notesSlides/notesSlide14.xml><?xml version="1.0" encoding="utf-8"?>
-<p:notes xmlns:a="http://schemas.openxmlformats.org/drawingml/2006/main" xmlns:r="http://schemas.openxmlformats.org/officeDocument/2006/relationships" xmlns:p="http://schemas.openxmlformats.org/presentationml/2006/main">
-  <p:cSld>
-    <p:spTree>
-      <p:nvGrpSpPr>
-        <p:cNvPr id="1" name=""/>
-        <p:cNvGrpSpPr/>
-        <p:nvPr/>
-      </p:nvGrpSpPr>
-      <p:grpSpPr>
-        <a:xfrm>
-          <a:off x="0" y="0"/>
-          <a:ext cx="0" cy="0"/>
-          <a:chOff x="0" y="0"/>
-          <a:chExt cx="0" cy="0"/>
-        </a:xfrm>
-      </p:grpSpPr>
-      <p:sp>
-        <p:nvSpPr>
-          <p:cNvPr id="2" name="Slide Image Placeholder 1"/>
-          <p:cNvSpPr>
-            <a:spLocks noGrp="1" noRot="1" noChangeAspect="1"/>
-          </p:cNvSpPr>
-          <p:nvPr>
-            <p:ph type="sldImg"/>
-          </p:nvPr>
-        </p:nvSpPr>
-        <p:spPr/>
-      </p:sp>
-      <p:sp>
-        <p:nvSpPr>
-          <p:cNvPr id="3" name="Notes Placeholder 2"/>
-          <p:cNvSpPr>
-            <a:spLocks noGrp="1"/>
-          </p:cNvSpPr>
-          <p:nvPr>
-            <p:ph type="body" idx="1"/>
-          </p:nvPr>
-        </p:nvSpPr>
-        <p:spPr/>
-        <p:txBody>
-          <a:bodyPr/>
-          <a:lstStyle/>
-          <a:p>
-            <a:endParaRPr lang="en-US" dirty="0"/>
-          </a:p>
-        </p:txBody>
-      </p:sp>
-      <p:sp>
-        <p:nvSpPr>
-          <p:cNvPr id="4" name="Slide Number Placeholder 3"/>
-          <p:cNvSpPr>
-            <a:spLocks noGrp="1"/>
-          </p:cNvSpPr>
-          <p:nvPr>
-            <p:ph type="sldNum" sz="quarter" idx="10"/>
-          </p:nvPr>
-        </p:nvSpPr>
-        <p:spPr/>
-        <p:txBody>
-          <a:bodyPr/>
-          <a:lstStyle/>
-          <a:p>
-            <a:fld id="{F7021451-1387-4CA6-816F-3879F97B5CBC}" type="slidenum">
-              <a:rPr lang="en-US"/>
-              <a:t>14</a:t>
-            </a:fld>
-            <a:endParaRPr lang="en-US"/>
-          </a:p>
-        </p:txBody>
-      </p:sp>
-    </p:spTree>
-    <p:extLst>
-      <p:ext uri="{BB962C8B-B14F-4D97-AF65-F5344CB8AC3E}">
-        <p14:creationId xmlns:p14="http://schemas.microsoft.com/office/powerpoint/2010/main" val="1024086991"/>
-      </p:ext>
-    </p:extLst>
-  </p:cSld>
-  <p:clrMapOvr>
-    <a:masterClrMapping/>
-  </p:clrMapOvr>
-</p:notes>
-</file>
-
-<file path=ppt/notesSlides/notesSlide15.xml><?xml version="1.0" encoding="utf-8"?>
-<p:notes xmlns:a="http://schemas.openxmlformats.org/drawingml/2006/main" xmlns:r="http://schemas.openxmlformats.org/officeDocument/2006/relationships" xmlns:p="http://schemas.openxmlformats.org/presentationml/2006/main">
-  <p:cSld>
-    <p:spTree>
-      <p:nvGrpSpPr>
-        <p:cNvPr id="1" name=""/>
-        <p:cNvGrpSpPr/>
-        <p:nvPr/>
-      </p:nvGrpSpPr>
-      <p:grpSpPr>
-        <a:xfrm>
-          <a:off x="0" y="0"/>
-          <a:ext cx="0" cy="0"/>
-          <a:chOff x="0" y="0"/>
-          <a:chExt cx="0" cy="0"/>
-        </a:xfrm>
-      </p:grpSpPr>
-      <p:sp>
-        <p:nvSpPr>
-          <p:cNvPr id="2" name="Slide Image Placeholder 1"/>
-          <p:cNvSpPr>
-            <a:spLocks noGrp="1" noRot="1" noChangeAspect="1"/>
-          </p:cNvSpPr>
-          <p:nvPr>
-            <p:ph type="sldImg"/>
-          </p:nvPr>
-        </p:nvSpPr>
-        <p:spPr/>
-      </p:sp>
-      <p:sp>
-        <p:nvSpPr>
-          <p:cNvPr id="3" name="Notes Placeholder 2"/>
-          <p:cNvSpPr>
-            <a:spLocks noGrp="1"/>
-          </p:cNvSpPr>
-          <p:nvPr>
-            <p:ph type="body" idx="1"/>
-          </p:nvPr>
-        </p:nvSpPr>
-        <p:spPr/>
-        <p:txBody>
-          <a:bodyPr/>
-          <a:lstStyle/>
-          <a:p>
-            <a:endParaRPr lang="en-US" dirty="0"/>
-          </a:p>
-        </p:txBody>
-      </p:sp>
-      <p:sp>
-        <p:nvSpPr>
-          <p:cNvPr id="4" name="Slide Number Placeholder 3"/>
-          <p:cNvSpPr>
-            <a:spLocks noGrp="1"/>
-          </p:cNvSpPr>
-          <p:nvPr>
-            <p:ph type="sldNum" sz="quarter" idx="10"/>
-          </p:nvPr>
-        </p:nvSpPr>
-        <p:spPr/>
-        <p:txBody>
-          <a:bodyPr/>
-          <a:lstStyle/>
-          <a:p>
-            <a:fld id="{F7021451-1387-4CA6-816F-3879F97B5CBC}" type="slidenum">
-              <a:rPr lang="en-US"/>
-              <a:t>15</a:t>
             </a:fld>
             <a:endParaRPr lang="en-US"/>
           </a:p>
@@ -883,6 +863,10 @@
           <a:bodyPr/>
           <a:lstStyle/>
           <a:p>
+            <a:r>
+              <a:rPr lang="en-US" dirty="0"/>
+              <a:t/>
+            </a:r>
             <a:endParaRPr lang="en-US" dirty="0"/>
           </a:p>
         </p:txBody>
@@ -967,6 +951,10 @@
           <a:bodyPr/>
           <a:lstStyle/>
           <a:p>
+            <a:r>
+              <a:rPr lang="en-US" dirty="0"/>
+              <a:t/>
+            </a:r>
             <a:endParaRPr lang="en-US" dirty="0"/>
           </a:p>
         </p:txBody>
@@ -1051,6 +1039,10 @@
           <a:bodyPr/>
           <a:lstStyle/>
           <a:p>
+            <a:r>
+              <a:rPr lang="en-US" dirty="0"/>
+              <a:t/>
+            </a:r>
             <a:endParaRPr lang="en-US" dirty="0"/>
           </a:p>
         </p:txBody>
@@ -1135,6 +1127,10 @@
           <a:bodyPr/>
           <a:lstStyle/>
           <a:p>
+            <a:r>
+              <a:rPr lang="en-US" dirty="0"/>
+              <a:t/>
+            </a:r>
             <a:endParaRPr lang="en-US" dirty="0"/>
           </a:p>
         </p:txBody>
@@ -1219,6 +1215,10 @@
           <a:bodyPr/>
           <a:lstStyle/>
           <a:p>
+            <a:r>
+              <a:rPr lang="en-US" dirty="0"/>
+              <a:t/>
+            </a:r>
             <a:endParaRPr lang="en-US" dirty="0"/>
           </a:p>
         </p:txBody>
@@ -1303,6 +1303,10 @@
           <a:bodyPr/>
           <a:lstStyle/>
           <a:p>
+            <a:r>
+              <a:rPr lang="en-US" dirty="0"/>
+              <a:t/>
+            </a:r>
             <a:endParaRPr lang="en-US" dirty="0"/>
           </a:p>
         </p:txBody>
@@ -1387,6 +1391,10 @@
           <a:bodyPr/>
           <a:lstStyle/>
           <a:p>
+            <a:r>
+              <a:rPr lang="en-US" dirty="0"/>
+              <a:t/>
+            </a:r>
             <a:endParaRPr lang="en-US" dirty="0"/>
           </a:p>
         </p:txBody>
@@ -1471,6 +1479,10 @@
           <a:bodyPr/>
           <a:lstStyle/>
           <a:p>
+            <a:r>
+              <a:rPr lang="en-US" dirty="0"/>
+              <a:t/>
+            </a:r>
             <a:endParaRPr lang="en-US" dirty="0"/>
           </a:p>
         </p:txBody>
@@ -1544,11 +1556,6 @@
 <file path=ppt/slideMasters/slideMaster1.xml><?xml version="1.0" encoding="utf-8"?>
 <p:sldMaster xmlns:a="http://schemas.openxmlformats.org/drawingml/2006/main" xmlns:r="http://schemas.openxmlformats.org/officeDocument/2006/relationships" xmlns:p="http://schemas.openxmlformats.org/presentationml/2006/main">
   <p:cSld>
-    <p:bg>
-      <p:bgRef idx="1001">
-        <a:schemeClr val="bg1"/>
-      </p:bgRef>
-    </p:bg>
     <p:spTree>
       <p:nvGrpSpPr>
         <p:cNvPr id="1" name=""/>
@@ -1831,7 +1838,6 @@
         <a:solidFill>
           <a:srgbClr val="1A237E"/>
         </a:solidFill>
-        <a:effectLst/>
       </p:bgPr>
     </p:bg>
     <p:spTree>
@@ -1869,7 +1875,7 @@
           <a:bodyPr wrap="square" rtlCol="0" anchor="ctr"/>
           <a:lstStyle/>
           <a:p>
-            <a:pPr marL="0" indent="0">
+            <a:pPr indent="0" marL="0">
               <a:buNone/>
             </a:pPr>
             <a:r>
@@ -1908,7 +1914,7 @@
           <a:bodyPr wrap="square" rtlCol="0" anchor="ctr"/>
           <a:lstStyle/>
           <a:p>
-            <a:pPr marL="0" indent="0" algn="l">
+            <a:pPr algn="l" indent="0" marL="0">
               <a:buNone/>
             </a:pPr>
             <a:r>
@@ -1950,13 +1956,6 @@
             <a:prstDash val="solid"/>
           </a:ln>
         </p:spPr>
-        <p:txBody>
-          <a:bodyPr/>
-          <a:lstStyle/>
-          <a:p>
-            <a:endParaRPr lang="es-ES"/>
-          </a:p>
-        </p:txBody>
       </p:sp>
       <p:sp>
         <p:nvSpPr>
@@ -1979,11 +1978,11 @@
           <a:bodyPr wrap="square" rtlCol="0" anchor="ctr"/>
           <a:lstStyle/>
           <a:p>
-            <a:pPr marL="0" indent="0">
-              <a:buNone/>
-            </a:pPr>
-            <a:r>
-              <a:rPr lang="en-US" sz="1900" i="1" dirty="0">
+            <a:pPr indent="0" marL="0">
+              <a:buNone/>
+            </a:pPr>
+            <a:r>
+              <a:rPr lang="en-US" sz="2000" i="1" dirty="0">
                 <a:solidFill>
                   <a:srgbClr val="FFFFFF"/>
                 </a:solidFill>
@@ -1993,7 +1992,7 @@
               </a:rPr>
               <a:t>Tema 5 — Gobierno de la nube</a:t>
             </a:r>
-            <a:endParaRPr lang="en-US" sz="1900" dirty="0"/>
+            <a:endParaRPr lang="en-US" sz="2000" dirty="0"/>
           </a:p>
         </p:txBody>
       </p:sp>
@@ -2046,13 +2045,6 @@
             <a:prstDash val="solid"/>
           </a:ln>
         </p:spPr>
-        <p:txBody>
-          <a:bodyPr/>
-          <a:lstStyle/>
-          <a:p>
-            <a:endParaRPr lang="es-ES"/>
-          </a:p>
-        </p:txBody>
       </p:sp>
       <p:sp>
         <p:nvSpPr>
@@ -2075,7 +2067,7 @@
           <a:bodyPr wrap="square" rtlCol="0" anchor="ctr"/>
           <a:lstStyle/>
           <a:p>
-            <a:pPr marL="0" indent="0">
+            <a:pPr indent="0" marL="0">
               <a:buNone/>
             </a:pPr>
             <a:r>
@@ -2087,7 +2079,7 @@
                 <a:ea typeface="Arial" pitchFamily="34" charset="-122"/>
                 <a:cs typeface="Arial" pitchFamily="34" charset="-120"/>
               </a:rPr>
-              <a:t>Principio de mínimo privilegio</a:t>
+              <a:t>Gestión de secretos: nunca en el código ni el repositorio</a:t>
             </a:r>
             <a:endParaRPr lang="en-US" sz="2400" dirty="0"/>
           </a:p>
@@ -2114,7 +2106,7 @@
           <a:bodyPr wrap="square" rtlCol="0" anchor="ctr"/>
           <a:lstStyle/>
           <a:p>
-            <a:pPr marL="0" indent="0" algn="r">
+            <a:pPr algn="r" indent="0" marL="0">
               <a:buNone/>
             </a:pPr>
             <a:r>
@@ -2134,14 +2126,39 @@
       </p:sp>
       <p:sp>
         <p:nvSpPr>
-          <p:cNvPr id="5" name="Text 3"/>
-          <p:cNvSpPr/>
-          <p:nvPr/>
-        </p:nvSpPr>
-        <p:spPr>
-          <a:xfrm>
-            <a:off x="548640" y="1188720"/>
-            <a:ext cx="11091672" cy="822960"/>
+          <p:cNvPr id="5" name="Shape 3"/>
+          <p:cNvSpPr/>
+          <p:nvPr/>
+        </p:nvSpPr>
+        <p:spPr>
+          <a:xfrm>
+            <a:off x="548640" y="1143000"/>
+            <a:ext cx="11091672" cy="868680"/>
+          </a:xfrm>
+          <a:prstGeom prst="roundRect">
+            <a:avLst/>
+          </a:prstGeom>
+          <a:solidFill>
+            <a:srgbClr val="FFF8E1"/>
+          </a:solidFill>
+          <a:ln w="19050">
+            <a:solidFill>
+              <a:srgbClr val="FFA000"/>
+            </a:solidFill>
+            <a:prstDash val="solid"/>
+          </a:ln>
+        </p:spPr>
+      </p:sp>
+      <p:sp>
+        <p:nvSpPr>
+          <p:cNvPr id="6" name="Text 4"/>
+          <p:cNvSpPr/>
+          <p:nvPr/>
+        </p:nvSpPr>
+        <p:spPr>
+          <a:xfrm>
+            <a:off x="822960" y="1234440"/>
+            <a:ext cx="10543032" cy="685800"/>
           </a:xfrm>
           <a:prstGeom prst="rect">
             <a:avLst/>
@@ -2150,14 +2167,14 @@
           <a:ln/>
         </p:spPr>
         <p:txBody>
-          <a:bodyPr wrap="square" rtlCol="0" anchor="t"/>
-          <a:lstStyle/>
-          <a:p>
-            <a:pPr marL="0" indent="0">
-              <a:buNone/>
-            </a:pPr>
-            <a:r>
-              <a:rPr lang="en-US" sz="1800" dirty="0">
+          <a:bodyPr wrap="square" rtlCol="0" anchor="ctr"/>
+          <a:lstStyle/>
+          <a:p>
+            <a:pPr indent="0" marL="0">
+              <a:buNone/>
+            </a:pPr>
+            <a:r>
+              <a:rPr lang="en-US" sz="1500" dirty="0">
                 <a:solidFill>
                   <a:srgbClr val="212121"/>
                 </a:solidFill>
@@ -2165,22 +2182,22 @@
                 <a:ea typeface="Arial" pitchFamily="34" charset="-122"/>
                 <a:cs typeface="Arial" pitchFamily="34" charset="-120"/>
               </a:rPr>
-              <a:t>Una identidad debe tener exactamente los permisos que necesita para su trabajo, ni uno más. No es una recomendación abstracta — tiene un coste medible cuando se ignora:</a:t>
-            </a:r>
-            <a:endParaRPr lang="en-US" sz="1800" dirty="0"/>
-          </a:p>
-        </p:txBody>
-      </p:sp>
-      <p:sp>
-        <p:nvSpPr>
-          <p:cNvPr id="6" name="Shape 4"/>
+              <a:t>Ya aplicaste esta regla en el Tema 3 con la contraseña de la base de datos — hoy se generaliza a cualquier secreto: claves de API, tokens, certificados.</a:t>
+            </a:r>
+            <a:endParaRPr lang="en-US" sz="1500" dirty="0"/>
+          </a:p>
+        </p:txBody>
+      </p:sp>
+      <p:sp>
+        <p:nvSpPr>
+          <p:cNvPr id="7" name="Shape 5"/>
           <p:cNvSpPr/>
           <p:nvPr/>
         </p:nvSpPr>
         <p:spPr>
           <a:xfrm>
             <a:off x="548640" y="2331720"/>
-            <a:ext cx="5340096" cy="1005840"/>
+            <a:ext cx="4174236" cy="777240"/>
           </a:xfrm>
           <a:prstGeom prst="roundRect">
             <a:avLst/>
@@ -2195,24 +2212,17 @@
             <a:prstDash val="solid"/>
           </a:ln>
         </p:spPr>
-        <p:txBody>
-          <a:bodyPr/>
-          <a:lstStyle/>
-          <a:p>
-            <a:endParaRPr lang="es-ES"/>
-          </a:p>
-        </p:txBody>
-      </p:sp>
-      <p:sp>
-        <p:nvSpPr>
-          <p:cNvPr id="7" name="Text 5"/>
-          <p:cNvSpPr/>
-          <p:nvPr/>
-        </p:nvSpPr>
-        <p:spPr>
-          <a:xfrm>
-            <a:off x="594360" y="2377440"/>
-            <a:ext cx="5248656" cy="914400"/>
+      </p:sp>
+      <p:sp>
+        <p:nvSpPr>
+          <p:cNvPr id="8" name="Text 6"/>
+          <p:cNvSpPr/>
+          <p:nvPr/>
+        </p:nvSpPr>
+        <p:spPr>
+          <a:xfrm>
+            <a:off x="640080" y="2331720"/>
+            <a:ext cx="3991356" cy="777240"/>
           </a:xfrm>
           <a:prstGeom prst="rect">
             <a:avLst/>
@@ -2224,11 +2234,11 @@
           <a:bodyPr wrap="square" rtlCol="0" anchor="ctr"/>
           <a:lstStyle/>
           <a:p>
-            <a:pPr marL="0" indent="0" algn="ctr">
-              <a:buNone/>
-            </a:pPr>
-            <a:r>
-              <a:rPr lang="en-US" sz="1600" dirty="0">
+            <a:pPr algn="ctr" indent="0" marL="0">
+              <a:buNone/>
+            </a:pPr>
+            <a:r>
+              <a:rPr lang="en-US" sz="1400" dirty="0">
                 <a:solidFill>
                   <a:srgbClr val="212121"/>
                 </a:solidFill>
@@ -2236,65 +2246,9 @@
                 <a:ea typeface="Arial" pitchFamily="34" charset="-122"/>
                 <a:cs typeface="Arial" pitchFamily="34" charset="-120"/>
               </a:rPr>
-              <a:t>🔓 Permisos amplios</a:t>
-            </a:r>
-            <a:endParaRPr lang="en-US" sz="1600" dirty="0"/>
-          </a:p>
-          <a:p>
-            <a:pPr marL="0" indent="0" algn="ctr">
-              <a:buNone/>
-            </a:pPr>
-            <a:r>
-              <a:rPr lang="en-US" sz="1600" dirty="0">
-                <a:solidFill>
-                  <a:srgbClr val="212121"/>
-                </a:solidFill>
-                <a:latin typeface="Arial" pitchFamily="34" charset="0"/>
-                <a:ea typeface="Arial" pitchFamily="34" charset="-122"/>
-                <a:cs typeface="Arial" pitchFamily="34" charset="-120"/>
-              </a:rPr>
-              <a:t>«por si acaso»</a:t>
-            </a:r>
-            <a:endParaRPr lang="en-US" sz="1600" dirty="0"/>
-          </a:p>
-        </p:txBody>
-      </p:sp>
-      <p:sp>
-        <p:nvSpPr>
-          <p:cNvPr id="8" name="Text 6"/>
-          <p:cNvSpPr/>
-          <p:nvPr/>
-        </p:nvSpPr>
-        <p:spPr>
-          <a:xfrm>
-            <a:off x="5843016" y="2331720"/>
-            <a:ext cx="502920" cy="1005840"/>
-          </a:xfrm>
-          <a:prstGeom prst="rect">
-            <a:avLst/>
-          </a:prstGeom>
-          <a:noFill/>
-          <a:ln/>
-        </p:spPr>
-        <p:txBody>
-          <a:bodyPr wrap="square" rtlCol="0" anchor="ctr"/>
-          <a:lstStyle/>
-          <a:p>
-            <a:pPr marL="0" indent="0" algn="ctr">
-              <a:buNone/>
-            </a:pPr>
-            <a:r>
-              <a:rPr lang="en-US" sz="2200" b="1" dirty="0">
-                <a:solidFill>
-                  <a:srgbClr val="3949AB"/>
-                </a:solidFill>
-                <a:latin typeface="Arial" pitchFamily="34" charset="0"/>
-                <a:ea typeface="Arial" pitchFamily="34" charset="-122"/>
-                <a:cs typeface="Arial" pitchFamily="34" charset="-120"/>
-              </a:rPr>
-              <a:t>→</a:t>
-            </a:r>
-            <a:endParaRPr lang="en-US" sz="2200" dirty="0"/>
+              <a:t>🔑 Secreto</a:t>
+            </a:r>
+            <a:endParaRPr lang="en-US" sz="1400" dirty="0"/>
           </a:p>
         </p:txBody>
       </p:sp>
@@ -2306,8 +2260,8 @@
         </p:nvSpPr>
         <p:spPr>
           <a:xfrm>
-            <a:off x="6300216" y="2331720"/>
-            <a:ext cx="5340096" cy="1005840"/>
+            <a:off x="7466076" y="2331720"/>
+            <a:ext cx="4174236" cy="777240"/>
           </a:xfrm>
           <a:prstGeom prst="roundRect">
             <a:avLst/>
@@ -2322,13 +2276,6 @@
             <a:prstDash val="solid"/>
           </a:ln>
         </p:spPr>
-        <p:txBody>
-          <a:bodyPr/>
-          <a:lstStyle/>
-          <a:p>
-            <a:endParaRPr lang="es-ES"/>
-          </a:p>
-        </p:txBody>
       </p:sp>
       <p:sp>
         <p:nvSpPr>
@@ -2338,8 +2285,8 @@
         </p:nvSpPr>
         <p:spPr>
           <a:xfrm>
-            <a:off x="6345936" y="2377440"/>
-            <a:ext cx="5248656" cy="914400"/>
+            <a:off x="7557516" y="2331720"/>
+            <a:ext cx="3991356" cy="777240"/>
           </a:xfrm>
           <a:prstGeom prst="rect">
             <a:avLst/>
@@ -2351,11 +2298,11 @@
           <a:bodyPr wrap="square" rtlCol="0" anchor="ctr"/>
           <a:lstStyle/>
           <a:p>
-            <a:pPr marL="0" indent="0" algn="ctr">
-              <a:buNone/>
-            </a:pPr>
-            <a:r>
-              <a:rPr lang="en-US" sz="1600" dirty="0">
+            <a:pPr algn="ctr" indent="0" marL="0">
+              <a:buNone/>
+            </a:pPr>
+            <a:r>
+              <a:rPr lang="en-US" sz="1400" dirty="0">
                 <a:solidFill>
                   <a:srgbClr val="212121"/>
                 </a:solidFill>
@@ -2363,16 +2310,16 @@
                 <a:ea typeface="Arial" pitchFamily="34" charset="-122"/>
                 <a:cs typeface="Arial" pitchFamily="34" charset="-120"/>
               </a:rPr>
-              <a:t>⚠️ Cualquier fallo o filtración</a:t>
-            </a:r>
-            <a:endParaRPr lang="en-US" sz="1600" dirty="0"/>
-          </a:p>
-          <a:p>
-            <a:pPr marL="0" indent="0" algn="ctr">
-              <a:buNone/>
-            </a:pPr>
-            <a:r>
-              <a:rPr lang="en-US" sz="1600" dirty="0">
+              <a:t>❌ Escrito en el código</a:t>
+            </a:r>
+            <a:endParaRPr lang="en-US" sz="1400" dirty="0"/>
+          </a:p>
+          <a:p>
+            <a:pPr algn="ctr" indent="0" marL="0">
+              <a:buNone/>
+            </a:pPr>
+            <a:r>
+              <a:rPr lang="en-US" sz="1400" dirty="0">
                 <a:solidFill>
                   <a:srgbClr val="212121"/>
                 </a:solidFill>
@@ -2380,22 +2327,61 @@
                 <a:ea typeface="Arial" pitchFamily="34" charset="-122"/>
                 <a:cs typeface="Arial" pitchFamily="34" charset="-120"/>
               </a:rPr>
-              <a:t>tiene alcance mucho mayor</a:t>
-            </a:r>
-            <a:endParaRPr lang="en-US" sz="1600" dirty="0"/>
-          </a:p>
-        </p:txBody>
-      </p:sp>
-      <p:sp>
-        <p:nvSpPr>
-          <p:cNvPr id="11" name="Shape 9"/>
-          <p:cNvSpPr/>
-          <p:nvPr/>
-        </p:nvSpPr>
-        <p:spPr>
-          <a:xfrm>
-            <a:off x="548640" y="3611880"/>
-            <a:ext cx="5340096" cy="1005840"/>
+              <a:t>o fichero versionado</a:t>
+            </a:r>
+            <a:endParaRPr lang="en-US" sz="1400" dirty="0"/>
+          </a:p>
+        </p:txBody>
+      </p:sp>
+      <p:sp>
+        <p:nvSpPr>
+          <p:cNvPr id="11" name="Text 9"/>
+          <p:cNvSpPr/>
+          <p:nvPr/>
+        </p:nvSpPr>
+        <p:spPr>
+          <a:xfrm>
+            <a:off x="4722876" y="2331720"/>
+            <a:ext cx="2743200" cy="777240"/>
+          </a:xfrm>
+          <a:prstGeom prst="rect">
+            <a:avLst/>
+          </a:prstGeom>
+          <a:noFill/>
+          <a:ln/>
+        </p:spPr>
+        <p:txBody>
+          <a:bodyPr wrap="square" rtlCol="0" anchor="ctr"/>
+          <a:lstStyle/>
+          <a:p>
+            <a:pPr algn="ctr" indent="0" marL="0">
+              <a:buNone/>
+            </a:pPr>
+            <a:r>
+              <a:rPr lang="en-US" sz="1300" b="1" i="1" dirty="0">
+                <a:solidFill>
+                  <a:srgbClr val="3949AB"/>
+                </a:solidFill>
+                <a:latin typeface="Arial" pitchFamily="34" charset="0"/>
+                <a:ea typeface="Arial" pitchFamily="34" charset="-122"/>
+                <a:cs typeface="Arial" pitchFamily="34" charset="-120"/>
+              </a:rPr>
+              <a:t>malo →</a:t>
+            </a:r>
+            <a:endParaRPr lang="en-US" sz="1300" dirty="0"/>
+          </a:p>
+        </p:txBody>
+      </p:sp>
+      <p:sp>
+        <p:nvSpPr>
+          <p:cNvPr id="12" name="Shape 10"/>
+          <p:cNvSpPr/>
+          <p:nvPr/>
+        </p:nvSpPr>
+        <p:spPr>
+          <a:xfrm>
+            <a:off x="548640" y="3246120"/>
+            <a:ext cx="4174236" cy="777240"/>
           </a:xfrm>
           <a:prstGeom prst="roundRect">
             <a:avLst/>
@@ -2410,24 +2396,17 @@
             <a:prstDash val="solid"/>
           </a:ln>
         </p:spPr>
-        <p:txBody>
-          <a:bodyPr/>
-          <a:lstStyle/>
-          <a:p>
-            <a:endParaRPr lang="es-ES"/>
-          </a:p>
-        </p:txBody>
-      </p:sp>
-      <p:sp>
-        <p:nvSpPr>
-          <p:cNvPr id="12" name="Text 10"/>
-          <p:cNvSpPr/>
-          <p:nvPr/>
-        </p:nvSpPr>
-        <p:spPr>
-          <a:xfrm>
-            <a:off x="594360" y="3657600"/>
-            <a:ext cx="5248656" cy="914400"/>
+      </p:sp>
+      <p:sp>
+        <p:nvSpPr>
+          <p:cNvPr id="13" name="Text 11"/>
+          <p:cNvSpPr/>
+          <p:nvPr/>
+        </p:nvSpPr>
+        <p:spPr>
+          <a:xfrm>
+            <a:off x="640080" y="3246120"/>
+            <a:ext cx="3991356" cy="777240"/>
           </a:xfrm>
           <a:prstGeom prst="rect">
             <a:avLst/>
@@ -2439,11 +2418,11 @@
           <a:bodyPr wrap="square" rtlCol="0" anchor="ctr"/>
           <a:lstStyle/>
           <a:p>
-            <a:pPr marL="0" indent="0" algn="ctr">
-              <a:buNone/>
-            </a:pPr>
-            <a:r>
-              <a:rPr lang="en-US" sz="1600" dirty="0">
+            <a:pPr algn="ctr" indent="0" marL="0">
+              <a:buNone/>
+            </a:pPr>
+            <a:r>
+              <a:rPr lang="en-US" sz="1400" dirty="0">
                 <a:solidFill>
                   <a:srgbClr val="212121"/>
                 </a:solidFill>
@@ -2451,48 +2430,9 @@
                 <a:ea typeface="Arial" pitchFamily="34" charset="-122"/>
                 <a:cs typeface="Arial" pitchFamily="34" charset="-120"/>
               </a:rPr>
-              <a:t>🔒 Mínimo privilegio</a:t>
-            </a:r>
-            <a:endParaRPr lang="en-US" sz="1600" dirty="0"/>
-          </a:p>
-        </p:txBody>
-      </p:sp>
-      <p:sp>
-        <p:nvSpPr>
-          <p:cNvPr id="13" name="Text 11"/>
-          <p:cNvSpPr/>
-          <p:nvPr/>
-        </p:nvSpPr>
-        <p:spPr>
-          <a:xfrm>
-            <a:off x="5843016" y="3611880"/>
-            <a:ext cx="502920" cy="1005840"/>
-          </a:xfrm>
-          <a:prstGeom prst="rect">
-            <a:avLst/>
-          </a:prstGeom>
-          <a:noFill/>
-          <a:ln/>
-        </p:spPr>
-        <p:txBody>
-          <a:bodyPr wrap="square" rtlCol="0" anchor="ctr"/>
-          <a:lstStyle/>
-          <a:p>
-            <a:pPr marL="0" indent="0" algn="ctr">
-              <a:buNone/>
-            </a:pPr>
-            <a:r>
-              <a:rPr lang="en-US" sz="2200" b="1" dirty="0">
-                <a:solidFill>
-                  <a:srgbClr val="3949AB"/>
-                </a:solidFill>
-                <a:latin typeface="Arial" pitchFamily="34" charset="0"/>
-                <a:ea typeface="Arial" pitchFamily="34" charset="-122"/>
-                <a:cs typeface="Arial" pitchFamily="34" charset="-120"/>
-              </a:rPr>
-              <a:t>→</a:t>
-            </a:r>
-            <a:endParaRPr lang="en-US" sz="2200" dirty="0"/>
+              <a:t>🔑 Secreto</a:t>
+            </a:r>
+            <a:endParaRPr lang="en-US" sz="1400" dirty="0"/>
           </a:p>
         </p:txBody>
       </p:sp>
@@ -2504,8 +2444,8 @@
         </p:nvSpPr>
         <p:spPr>
           <a:xfrm>
-            <a:off x="6300216" y="3611880"/>
-            <a:ext cx="5340096" cy="1005840"/>
+            <a:off x="7466076" y="3246120"/>
+            <a:ext cx="4174236" cy="777240"/>
           </a:xfrm>
           <a:prstGeom prst="roundRect">
             <a:avLst/>
@@ -2520,13 +2460,6 @@
             <a:prstDash val="solid"/>
           </a:ln>
         </p:spPr>
-        <p:txBody>
-          <a:bodyPr/>
-          <a:lstStyle/>
-          <a:p>
-            <a:endParaRPr lang="es-ES"/>
-          </a:p>
-        </p:txBody>
       </p:sp>
       <p:sp>
         <p:nvSpPr>
@@ -2536,8 +2469,8 @@
         </p:nvSpPr>
         <p:spPr>
           <a:xfrm>
-            <a:off x="6345936" y="3657600"/>
-            <a:ext cx="5248656" cy="914400"/>
+            <a:off x="7557516" y="3246120"/>
+            <a:ext cx="3991356" cy="777240"/>
           </a:xfrm>
           <a:prstGeom prst="rect">
             <a:avLst/>
@@ -2549,11 +2482,11 @@
           <a:bodyPr wrap="square" rtlCol="0" anchor="ctr"/>
           <a:lstStyle/>
           <a:p>
-            <a:pPr marL="0" indent="0" algn="ctr">
-              <a:buNone/>
-            </a:pPr>
-            <a:r>
-              <a:rPr lang="en-US" sz="1600" dirty="0">
+            <a:pPr algn="ctr" indent="0" marL="0">
+              <a:buNone/>
+            </a:pPr>
+            <a:r>
+              <a:rPr lang="en-US" sz="1400" dirty="0">
                 <a:solidFill>
                   <a:srgbClr val="212121"/>
                 </a:solidFill>
@@ -2561,16 +2494,16 @@
                 <a:ea typeface="Arial" pitchFamily="34" charset="-122"/>
                 <a:cs typeface="Arial" pitchFamily="34" charset="-120"/>
               </a:rPr>
-              <a:t>✅ Un fallo queda contenido</a:t>
-            </a:r>
-            <a:endParaRPr lang="en-US" sz="1600" dirty="0"/>
-          </a:p>
-          <a:p>
-            <a:pPr marL="0" indent="0" algn="ctr">
-              <a:buNone/>
-            </a:pPr>
-            <a:r>
-              <a:rPr lang="en-US" sz="1600" dirty="0">
+              <a:t>✅ Secrets Manager</a:t>
+            </a:r>
+            <a:endParaRPr lang="en-US" sz="1400" dirty="0"/>
+          </a:p>
+          <a:p>
+            <a:pPr algn="ctr" indent="0" marL="0">
+              <a:buNone/>
+            </a:pPr>
+            <a:r>
+              <a:rPr lang="en-US" sz="1400" dirty="0">
                 <a:solidFill>
                   <a:srgbClr val="212121"/>
                 </a:solidFill>
@@ -2578,22 +2511,61 @@
                 <a:ea typeface="Arial" pitchFamily="34" charset="-122"/>
                 <a:cs typeface="Arial" pitchFamily="34" charset="-120"/>
               </a:rPr>
-              <a:t>al alcance estrictamente necesario</a:t>
-            </a:r>
-            <a:endParaRPr lang="en-US" sz="1600" dirty="0"/>
-          </a:p>
-        </p:txBody>
-      </p:sp>
-      <p:sp>
-        <p:nvSpPr>
-          <p:cNvPr id="16" name="Shape 14"/>
-          <p:cNvSpPr/>
-          <p:nvPr/>
-        </p:nvSpPr>
-        <p:spPr>
-          <a:xfrm>
-            <a:off x="548640" y="4846320"/>
-            <a:ext cx="11091672" cy="1143000"/>
+              <a:t>resuelto en tiempo de ejecución</a:t>
+            </a:r>
+            <a:endParaRPr lang="en-US" sz="1400" dirty="0"/>
+          </a:p>
+        </p:txBody>
+      </p:sp>
+      <p:sp>
+        <p:nvSpPr>
+          <p:cNvPr id="16" name="Text 14"/>
+          <p:cNvSpPr/>
+          <p:nvPr/>
+        </p:nvSpPr>
+        <p:spPr>
+          <a:xfrm>
+            <a:off x="4722876" y="3246120"/>
+            <a:ext cx="2743200" cy="777240"/>
+          </a:xfrm>
+          <a:prstGeom prst="rect">
+            <a:avLst/>
+          </a:prstGeom>
+          <a:noFill/>
+          <a:ln/>
+        </p:spPr>
+        <p:txBody>
+          <a:bodyPr wrap="square" rtlCol="0" anchor="ctr"/>
+          <a:lstStyle/>
+          <a:p>
+            <a:pPr algn="ctr" indent="0" marL="0">
+              <a:buNone/>
+            </a:pPr>
+            <a:r>
+              <a:rPr lang="en-US" sz="1300" b="1" i="1" dirty="0">
+                <a:solidFill>
+                  <a:srgbClr val="3949AB"/>
+                </a:solidFill>
+                <a:latin typeface="Arial" pitchFamily="34" charset="0"/>
+                <a:ea typeface="Arial" pitchFamily="34" charset="-122"/>
+                <a:cs typeface="Arial" pitchFamily="34" charset="-120"/>
+              </a:rPr>
+              <a:t>bueno →</a:t>
+            </a:r>
+            <a:endParaRPr lang="en-US" sz="1300" dirty="0"/>
+          </a:p>
+        </p:txBody>
+      </p:sp>
+      <p:sp>
+        <p:nvSpPr>
+          <p:cNvPr id="17" name="Shape 15"/>
+          <p:cNvSpPr/>
+          <p:nvPr/>
+        </p:nvSpPr>
+        <p:spPr>
+          <a:xfrm>
+            <a:off x="548640" y="4206240"/>
+            <a:ext cx="11091672" cy="1280160"/>
           </a:xfrm>
           <a:prstGeom prst="roundRect">
             <a:avLst/>
@@ -2608,24 +2580,17 @@
             <a:prstDash val="solid"/>
           </a:ln>
         </p:spPr>
-        <p:txBody>
-          <a:bodyPr/>
-          <a:lstStyle/>
-          <a:p>
-            <a:endParaRPr lang="es-ES"/>
-          </a:p>
-        </p:txBody>
-      </p:sp>
-      <p:sp>
-        <p:nvSpPr>
-          <p:cNvPr id="17" name="Text 15"/>
-          <p:cNvSpPr/>
-          <p:nvPr/>
-        </p:nvSpPr>
-        <p:spPr>
-          <a:xfrm>
-            <a:off x="822960" y="4956048"/>
-            <a:ext cx="10543032" cy="923544"/>
+      </p:sp>
+      <p:sp>
+        <p:nvSpPr>
+          <p:cNvPr id="18" name="Text 16"/>
+          <p:cNvSpPr/>
+          <p:nvPr/>
+        </p:nvSpPr>
+        <p:spPr>
+          <a:xfrm>
+            <a:off x="822960" y="4315968"/>
+            <a:ext cx="10543032" cy="1060704"/>
           </a:xfrm>
           <a:prstGeom prst="rect">
             <a:avLst/>
@@ -2637,11 +2602,11 @@
           <a:bodyPr wrap="square" rtlCol="0" anchor="t"/>
           <a:lstStyle/>
           <a:p>
-            <a:pPr marL="0" indent="0">
-              <a:buNone/>
-            </a:pPr>
-            <a:r>
-              <a:rPr lang="en-US" sz="1500" b="1" dirty="0">
+            <a:pPr indent="0" marL="0">
+              <a:buNone/>
+            </a:pPr>
+            <a:r>
+              <a:rPr lang="en-US" sz="1550" b="1" dirty="0">
                 <a:solidFill>
                   <a:srgbClr val="1A237E"/>
                 </a:solidFill>
@@ -2649,17 +2614,17 @@
                 <a:ea typeface="Arial" pitchFamily="34" charset="-122"/>
                 <a:cs typeface="Arial" pitchFamily="34" charset="-120"/>
               </a:rPr>
-              <a:t>⚠️ Un comodín de más es el error más común
+              <a:t>Un secreto filtrado sigue expuesto aunque lo borres después
 </a:t>
             </a:r>
-            <a:endParaRPr lang="en-US" sz="1500" dirty="0"/>
-          </a:p>
-          <a:p>
-            <a:pPr marL="0" indent="0">
-              <a:buNone/>
-            </a:pPr>
-            <a:r>
-              <a:rPr lang="en-US" sz="1400" dirty="0">
+            <a:endParaRPr lang="en-US" sz="1550" dirty="0"/>
+          </a:p>
+          <a:p>
+            <a:pPr indent="0" marL="0">
+              <a:buNone/>
+            </a:pPr>
+            <a:r>
+              <a:rPr lang="en-US" sz="1450" dirty="0">
                 <a:solidFill>
                   <a:srgbClr val="212121"/>
                 </a:solidFill>
@@ -2667,9 +2632,9 @@
                 <a:ea typeface="Arial" pitchFamily="34" charset="-122"/>
                 <a:cs typeface="Arial" pitchFamily="34" charset="-120"/>
               </a:rPr>
-              <a:t>"Action": "s3:*" en vez de "s3:GetObject" da permiso para borrar y sobrescribir todo el almacenamiento. Vas a encontrarte este error en las políticas que corrijas en la Actividad 5.2.</a:t>
-            </a:r>
-            <a:endParaRPr lang="en-US" sz="1500" dirty="0"/>
+              <a:t>El historial de Git conserva versiones anteriores — borrarlo en el commit siguiente no lo elimina. La única solución correcta es rotarlo, nunca solo quitarlo del código.</a:t>
+            </a:r>
+            <a:endParaRPr lang="en-US" sz="1550" dirty="0"/>
           </a:p>
         </p:txBody>
       </p:sp>
@@ -2722,13 +2687,6 @@
             <a:prstDash val="solid"/>
           </a:ln>
         </p:spPr>
-        <p:txBody>
-          <a:bodyPr/>
-          <a:lstStyle/>
-          <a:p>
-            <a:endParaRPr lang="es-ES"/>
-          </a:p>
-        </p:txBody>
       </p:sp>
       <p:sp>
         <p:nvSpPr>
@@ -2751,7 +2709,7 @@
           <a:bodyPr wrap="square" rtlCol="0" anchor="ctr"/>
           <a:lstStyle/>
           <a:p>
-            <a:pPr marL="0" indent="0">
+            <a:pPr indent="0" marL="0">
               <a:buNone/>
             </a:pPr>
             <a:r>
@@ -2763,7 +2721,7 @@
                 <a:ea typeface="Arial" pitchFamily="34" charset="-122"/>
                 <a:cs typeface="Arial" pitchFamily="34" charset="-120"/>
               </a:rPr>
-              <a:t>MFA: una segunda prueba de identidad</a:t>
+              <a:t>Registro de auditoría: quién, cuándo y desde dónde</a:t>
             </a:r>
             <a:endParaRPr lang="en-US" sz="2400" dirty="0"/>
           </a:p>
@@ -2790,7 +2748,7 @@
           <a:bodyPr wrap="square" rtlCol="0" anchor="ctr"/>
           <a:lstStyle/>
           <a:p>
-            <a:pPr marL="0" indent="0" algn="r">
+            <a:pPr algn="r" indent="0" marL="0">
               <a:buNone/>
             </a:pPr>
             <a:r>
@@ -2816,8 +2774,8 @@
         </p:nvSpPr>
         <p:spPr>
           <a:xfrm>
-            <a:off x="548640" y="1920240"/>
-            <a:ext cx="11091672" cy="1828800"/>
+            <a:off x="548640" y="1143000"/>
+            <a:ext cx="11091672" cy="868680"/>
           </a:xfrm>
           <a:prstGeom prst="roundRect">
             <a:avLst/>
@@ -2832,13 +2790,6 @@
             <a:prstDash val="solid"/>
           </a:ln>
         </p:spPr>
-        <p:txBody>
-          <a:bodyPr/>
-          <a:lstStyle/>
-          <a:p>
-            <a:endParaRPr lang="es-ES"/>
-          </a:p>
-        </p:txBody>
       </p:sp>
       <p:sp>
         <p:nvSpPr>
@@ -2848,8 +2799,8 @@
         </p:nvSpPr>
         <p:spPr>
           <a:xfrm>
-            <a:off x="822960" y="2011680"/>
-            <a:ext cx="10543032" cy="1645920"/>
+            <a:off x="822960" y="1234440"/>
+            <a:ext cx="10543032" cy="685800"/>
           </a:xfrm>
           <a:prstGeom prst="rect">
             <a:avLst/>
@@ -2861,11 +2812,11 @@
           <a:bodyPr wrap="square" rtlCol="0" anchor="ctr"/>
           <a:lstStyle/>
           <a:p>
-            <a:pPr marL="0" indent="0">
-              <a:buNone/>
-            </a:pPr>
-            <a:r>
-              <a:rPr lang="en-US" sz="2100" dirty="0">
+            <a:pPr indent="0" marL="0">
+              <a:buNone/>
+            </a:pPr>
+            <a:r>
+              <a:rPr lang="en-US" sz="1500" dirty="0">
                 <a:solidFill>
                   <a:srgbClr val="212121"/>
                 </a:solidFill>
@@ -2873,9 +2824,112 @@
                 <a:ea typeface="Arial" pitchFamily="34" charset="-122"/>
                 <a:cs typeface="Arial" pitchFamily="34" charset="-120"/>
               </a:rPr>
-              <a:t>El MFA (Multi-Factor Authentication) añade una segunda prueba de identidad —un código temporal, además de la contraseña— para las operaciones más sensibles. En el Learner Lab no lo configuras tú (la identidad ya viene resuelta por el rol asumido), pero en una cuenta real es la pieza que protege contra que una contraseña filtrada sea suficiente para entrar.</a:t>
-            </a:r>
-            <a:endParaRPr lang="en-US" sz="2100" dirty="0"/>
+              <a:t>CloudTrail guarda un histórico de quién ha hecho qué, cuándo y desde dónde — cada llamada a la API queda registrada, por consola o por CLI.</a:t>
+            </a:r>
+            <a:endParaRPr lang="en-US" sz="1500" dirty="0"/>
+          </a:p>
+        </p:txBody>
+      </p:sp>
+      <p:sp>
+        <p:nvSpPr>
+          <p:cNvPr id="7" name="Shape 5"/>
+          <p:cNvSpPr/>
+          <p:nvPr/>
+        </p:nvSpPr>
+        <p:spPr>
+          <a:xfrm>
+            <a:off x="548640" y="2331720"/>
+            <a:ext cx="11091672" cy="2103120"/>
+          </a:xfrm>
+          <a:prstGeom prst="roundRect">
+            <a:avLst/>
+          </a:prstGeom>
+          <a:solidFill>
+            <a:srgbClr val="E8EAF6"/>
+          </a:solidFill>
+          <a:ln w="15875">
+            <a:solidFill>
+              <a:srgbClr val="3949AB"/>
+            </a:solidFill>
+            <a:prstDash val="solid"/>
+          </a:ln>
+        </p:spPr>
+      </p:sp>
+      <p:sp>
+        <p:nvSpPr>
+          <p:cNvPr id="8" name="Text 6"/>
+          <p:cNvSpPr/>
+          <p:nvPr/>
+        </p:nvSpPr>
+        <p:spPr>
+          <a:xfrm>
+            <a:off x="731520" y="2404872"/>
+            <a:ext cx="10725912" cy="548640"/>
+          </a:xfrm>
+          <a:prstGeom prst="rect">
+            <a:avLst/>
+          </a:prstGeom>
+          <a:noFill/>
+          <a:ln/>
+        </p:spPr>
+        <p:txBody>
+          <a:bodyPr wrap="square" rtlCol="0" anchor="ctr"/>
+          <a:lstStyle/>
+          <a:p>
+            <a:pPr indent="0" marL="0">
+              <a:buNone/>
+            </a:pPr>
+            <a:r>
+              <a:rPr lang="en-US" sz="1900" b="1" dirty="0">
+                <a:solidFill>
+                  <a:srgbClr val="1A237E"/>
+                </a:solidFill>
+                <a:latin typeface="Arial" pitchFamily="34" charset="0"/>
+                <a:ea typeface="Arial" pitchFamily="34" charset="-122"/>
+                <a:cs typeface="Arial" pitchFamily="34" charset="-120"/>
+              </a:rPr>
+              <a:t>Auditoría aplicada a un caso real</a:t>
+            </a:r>
+            <a:endParaRPr lang="en-US" sz="1900" dirty="0"/>
+          </a:p>
+        </p:txBody>
+      </p:sp>
+      <p:sp>
+        <p:nvSpPr>
+          <p:cNvPr id="9" name="Text 7"/>
+          <p:cNvSpPr/>
+          <p:nvPr/>
+        </p:nvSpPr>
+        <p:spPr>
+          <a:xfrm>
+            <a:off x="731520" y="2953512"/>
+            <a:ext cx="10725912" cy="1408176"/>
+          </a:xfrm>
+          <a:prstGeom prst="rect">
+            <a:avLst/>
+          </a:prstGeom>
+          <a:noFill/>
+          <a:ln/>
+        </p:spPr>
+        <p:txBody>
+          <a:bodyPr wrap="square" rtlCol="0" anchor="t"/>
+          <a:lstStyle/>
+          <a:p>
+            <a:pPr indent="0" marL="0">
+              <a:buNone/>
+            </a:pPr>
+            <a:r>
+              <a:rPr lang="en-US" sz="1600" dirty="0">
+                <a:solidFill>
+                  <a:srgbClr val="212121"/>
+                </a:solidFill>
+                <a:latin typeface="Arial" pitchFamily="34" charset="0"/>
+                <a:ea typeface="Arial" pitchFamily="34" charset="-122"/>
+                <a:cs typeface="Arial" pitchFamily="34" charset="-120"/>
+              </a:rPr>
+              <a:t>Un grupo de seguridad tenía una regla que no debería estar ahí. Las métricas y los registros te dijeron qué estaba fallando; el registro de auditoría te dice quién cambió esa regla y cuándo — la pieza que faltaba para entender el origen, no solo el síntoma.</a:t>
+            </a:r>
+            <a:endParaRPr lang="en-US" sz="1600" dirty="0"/>
           </a:p>
         </p:txBody>
       </p:sp>
@@ -2928,13 +2982,6 @@
             <a:prstDash val="solid"/>
           </a:ln>
         </p:spPr>
-        <p:txBody>
-          <a:bodyPr/>
-          <a:lstStyle/>
-          <a:p>
-            <a:endParaRPr lang="es-ES"/>
-          </a:p>
-        </p:txBody>
       </p:sp>
       <p:sp>
         <p:nvSpPr>
@@ -2957,7 +3004,7 @@
           <a:bodyPr wrap="square" rtlCol="0" anchor="ctr"/>
           <a:lstStyle/>
           <a:p>
-            <a:pPr marL="0" indent="0">
+            <a:pPr indent="0" marL="0">
               <a:buNone/>
             </a:pPr>
             <a:r>
@@ -2969,7 +3016,7 @@
                 <a:ea typeface="Arial" pitchFamily="34" charset="-122"/>
                 <a:cs typeface="Arial" pitchFamily="34" charset="-120"/>
               </a:rPr>
-              <a:t>Gestión de secretos: nunca en el código</a:t>
+              <a:t>Ideas clave</a:t>
             </a:r>
             <a:endParaRPr lang="en-US" sz="2400" dirty="0"/>
           </a:p>
@@ -2996,7 +3043,7 @@
           <a:bodyPr wrap="square" rtlCol="0" anchor="ctr"/>
           <a:lstStyle/>
           <a:p>
-            <a:pPr marL="0" indent="0" algn="r">
+            <a:pPr algn="r" indent="0" marL="0">
               <a:buNone/>
             </a:pPr>
             <a:r>
@@ -3016,154 +3063,14 @@
       </p:sp>
       <p:sp>
         <p:nvSpPr>
-          <p:cNvPr id="5" name="Text 3"/>
-          <p:cNvSpPr/>
-          <p:nvPr/>
-        </p:nvSpPr>
-        <p:spPr>
-          <a:xfrm>
-            <a:off x="548640" y="1188720"/>
-            <a:ext cx="11091672" cy="822960"/>
-          </a:xfrm>
-          <a:prstGeom prst="rect">
-            <a:avLst/>
-          </a:prstGeom>
-          <a:noFill/>
-          <a:ln/>
-        </p:spPr>
-        <p:txBody>
-          <a:bodyPr wrap="square" rtlCol="0" anchor="t"/>
-          <a:lstStyle/>
-          <a:p>
-            <a:pPr marL="0" indent="0">
-              <a:buNone/>
-            </a:pPr>
-            <a:r>
-              <a:rPr lang="en-US" sz="1800" dirty="0">
-                <a:solidFill>
-                  <a:srgbClr val="212121"/>
-                </a:solidFill>
-                <a:latin typeface="Arial" pitchFamily="34" charset="0"/>
-                <a:ea typeface="Arial" pitchFamily="34" charset="-122"/>
-                <a:cs typeface="Arial" pitchFamily="34" charset="-120"/>
-              </a:rPr>
-              <a:t>Ya aplicaste esta regla en el Tema 3 con la contraseña de la base de datos — hoy se generaliza a cualquier secreto: claves de API, tokens, certificados privados.</a:t>
-            </a:r>
-            <a:endParaRPr lang="en-US" sz="1800" dirty="0"/>
-          </a:p>
-        </p:txBody>
-      </p:sp>
-      <p:sp>
-        <p:nvSpPr>
-          <p:cNvPr id="6" name="Shape 4"/>
-          <p:cNvSpPr/>
-          <p:nvPr/>
-        </p:nvSpPr>
-        <p:spPr>
-          <a:xfrm>
-            <a:off x="2340407" y="2331720"/>
-            <a:ext cx="7508138" cy="640080"/>
-          </a:xfrm>
-          <a:prstGeom prst="roundRect">
-            <a:avLst/>
-          </a:prstGeom>
-          <a:solidFill>
-            <a:srgbClr val="E8EAF6"/>
-          </a:solidFill>
-          <a:ln w="19050">
-            <a:solidFill>
-              <a:srgbClr val="3949AB"/>
-            </a:solidFill>
-            <a:prstDash val="solid"/>
-          </a:ln>
-        </p:spPr>
-        <p:txBody>
-          <a:bodyPr/>
-          <a:lstStyle/>
-          <a:p>
-            <a:endParaRPr lang="es-ES"/>
-          </a:p>
-        </p:txBody>
-      </p:sp>
-      <p:sp>
-        <p:nvSpPr>
-          <p:cNvPr id="7" name="Text 5"/>
-          <p:cNvSpPr/>
-          <p:nvPr/>
-        </p:nvSpPr>
-        <p:spPr>
-          <a:xfrm>
-            <a:off x="2340407" y="2331720"/>
-            <a:ext cx="7508138" cy="640080"/>
-          </a:xfrm>
-          <a:prstGeom prst="rect">
-            <a:avLst/>
-          </a:prstGeom>
-          <a:noFill/>
-          <a:ln/>
-        </p:spPr>
-        <p:txBody>
-          <a:bodyPr wrap="square" rtlCol="0" anchor="ctr"/>
-          <a:lstStyle/>
-          <a:p>
-            <a:pPr marL="0" indent="0" algn="ctr">
-              <a:buNone/>
-            </a:pPr>
-            <a:r>
-              <a:rPr lang="en-US" sz="1600" b="1" dirty="0">
-                <a:solidFill>
-                  <a:srgbClr val="212121"/>
-                </a:solidFill>
-                <a:latin typeface="Arial" pitchFamily="34" charset="0"/>
-                <a:ea typeface="Arial" pitchFamily="34" charset="-122"/>
-                <a:cs typeface="Arial" pitchFamily="34" charset="-120"/>
-              </a:rPr>
-              <a:t>🔑 Secreto</a:t>
-            </a:r>
-            <a:endParaRPr lang="en-US" sz="1600" dirty="0"/>
-          </a:p>
-        </p:txBody>
-      </p:sp>
-      <p:sp>
-        <p:nvSpPr>
-          <p:cNvPr id="8" name="Shape 6"/>
-          <p:cNvSpPr/>
-          <p:nvPr/>
-        </p:nvSpPr>
-        <p:spPr>
-          <a:xfrm>
-            <a:off x="6094476" y="2971800"/>
-            <a:ext cx="914" cy="182880"/>
-          </a:xfrm>
-          <a:prstGeom prst="line">
-            <a:avLst/>
-          </a:prstGeom>
-          <a:noFill/>
-          <a:ln w="15875">
-            <a:solidFill>
-              <a:srgbClr val="3949AB"/>
-            </a:solidFill>
-            <a:prstDash val="solid"/>
-          </a:ln>
-        </p:spPr>
-        <p:txBody>
-          <a:bodyPr/>
-          <a:lstStyle/>
-          <a:p>
-            <a:endParaRPr lang="es-ES"/>
-          </a:p>
-        </p:txBody>
-      </p:sp>
-      <p:sp>
-        <p:nvSpPr>
-          <p:cNvPr id="9" name="Shape 7"/>
-          <p:cNvSpPr/>
-          <p:nvPr/>
-        </p:nvSpPr>
-        <p:spPr>
-          <a:xfrm>
-            <a:off x="548640" y="3337560"/>
-            <a:ext cx="5362956" cy="1005840"/>
+          <p:cNvPr id="5" name="Shape 3"/>
+          <p:cNvSpPr/>
+          <p:nvPr/>
+        </p:nvSpPr>
+        <p:spPr>
+          <a:xfrm>
+            <a:off x="548640" y="1280160"/>
+            <a:ext cx="5431536" cy="1325880"/>
           </a:xfrm>
           <a:prstGeom prst="roundRect">
             <a:avLst/>
@@ -3178,93 +3085,120 @@
             <a:prstDash val="solid"/>
           </a:ln>
         </p:spPr>
-        <p:txBody>
-          <a:bodyPr/>
-          <a:lstStyle/>
-          <a:p>
-            <a:endParaRPr lang="es-ES"/>
-          </a:p>
-        </p:txBody>
-      </p:sp>
-      <p:sp>
-        <p:nvSpPr>
-          <p:cNvPr id="10" name="Text 8"/>
-          <p:cNvSpPr/>
-          <p:nvPr/>
-        </p:nvSpPr>
-        <p:spPr>
-          <a:xfrm>
-            <a:off x="594360" y="3337560"/>
-            <a:ext cx="5271516" cy="1005840"/>
-          </a:xfrm>
-          <a:prstGeom prst="rect">
-            <a:avLst/>
-          </a:prstGeom>
-          <a:noFill/>
-          <a:ln/>
-        </p:spPr>
-        <p:txBody>
-          <a:bodyPr wrap="square" rtlCol="0" anchor="ctr"/>
-          <a:lstStyle/>
-          <a:p>
-            <a:pPr marL="0" indent="0" algn="ctr">
-              <a:buNone/>
-            </a:pPr>
-            <a:r>
-              <a:rPr lang="en-US" sz="1500" dirty="0">
-                <a:solidFill>
-                  <a:srgbClr val="212121"/>
-                </a:solidFill>
-                <a:latin typeface="Arial" pitchFamily="34" charset="0"/>
-                <a:ea typeface="Arial" pitchFamily="34" charset="-122"/>
-                <a:cs typeface="Arial" pitchFamily="34" charset="-120"/>
-              </a:rPr>
-              <a:t>❌ Escrito en el código o en config versionada</a:t>
-            </a:r>
-            <a:endParaRPr lang="en-US" sz="1500" dirty="0"/>
-          </a:p>
-        </p:txBody>
-      </p:sp>
-      <p:sp>
-        <p:nvSpPr>
-          <p:cNvPr id="11" name="Shape 9"/>
-          <p:cNvSpPr/>
-          <p:nvPr/>
-        </p:nvSpPr>
-        <p:spPr>
-          <a:xfrm>
-            <a:off x="3230118" y="3154680"/>
-            <a:ext cx="914" cy="182880"/>
-          </a:xfrm>
-          <a:prstGeom prst="line">
-            <a:avLst/>
-          </a:prstGeom>
-          <a:noFill/>
-          <a:ln w="15875">
+      </p:sp>
+      <p:sp>
+        <p:nvSpPr>
+          <p:cNvPr id="6" name="Shape 4"/>
+          <p:cNvSpPr/>
+          <p:nvPr/>
+        </p:nvSpPr>
+        <p:spPr>
+          <a:xfrm>
+            <a:off x="731520" y="1650492"/>
+            <a:ext cx="566928" cy="566928"/>
+          </a:xfrm>
+          <a:prstGeom prst="ellipse">
+            <a:avLst/>
+          </a:prstGeom>
+          <a:solidFill>
+            <a:srgbClr val="3949AB"/>
+          </a:solidFill>
+          <a:ln w="12700">
             <a:solidFill>
               <a:srgbClr val="3949AB"/>
             </a:solidFill>
             <a:prstDash val="solid"/>
           </a:ln>
         </p:spPr>
-        <p:txBody>
-          <a:bodyPr/>
-          <a:lstStyle/>
-          <a:p>
-            <a:endParaRPr lang="es-ES"/>
-          </a:p>
-        </p:txBody>
-      </p:sp>
-      <p:sp>
-        <p:nvSpPr>
-          <p:cNvPr id="12" name="Shape 10"/>
-          <p:cNvSpPr/>
-          <p:nvPr/>
-        </p:nvSpPr>
-        <p:spPr>
-          <a:xfrm>
-            <a:off x="6277356" y="3337560"/>
-            <a:ext cx="5362956" cy="1005840"/>
+      </p:sp>
+      <p:sp>
+        <p:nvSpPr>
+          <p:cNvPr id="7" name="Text 5"/>
+          <p:cNvSpPr/>
+          <p:nvPr/>
+        </p:nvSpPr>
+        <p:spPr>
+          <a:xfrm>
+            <a:off x="731520" y="1650492"/>
+            <a:ext cx="566928" cy="566928"/>
+          </a:xfrm>
+          <a:prstGeom prst="rect">
+            <a:avLst/>
+          </a:prstGeom>
+          <a:noFill/>
+          <a:ln/>
+        </p:spPr>
+        <p:txBody>
+          <a:bodyPr wrap="square" rtlCol="0" anchor="ctr"/>
+          <a:lstStyle/>
+          <a:p>
+            <a:pPr algn="ctr" indent="0" marL="0">
+              <a:buNone/>
+            </a:pPr>
+            <a:r>
+              <a:rPr lang="en-US" sz="1700" b="1" dirty="0">
+                <a:solidFill>
+                  <a:srgbClr val="FFFFFF"/>
+                </a:solidFill>
+                <a:latin typeface="Arial" pitchFamily="34" charset="0"/>
+                <a:ea typeface="Arial" pitchFamily="34" charset="-122"/>
+                <a:cs typeface="Arial" pitchFamily="34" charset="-120"/>
+              </a:rPr>
+              <a:t>1</a:t>
+            </a:r>
+            <a:endParaRPr lang="en-US" sz="1700" dirty="0"/>
+          </a:p>
+        </p:txBody>
+      </p:sp>
+      <p:sp>
+        <p:nvSpPr>
+          <p:cNvPr id="8" name="Text 6"/>
+          <p:cNvSpPr/>
+          <p:nvPr/>
+        </p:nvSpPr>
+        <p:spPr>
+          <a:xfrm>
+            <a:off x="1417320" y="1280160"/>
+            <a:ext cx="4379976" cy="1325880"/>
+          </a:xfrm>
+          <a:prstGeom prst="rect">
+            <a:avLst/>
+          </a:prstGeom>
+          <a:noFill/>
+          <a:ln/>
+        </p:spPr>
+        <p:txBody>
+          <a:bodyPr wrap="square" rtlCol="0" anchor="ctr"/>
+          <a:lstStyle/>
+          <a:p>
+            <a:pPr indent="0" marL="0">
+              <a:buNone/>
+            </a:pPr>
+            <a:r>
+              <a:rPr lang="en-US" sz="1500" dirty="0">
+                <a:solidFill>
+                  <a:srgbClr val="212121"/>
+                </a:solidFill>
+                <a:latin typeface="Arial" pitchFamily="34" charset="0"/>
+                <a:ea typeface="Arial" pitchFamily="34" charset="-122"/>
+                <a:cs typeface="Arial" pitchFamily="34" charset="-120"/>
+              </a:rPr>
+              <a:t>Un rol se presta temporalmente, con credenciales que caducan; un usuario tiene credenciales fijas — el Learner Lab usa un rol preasignado.</a:t>
+            </a:r>
+            <a:endParaRPr lang="en-US" sz="1500" dirty="0"/>
+          </a:p>
+        </p:txBody>
+      </p:sp>
+      <p:sp>
+        <p:nvSpPr>
+          <p:cNvPr id="9" name="Shape 7"/>
+          <p:cNvSpPr/>
+          <p:nvPr/>
+        </p:nvSpPr>
+        <p:spPr>
+          <a:xfrm>
+            <a:off x="6208776" y="1280160"/>
+            <a:ext cx="5431536" cy="1325880"/>
           </a:xfrm>
           <a:prstGeom prst="roundRect">
             <a:avLst/>
@@ -3279,24 +3213,42 @@
             <a:prstDash val="solid"/>
           </a:ln>
         </p:spPr>
-        <p:txBody>
-          <a:bodyPr/>
-          <a:lstStyle/>
-          <a:p>
-            <a:endParaRPr lang="es-ES"/>
-          </a:p>
-        </p:txBody>
-      </p:sp>
-      <p:sp>
-        <p:nvSpPr>
-          <p:cNvPr id="13" name="Text 11"/>
-          <p:cNvSpPr/>
-          <p:nvPr/>
-        </p:nvSpPr>
-        <p:spPr>
-          <a:xfrm>
-            <a:off x="6323076" y="3337560"/>
-            <a:ext cx="5271516" cy="1005840"/>
+      </p:sp>
+      <p:sp>
+        <p:nvSpPr>
+          <p:cNvPr id="10" name="Shape 8"/>
+          <p:cNvSpPr/>
+          <p:nvPr/>
+        </p:nvSpPr>
+        <p:spPr>
+          <a:xfrm>
+            <a:off x="6391656" y="1650492"/>
+            <a:ext cx="566928" cy="566928"/>
+          </a:xfrm>
+          <a:prstGeom prst="ellipse">
+            <a:avLst/>
+          </a:prstGeom>
+          <a:solidFill>
+            <a:srgbClr val="3949AB"/>
+          </a:solidFill>
+          <a:ln w="12700">
+            <a:solidFill>
+              <a:srgbClr val="3949AB"/>
+            </a:solidFill>
+            <a:prstDash val="solid"/>
+          </a:ln>
+        </p:spPr>
+      </p:sp>
+      <p:sp>
+        <p:nvSpPr>
+          <p:cNvPr id="11" name="Text 9"/>
+          <p:cNvSpPr/>
+          <p:nvPr/>
+        </p:nvSpPr>
+        <p:spPr>
+          <a:xfrm>
+            <a:off x="6391656" y="1650492"/>
+            <a:ext cx="566928" cy="566928"/>
           </a:xfrm>
           <a:prstGeom prst="rect">
             <a:avLst/>
@@ -3308,7 +3260,46 @@
           <a:bodyPr wrap="square" rtlCol="0" anchor="ctr"/>
           <a:lstStyle/>
           <a:p>
-            <a:pPr marL="0" indent="0" algn="ctr">
+            <a:pPr algn="ctr" indent="0" marL="0">
+              <a:buNone/>
+            </a:pPr>
+            <a:r>
+              <a:rPr lang="en-US" sz="1700" b="1" dirty="0">
+                <a:solidFill>
+                  <a:srgbClr val="FFFFFF"/>
+                </a:solidFill>
+                <a:latin typeface="Arial" pitchFamily="34" charset="0"/>
+                <a:ea typeface="Arial" pitchFamily="34" charset="-122"/>
+                <a:cs typeface="Arial" pitchFamily="34" charset="-120"/>
+              </a:rPr>
+              <a:t>2</a:t>
+            </a:r>
+            <a:endParaRPr lang="en-US" sz="1700" dirty="0"/>
+          </a:p>
+        </p:txBody>
+      </p:sp>
+      <p:sp>
+        <p:nvSpPr>
+          <p:cNvPr id="12" name="Text 10"/>
+          <p:cNvSpPr/>
+          <p:nvPr/>
+        </p:nvSpPr>
+        <p:spPr>
+          <a:xfrm>
+            <a:off x="7077456" y="1280160"/>
+            <a:ext cx="4379976" cy="1325880"/>
+          </a:xfrm>
+          <a:prstGeom prst="rect">
+            <a:avLst/>
+          </a:prstGeom>
+          <a:noFill/>
+          <a:ln/>
+        </p:spPr>
+        <p:txBody>
+          <a:bodyPr wrap="square" rtlCol="0" anchor="ctr"/>
+          <a:lstStyle/>
+          <a:p>
+            <a:pPr indent="0" marL="0">
               <a:buNone/>
             </a:pPr>
             <a:r>
@@ -3320,7 +3311,7 @@
                 <a:ea typeface="Arial" pitchFamily="34" charset="-122"/>
                 <a:cs typeface="Arial" pitchFamily="34" charset="-120"/>
               </a:rPr>
-              <a:t>✅ Secrets Manager / variable de entorno, en tiempo de ejecución</a:t>
+              <a:t>Una política se lee en cuatro campos: efecto, acción, recurso y condición.</a:t>
             </a:r>
             <a:endParaRPr lang="en-US" sz="1500" dirty="0"/>
           </a:p>
@@ -3328,19 +3319,21 @@
       </p:sp>
       <p:sp>
         <p:nvSpPr>
-          <p:cNvPr id="14" name="Shape 12"/>
-          <p:cNvSpPr/>
-          <p:nvPr/>
-        </p:nvSpPr>
-        <p:spPr>
-          <a:xfrm>
-            <a:off x="8958834" y="3154680"/>
-            <a:ext cx="914" cy="182880"/>
-          </a:xfrm>
-          <a:prstGeom prst="line">
-            <a:avLst/>
-          </a:prstGeom>
-          <a:noFill/>
+          <p:cNvPr id="13" name="Shape 11"/>
+          <p:cNvSpPr/>
+          <p:nvPr/>
+        </p:nvSpPr>
+        <p:spPr>
+          <a:xfrm>
+            <a:off x="548640" y="2834640"/>
+            <a:ext cx="5431536" cy="1325880"/>
+          </a:xfrm>
+          <a:prstGeom prst="roundRect">
+            <a:avLst/>
+          </a:prstGeom>
+          <a:solidFill>
+            <a:srgbClr val="E8EAF6"/>
+          </a:solidFill>
           <a:ln w="15875">
             <a:solidFill>
               <a:srgbClr val="3949AB"/>
@@ -3348,29 +3341,127 @@
             <a:prstDash val="solid"/>
           </a:ln>
         </p:spPr>
-        <p:txBody>
-          <a:bodyPr/>
-          <a:lstStyle/>
-          <a:p>
-            <a:endParaRPr lang="es-ES"/>
-          </a:p>
-        </p:txBody>
-      </p:sp>
-      <p:sp>
-        <p:nvSpPr>
-          <p:cNvPr id="15" name="Shape 13"/>
-          <p:cNvSpPr/>
-          <p:nvPr/>
-        </p:nvSpPr>
-        <p:spPr>
-          <a:xfrm>
-            <a:off x="3230118" y="3154680"/>
-            <a:ext cx="5728716" cy="914"/>
-          </a:xfrm>
-          <a:prstGeom prst="line">
+      </p:sp>
+      <p:sp>
+        <p:nvSpPr>
+          <p:cNvPr id="14" name="Shape 12"/>
+          <p:cNvSpPr/>
+          <p:nvPr/>
+        </p:nvSpPr>
+        <p:spPr>
+          <a:xfrm>
+            <a:off x="731520" y="3204972"/>
+            <a:ext cx="566928" cy="566928"/>
+          </a:xfrm>
+          <a:prstGeom prst="ellipse">
+            <a:avLst/>
+          </a:prstGeom>
+          <a:solidFill>
+            <a:srgbClr val="3949AB"/>
+          </a:solidFill>
+          <a:ln w="12700">
+            <a:solidFill>
+              <a:srgbClr val="3949AB"/>
+            </a:solidFill>
+            <a:prstDash val="solid"/>
+          </a:ln>
+        </p:spPr>
+      </p:sp>
+      <p:sp>
+        <p:nvSpPr>
+          <p:cNvPr id="15" name="Text 13"/>
+          <p:cNvSpPr/>
+          <p:nvPr/>
+        </p:nvSpPr>
+        <p:spPr>
+          <a:xfrm>
+            <a:off x="731520" y="3204972"/>
+            <a:ext cx="566928" cy="566928"/>
+          </a:xfrm>
+          <a:prstGeom prst="rect">
             <a:avLst/>
           </a:prstGeom>
           <a:noFill/>
+          <a:ln/>
+        </p:spPr>
+        <p:txBody>
+          <a:bodyPr wrap="square" rtlCol="0" anchor="ctr"/>
+          <a:lstStyle/>
+          <a:p>
+            <a:pPr algn="ctr" indent="0" marL="0">
+              <a:buNone/>
+            </a:pPr>
+            <a:r>
+              <a:rPr lang="en-US" sz="1700" b="1" dirty="0">
+                <a:solidFill>
+                  <a:srgbClr val="FFFFFF"/>
+                </a:solidFill>
+                <a:latin typeface="Arial" pitchFamily="34" charset="0"/>
+                <a:ea typeface="Arial" pitchFamily="34" charset="-122"/>
+                <a:cs typeface="Arial" pitchFamily="34" charset="-120"/>
+              </a:rPr>
+              <a:t>3</a:t>
+            </a:r>
+            <a:endParaRPr lang="en-US" sz="1700" dirty="0"/>
+          </a:p>
+        </p:txBody>
+      </p:sp>
+      <p:sp>
+        <p:nvSpPr>
+          <p:cNvPr id="16" name="Text 14"/>
+          <p:cNvSpPr/>
+          <p:nvPr/>
+        </p:nvSpPr>
+        <p:spPr>
+          <a:xfrm>
+            <a:off x="1417320" y="2834640"/>
+            <a:ext cx="4379976" cy="1325880"/>
+          </a:xfrm>
+          <a:prstGeom prst="rect">
+            <a:avLst/>
+          </a:prstGeom>
+          <a:noFill/>
+          <a:ln/>
+        </p:spPr>
+        <p:txBody>
+          <a:bodyPr wrap="square" rtlCol="0" anchor="ctr"/>
+          <a:lstStyle/>
+          <a:p>
+            <a:pPr indent="0" marL="0">
+              <a:buNone/>
+            </a:pPr>
+            <a:r>
+              <a:rPr lang="en-US" sz="1500" dirty="0">
+                <a:solidFill>
+                  <a:srgbClr val="212121"/>
+                </a:solidFill>
+                <a:latin typeface="Arial" pitchFamily="34" charset="0"/>
+                <a:ea typeface="Arial" pitchFamily="34" charset="-122"/>
+                <a:cs typeface="Arial" pitchFamily="34" charset="-120"/>
+              </a:rPr>
+              <a:t>Gana siempre el orden fijo: un Deny explícito primero, luego un Allow explícito, y si nadie dice nada, deniega por defecto.</a:t>
+            </a:r>
+            <a:endParaRPr lang="en-US" sz="1500" dirty="0"/>
+          </a:p>
+        </p:txBody>
+      </p:sp>
+      <p:sp>
+        <p:nvSpPr>
+          <p:cNvPr id="17" name="Shape 15"/>
+          <p:cNvSpPr/>
+          <p:nvPr/>
+        </p:nvSpPr>
+        <p:spPr>
+          <a:xfrm>
+            <a:off x="6208776" y="2834640"/>
+            <a:ext cx="5431536" cy="1325880"/>
+          </a:xfrm>
+          <a:prstGeom prst="roundRect">
+            <a:avLst/>
+          </a:prstGeom>
+          <a:solidFill>
+            <a:srgbClr val="E8EAF6"/>
+          </a:solidFill>
           <a:ln w="15875">
             <a:solidFill>
               <a:srgbClr val="3949AB"/>
@@ -3378,81 +3469,42 @@
             <a:prstDash val="solid"/>
           </a:ln>
         </p:spPr>
-        <p:txBody>
-          <a:bodyPr/>
-          <a:lstStyle/>
-          <a:p>
-            <a:endParaRPr lang="es-ES"/>
-          </a:p>
-        </p:txBody>
-      </p:sp>
-    </p:spTree>
-  </p:cSld>
-  <p:clrMapOvr>
-    <a:masterClrMapping/>
-  </p:clrMapOvr>
-</p:sld>
-</file>
-
-<file path=ppt/slides/slide13.xml><?xml version="1.0" encoding="utf-8"?>
-<p:sld xmlns:a="http://schemas.openxmlformats.org/drawingml/2006/main" xmlns:r="http://schemas.openxmlformats.org/officeDocument/2006/relationships" xmlns:p="http://schemas.openxmlformats.org/presentationml/2006/main">
-  <p:cSld name="Slide 13">
-    <p:spTree>
-      <p:nvGrpSpPr>
-        <p:cNvPr id="1" name=""/>
-        <p:cNvGrpSpPr/>
-        <p:nvPr/>
-      </p:nvGrpSpPr>
-      <p:grpSpPr>
-        <a:xfrm>
-          <a:off x="0" y="0"/>
-          <a:ext cx="0" cy="0"/>
-          <a:chOff x="0" y="0"/>
-          <a:chExt cx="0" cy="0"/>
-        </a:xfrm>
-      </p:grpSpPr>
-      <p:sp>
-        <p:nvSpPr>
-          <p:cNvPr id="2" name="Shape 0"/>
-          <p:cNvSpPr/>
-          <p:nvPr/>
-        </p:nvSpPr>
-        <p:spPr>
-          <a:xfrm>
-            <a:off x="0" y="0"/>
-            <a:ext cx="12188952" cy="777240"/>
-          </a:xfrm>
-          <a:prstGeom prst="rect">
+      </p:sp>
+      <p:sp>
+        <p:nvSpPr>
+          <p:cNvPr id="18" name="Shape 16"/>
+          <p:cNvSpPr/>
+          <p:nvPr/>
+        </p:nvSpPr>
+        <p:spPr>
+          <a:xfrm>
+            <a:off x="6391656" y="3204972"/>
+            <a:ext cx="566928" cy="566928"/>
+          </a:xfrm>
+          <a:prstGeom prst="ellipse">
             <a:avLst/>
           </a:prstGeom>
           <a:solidFill>
-            <a:srgbClr val="1A237E"/>
+            <a:srgbClr val="3949AB"/>
           </a:solidFill>
           <a:ln w="12700">
             <a:solidFill>
-              <a:srgbClr val="1A237E"/>
+              <a:srgbClr val="3949AB"/>
             </a:solidFill>
             <a:prstDash val="solid"/>
           </a:ln>
         </p:spPr>
-        <p:txBody>
-          <a:bodyPr/>
-          <a:lstStyle/>
-          <a:p>
-            <a:endParaRPr lang="es-ES"/>
-          </a:p>
-        </p:txBody>
-      </p:sp>
-      <p:sp>
-        <p:nvSpPr>
-          <p:cNvPr id="3" name="Text 1"/>
-          <p:cNvSpPr/>
-          <p:nvPr/>
-        </p:nvSpPr>
-        <p:spPr>
-          <a:xfrm>
-            <a:off x="365760" y="0"/>
-            <a:ext cx="11457432" cy="777240"/>
+      </p:sp>
+      <p:sp>
+        <p:nvSpPr>
+          <p:cNvPr id="19" name="Text 17"/>
+          <p:cNvSpPr/>
+          <p:nvPr/>
+        </p:nvSpPr>
+        <p:spPr>
+          <a:xfrm>
+            <a:off x="6391656" y="3204972"/>
+            <a:ext cx="566928" cy="566928"/>
           </a:xfrm>
           <a:prstGeom prst="rect">
             <a:avLst/>
@@ -3464,11 +3516,11 @@
           <a:bodyPr wrap="square" rtlCol="0" anchor="ctr"/>
           <a:lstStyle/>
           <a:p>
-            <a:pPr marL="0" indent="0">
-              <a:buNone/>
-            </a:pPr>
-            <a:r>
-              <a:rPr lang="en-US" sz="2400" b="1" dirty="0">
+            <a:pPr algn="ctr" indent="0" marL="0">
+              <a:buNone/>
+            </a:pPr>
+            <a:r>
+              <a:rPr lang="en-US" sz="1700" b="1" dirty="0">
                 <a:solidFill>
                   <a:srgbClr val="FFFFFF"/>
                 </a:solidFill>
@@ -3476,22 +3528,22 @@
                 <a:ea typeface="Arial" pitchFamily="34" charset="-122"/>
                 <a:cs typeface="Arial" pitchFamily="34" charset="-120"/>
               </a:rPr>
-              <a:t>Un secreto filtrado sigue expuesto aunque lo borres</a:t>
-            </a:r>
-            <a:endParaRPr lang="en-US" sz="2400" dirty="0"/>
-          </a:p>
-        </p:txBody>
-      </p:sp>
-      <p:sp>
-        <p:nvSpPr>
-          <p:cNvPr id="4" name="Text 2"/>
-          <p:cNvSpPr/>
-          <p:nvPr/>
-        </p:nvSpPr>
-        <p:spPr>
-          <a:xfrm>
-            <a:off x="548640" y="6473952"/>
-            <a:ext cx="11091672" cy="292608"/>
+              <a:t>4</a:t>
+            </a:r>
+            <a:endParaRPr lang="en-US" sz="1700" dirty="0"/>
+          </a:p>
+        </p:txBody>
+      </p:sp>
+      <p:sp>
+        <p:nvSpPr>
+          <p:cNvPr id="20" name="Text 18"/>
+          <p:cNvSpPr/>
+          <p:nvPr/>
+        </p:nvSpPr>
+        <p:spPr>
+          <a:xfrm>
+            <a:off x="7077456" y="2834640"/>
+            <a:ext cx="4379976" cy="1325880"/>
           </a:xfrm>
           <a:prstGeom prst="rect">
             <a:avLst/>
@@ -3503,180 +3555,84 @@
           <a:bodyPr wrap="square" rtlCol="0" anchor="ctr"/>
           <a:lstStyle/>
           <a:p>
-            <a:pPr marL="0" indent="0" algn="r">
-              <a:buNone/>
-            </a:pPr>
-            <a:r>
-              <a:rPr lang="en-US" sz="1100" dirty="0">
-                <a:solidFill>
-                  <a:srgbClr val="757575"/>
-                </a:solidFill>
-                <a:latin typeface="Arial" pitchFamily="34" charset="0"/>
-                <a:ea typeface="Arial" pitchFamily="34" charset="-122"/>
-                <a:cs typeface="Arial" pitchFamily="34" charset="-120"/>
-              </a:rPr>
-              <a:t>Introducción a la Nube Pública — Tema 5: Identidad y gestión de accesos</a:t>
-            </a:r>
-            <a:endParaRPr lang="en-US" sz="1100" dirty="0"/>
-          </a:p>
-        </p:txBody>
-      </p:sp>
-      <p:sp>
-        <p:nvSpPr>
-          <p:cNvPr id="5" name="Shape 3"/>
-          <p:cNvSpPr/>
-          <p:nvPr/>
-        </p:nvSpPr>
-        <p:spPr>
-          <a:xfrm>
-            <a:off x="548640" y="2011680"/>
-            <a:ext cx="11091672" cy="2377440"/>
+            <a:pPr indent="0" marL="0">
+              <a:buNone/>
+            </a:pPr>
+            <a:r>
+              <a:rPr lang="en-US" sz="1500" dirty="0">
+                <a:solidFill>
+                  <a:srgbClr val="212121"/>
+                </a:solidFill>
+                <a:latin typeface="Arial" pitchFamily="34" charset="0"/>
+                <a:ea typeface="Arial" pitchFamily="34" charset="-122"/>
+                <a:cs typeface="Arial" pitchFamily="34" charset="-120"/>
+              </a:rPr>
+              <a:t>El mínimo privilegio limita el alcance de cualquier fallo; un comodín de más es el error más común que lo rompe.</a:t>
+            </a:r>
+            <a:endParaRPr lang="en-US" sz="1500" dirty="0"/>
+          </a:p>
+        </p:txBody>
+      </p:sp>
+      <p:sp>
+        <p:nvSpPr>
+          <p:cNvPr id="21" name="Shape 19"/>
+          <p:cNvSpPr/>
+          <p:nvPr/>
+        </p:nvSpPr>
+        <p:spPr>
+          <a:xfrm>
+            <a:off x="548640" y="4389120"/>
+            <a:ext cx="5431536" cy="1325880"/>
           </a:xfrm>
           <a:prstGeom prst="roundRect">
             <a:avLst/>
           </a:prstGeom>
           <a:solidFill>
-            <a:srgbClr val="FFF8E1"/>
+            <a:srgbClr val="E8EAF6"/>
           </a:solidFill>
-          <a:ln w="28575">
+          <a:ln w="15875">
             <a:solidFill>
-              <a:srgbClr val="FFA000"/>
+              <a:srgbClr val="3949AB"/>
             </a:solidFill>
             <a:prstDash val="solid"/>
           </a:ln>
         </p:spPr>
-        <p:txBody>
-          <a:bodyPr/>
-          <a:lstStyle/>
-          <a:p>
-            <a:endParaRPr lang="es-ES"/>
-          </a:p>
-        </p:txBody>
-      </p:sp>
-      <p:sp>
-        <p:nvSpPr>
-          <p:cNvPr id="6" name="Text 4"/>
-          <p:cNvSpPr/>
-          <p:nvPr/>
-        </p:nvSpPr>
-        <p:spPr>
-          <a:xfrm>
-            <a:off x="822960" y="2121408"/>
-            <a:ext cx="10543032" cy="2157984"/>
-          </a:xfrm>
-          <a:prstGeom prst="rect">
-            <a:avLst/>
-          </a:prstGeom>
-          <a:noFill/>
-          <a:ln/>
-        </p:spPr>
-        <p:txBody>
-          <a:bodyPr wrap="square" rtlCol="0" anchor="t"/>
-          <a:lstStyle/>
-          <a:p>
-            <a:pPr marL="0" indent="0">
-              <a:buNone/>
-            </a:pPr>
-            <a:r>
-              <a:rPr lang="en-US" sz="2200" b="1" dirty="0">
-                <a:solidFill>
-                  <a:srgbClr val="1A237E"/>
-                </a:solidFill>
-                <a:latin typeface="Arial" pitchFamily="34" charset="0"/>
-                <a:ea typeface="Arial" pitchFamily="34" charset="-122"/>
-                <a:cs typeface="Arial" pitchFamily="34" charset="-120"/>
-              </a:rPr>
-              <a:t>⚠️ El historial de Git no olvida
-</a:t>
-            </a:r>
-            <a:endParaRPr lang="en-US" sz="2200" dirty="0"/>
-          </a:p>
-          <a:p>
-            <a:pPr marL="0" indent="0">
-              <a:buNone/>
-            </a:pPr>
-            <a:r>
-              <a:rPr lang="en-US" sz="2100" dirty="0">
-                <a:solidFill>
-                  <a:srgbClr val="212121"/>
-                </a:solidFill>
-                <a:latin typeface="Arial" pitchFamily="34" charset="0"/>
-                <a:ea typeface="Arial" pitchFamily="34" charset="-122"/>
-                <a:cs typeface="Arial" pitchFamily="34" charset="-120"/>
-              </a:rPr>
-              <a:t>El historial conserva versiones anteriores de cualquier fichero — borrar un secreto en el commit siguiente no lo elimina del historial. La única solución correcta ante un secreto filtrado es rotarlo (generar uno nuevo e invalidar el antiguo), nunca solo «quitarlo» del código.</a:t>
-            </a:r>
-            <a:endParaRPr lang="en-US" sz="2200" dirty="0"/>
-          </a:p>
-        </p:txBody>
-      </p:sp>
-    </p:spTree>
-  </p:cSld>
-  <p:clrMapOvr>
-    <a:masterClrMapping/>
-  </p:clrMapOvr>
-</p:sld>
-</file>
-
-<file path=ppt/slides/slide14.xml><?xml version="1.0" encoding="utf-8"?>
-<p:sld xmlns:a="http://schemas.openxmlformats.org/drawingml/2006/main" xmlns:r="http://schemas.openxmlformats.org/officeDocument/2006/relationships" xmlns:p="http://schemas.openxmlformats.org/presentationml/2006/main">
-  <p:cSld name="Slide 14">
-    <p:spTree>
-      <p:nvGrpSpPr>
-        <p:cNvPr id="1" name=""/>
-        <p:cNvGrpSpPr/>
-        <p:nvPr/>
-      </p:nvGrpSpPr>
-      <p:grpSpPr>
-        <a:xfrm>
-          <a:off x="0" y="0"/>
-          <a:ext cx="0" cy="0"/>
-          <a:chOff x="0" y="0"/>
-          <a:chExt cx="0" cy="0"/>
-        </a:xfrm>
-      </p:grpSpPr>
-      <p:sp>
-        <p:nvSpPr>
-          <p:cNvPr id="2" name="Shape 0"/>
-          <p:cNvSpPr/>
-          <p:nvPr/>
-        </p:nvSpPr>
-        <p:spPr>
-          <a:xfrm>
-            <a:off x="0" y="0"/>
-            <a:ext cx="12188952" cy="777240"/>
-          </a:xfrm>
-          <a:prstGeom prst="rect">
+      </p:sp>
+      <p:sp>
+        <p:nvSpPr>
+          <p:cNvPr id="22" name="Shape 20"/>
+          <p:cNvSpPr/>
+          <p:nvPr/>
+        </p:nvSpPr>
+        <p:spPr>
+          <a:xfrm>
+            <a:off x="731520" y="4759452"/>
+            <a:ext cx="566928" cy="566928"/>
+          </a:xfrm>
+          <a:prstGeom prst="ellipse">
             <a:avLst/>
           </a:prstGeom>
           <a:solidFill>
-            <a:srgbClr val="1A237E"/>
+            <a:srgbClr val="3949AB"/>
           </a:solidFill>
           <a:ln w="12700">
             <a:solidFill>
-              <a:srgbClr val="1A237E"/>
+              <a:srgbClr val="3949AB"/>
             </a:solidFill>
             <a:prstDash val="solid"/>
           </a:ln>
         </p:spPr>
-        <p:txBody>
-          <a:bodyPr/>
-          <a:lstStyle/>
-          <a:p>
-            <a:endParaRPr lang="es-ES"/>
-          </a:p>
-        </p:txBody>
-      </p:sp>
-      <p:sp>
-        <p:nvSpPr>
-          <p:cNvPr id="3" name="Text 1"/>
-          <p:cNvSpPr/>
-          <p:nvPr/>
-        </p:nvSpPr>
-        <p:spPr>
-          <a:xfrm>
-            <a:off x="365760" y="0"/>
-            <a:ext cx="11457432" cy="777240"/>
+      </p:sp>
+      <p:sp>
+        <p:nvSpPr>
+          <p:cNvPr id="23" name="Text 21"/>
+          <p:cNvSpPr/>
+          <p:nvPr/>
+        </p:nvSpPr>
+        <p:spPr>
+          <a:xfrm>
+            <a:off x="731520" y="4759452"/>
+            <a:ext cx="566928" cy="566928"/>
           </a:xfrm>
           <a:prstGeom prst="rect">
             <a:avLst/>
@@ -3688,11 +3644,11 @@
           <a:bodyPr wrap="square" rtlCol="0" anchor="ctr"/>
           <a:lstStyle/>
           <a:p>
-            <a:pPr marL="0" indent="0">
-              <a:buNone/>
-            </a:pPr>
-            <a:r>
-              <a:rPr lang="en-US" sz="2400" b="1" dirty="0">
+            <a:pPr algn="ctr" indent="0" marL="0">
+              <a:buNone/>
+            </a:pPr>
+            <a:r>
+              <a:rPr lang="en-US" sz="1700" b="1" dirty="0">
                 <a:solidFill>
                   <a:srgbClr val="FFFFFF"/>
                 </a:solidFill>
@@ -3700,22 +3656,22 @@
                 <a:ea typeface="Arial" pitchFamily="34" charset="-122"/>
                 <a:cs typeface="Arial" pitchFamily="34" charset="-120"/>
               </a:rPr>
-              <a:t>Registro de auditoría</a:t>
-            </a:r>
-            <a:endParaRPr lang="en-US" sz="2400" dirty="0"/>
-          </a:p>
-        </p:txBody>
-      </p:sp>
-      <p:sp>
-        <p:nvSpPr>
-          <p:cNvPr id="4" name="Text 2"/>
-          <p:cNvSpPr/>
-          <p:nvPr/>
-        </p:nvSpPr>
-        <p:spPr>
-          <a:xfrm>
-            <a:off x="548640" y="6473952"/>
-            <a:ext cx="11091672" cy="292608"/>
+              <a:t>5</a:t>
+            </a:r>
+            <a:endParaRPr lang="en-US" sz="1700" dirty="0"/>
+          </a:p>
+        </p:txBody>
+      </p:sp>
+      <p:sp>
+        <p:nvSpPr>
+          <p:cNvPr id="24" name="Text 22"/>
+          <p:cNvSpPr/>
+          <p:nvPr/>
+        </p:nvSpPr>
+        <p:spPr>
+          <a:xfrm>
+            <a:off x="1417320" y="4389120"/>
+            <a:ext cx="4379976" cy="1325880"/>
           </a:xfrm>
           <a:prstGeom prst="rect">
             <a:avLst/>
@@ -3727,50 +3683,11 @@
           <a:bodyPr wrap="square" rtlCol="0" anchor="ctr"/>
           <a:lstStyle/>
           <a:p>
-            <a:pPr marL="0" indent="0" algn="r">
-              <a:buNone/>
-            </a:pPr>
-            <a:r>
-              <a:rPr lang="en-US" sz="1100" dirty="0">
-                <a:solidFill>
-                  <a:srgbClr val="757575"/>
-                </a:solidFill>
-                <a:latin typeface="Arial" pitchFamily="34" charset="0"/>
-                <a:ea typeface="Arial" pitchFamily="34" charset="-122"/>
-                <a:cs typeface="Arial" pitchFamily="34" charset="-120"/>
-              </a:rPr>
-              <a:t>Introducción a la Nube Pública — Tema 5: Identidad y gestión de accesos</a:t>
-            </a:r>
-            <a:endParaRPr lang="en-US" sz="1100" dirty="0"/>
-          </a:p>
-        </p:txBody>
-      </p:sp>
-      <p:sp>
-        <p:nvSpPr>
-          <p:cNvPr id="5" name="Text 3"/>
-          <p:cNvSpPr/>
-          <p:nvPr/>
-        </p:nvSpPr>
-        <p:spPr>
-          <a:xfrm>
-            <a:off x="548640" y="1188720"/>
-            <a:ext cx="11091672" cy="1371600"/>
-          </a:xfrm>
-          <a:prstGeom prst="rect">
-            <a:avLst/>
-          </a:prstGeom>
-          <a:noFill/>
-          <a:ln/>
-        </p:spPr>
-        <p:txBody>
-          <a:bodyPr wrap="square" rtlCol="0" anchor="t"/>
-          <a:lstStyle/>
-          <a:p>
-            <a:pPr marL="0" indent="0">
-              <a:buNone/>
-            </a:pPr>
-            <a:r>
-              <a:rPr lang="en-US" sz="1800" dirty="0">
+            <a:pPr indent="0" marL="0">
+              <a:buNone/>
+            </a:pPr>
+            <a:r>
+              <a:rPr lang="en-US" sz="1500" dirty="0">
                 <a:solidFill>
                   <a:srgbClr val="212121"/>
                 </a:solidFill>
@@ -3778,150 +3695,72 @@
                 <a:ea typeface="Arial" pitchFamily="34" charset="-122"/>
                 <a:cs typeface="Arial" pitchFamily="34" charset="-120"/>
               </a:rPr>
-              <a:t>El registro de auditoría (CloudTrail) guarda un histórico de quién ha hecho qué, cuándo y desde dónde — cada llamada a la API queda registrada. Ya lo mencionaste como una de las cinco señales de la sesión pasada; hoy lo usas para responder a «¿quién ha tocado esto, y cuándo?»</a:t>
-            </a:r>
-            <a:endParaRPr lang="en-US" sz="1800" dirty="0"/>
-          </a:p>
-        </p:txBody>
-      </p:sp>
-      <p:sp>
-        <p:nvSpPr>
-          <p:cNvPr id="6" name="Shape 4"/>
-          <p:cNvSpPr/>
-          <p:nvPr/>
-        </p:nvSpPr>
-        <p:spPr>
-          <a:xfrm>
-            <a:off x="548640" y="2834640"/>
-            <a:ext cx="11091672" cy="1371600"/>
+              <a:t>Ningún secreto va nunca en texto plano en un fichero versionado — si uno se filtra, la solución es rotarlo, no solo borrarlo.</a:t>
+            </a:r>
+            <a:endParaRPr lang="en-US" sz="1500" dirty="0"/>
+          </a:p>
+        </p:txBody>
+      </p:sp>
+      <p:sp>
+        <p:nvSpPr>
+          <p:cNvPr id="25" name="Shape 23"/>
+          <p:cNvSpPr/>
+          <p:nvPr/>
+        </p:nvSpPr>
+        <p:spPr>
+          <a:xfrm>
+            <a:off x="6208776" y="4389120"/>
+            <a:ext cx="5431536" cy="1325880"/>
           </a:xfrm>
           <a:prstGeom prst="roundRect">
             <a:avLst/>
           </a:prstGeom>
           <a:solidFill>
-            <a:srgbClr val="FFF8E1"/>
+            <a:srgbClr val="E8EAF6"/>
           </a:solidFill>
-          <a:ln w="19050">
+          <a:ln w="15875">
             <a:solidFill>
-              <a:srgbClr val="FFA000"/>
+              <a:srgbClr val="3949AB"/>
             </a:solidFill>
             <a:prstDash val="solid"/>
           </a:ln>
         </p:spPr>
-        <p:txBody>
-          <a:bodyPr/>
-          <a:lstStyle/>
-          <a:p>
-            <a:endParaRPr lang="es-ES"/>
-          </a:p>
-        </p:txBody>
-      </p:sp>
-      <p:sp>
-        <p:nvSpPr>
-          <p:cNvPr id="7" name="Text 5"/>
-          <p:cNvSpPr/>
-          <p:nvPr/>
-        </p:nvSpPr>
-        <p:spPr>
-          <a:xfrm>
-            <a:off x="822960" y="2926080"/>
-            <a:ext cx="10543032" cy="1188720"/>
-          </a:xfrm>
-          <a:prstGeom prst="rect">
-            <a:avLst/>
-          </a:prstGeom>
-          <a:noFill/>
-          <a:ln/>
-        </p:spPr>
-        <p:txBody>
-          <a:bodyPr wrap="square" rtlCol="0" anchor="ctr"/>
-          <a:lstStyle/>
-          <a:p>
-            <a:pPr marL="0" indent="0">
-              <a:buNone/>
-            </a:pPr>
-            <a:r>
-              <a:rPr lang="en-US" sz="1800" dirty="0">
-                <a:solidFill>
-                  <a:srgbClr val="212121"/>
-                </a:solidFill>
-                <a:latin typeface="Arial" pitchFamily="34" charset="0"/>
-                <a:ea typeface="Arial" pitchFamily="34" charset="-122"/>
-                <a:cs typeface="Arial" pitchFamily="34" charset="-120"/>
-              </a:rPr>
-              <a:t>Si en la incidencia de la sesión pasada un grupo de seguridad tenía una regla que no debería estar ahí: las métricas y los registros te dijeron qué estaba fallando; el registro de auditoría te dice quién cambió esa regla y cuándo.</a:t>
-            </a:r>
-            <a:endParaRPr lang="en-US" sz="1800" dirty="0"/>
-          </a:p>
-        </p:txBody>
-      </p:sp>
-    </p:spTree>
-  </p:cSld>
-  <p:clrMapOvr>
-    <a:masterClrMapping/>
-  </p:clrMapOvr>
-</p:sld>
-</file>
-
-<file path=ppt/slides/slide15.xml><?xml version="1.0" encoding="utf-8"?>
-<p:sld xmlns:a="http://schemas.openxmlformats.org/drawingml/2006/main" xmlns:r="http://schemas.openxmlformats.org/officeDocument/2006/relationships" xmlns:p="http://schemas.openxmlformats.org/presentationml/2006/main">
-  <p:cSld name="Slide 15">
-    <p:spTree>
-      <p:nvGrpSpPr>
-        <p:cNvPr id="1" name=""/>
-        <p:cNvGrpSpPr/>
-        <p:nvPr/>
-      </p:nvGrpSpPr>
-      <p:grpSpPr>
-        <a:xfrm>
-          <a:off x="0" y="0"/>
-          <a:ext cx="0" cy="0"/>
-          <a:chOff x="0" y="0"/>
-          <a:chExt cx="0" cy="0"/>
-        </a:xfrm>
-      </p:grpSpPr>
-      <p:sp>
-        <p:nvSpPr>
-          <p:cNvPr id="2" name="Shape 0"/>
-          <p:cNvSpPr/>
-          <p:nvPr/>
-        </p:nvSpPr>
-        <p:spPr>
-          <a:xfrm>
-            <a:off x="0" y="0"/>
-            <a:ext cx="12188952" cy="777240"/>
-          </a:xfrm>
-          <a:prstGeom prst="rect">
+      </p:sp>
+      <p:sp>
+        <p:nvSpPr>
+          <p:cNvPr id="26" name="Shape 24"/>
+          <p:cNvSpPr/>
+          <p:nvPr/>
+        </p:nvSpPr>
+        <p:spPr>
+          <a:xfrm>
+            <a:off x="6391656" y="4759452"/>
+            <a:ext cx="566928" cy="566928"/>
+          </a:xfrm>
+          <a:prstGeom prst="ellipse">
             <a:avLst/>
           </a:prstGeom>
           <a:solidFill>
-            <a:srgbClr val="1A237E"/>
+            <a:srgbClr val="3949AB"/>
           </a:solidFill>
           <a:ln w="12700">
             <a:solidFill>
-              <a:srgbClr val="1A237E"/>
+              <a:srgbClr val="3949AB"/>
             </a:solidFill>
             <a:prstDash val="solid"/>
           </a:ln>
         </p:spPr>
-        <p:txBody>
-          <a:bodyPr/>
-          <a:lstStyle/>
-          <a:p>
-            <a:endParaRPr lang="es-ES"/>
-          </a:p>
-        </p:txBody>
-      </p:sp>
-      <p:sp>
-        <p:nvSpPr>
-          <p:cNvPr id="3" name="Text 1"/>
-          <p:cNvSpPr/>
-          <p:nvPr/>
-        </p:nvSpPr>
-        <p:spPr>
-          <a:xfrm>
-            <a:off x="365760" y="0"/>
-            <a:ext cx="11457432" cy="777240"/>
+      </p:sp>
+      <p:sp>
+        <p:nvSpPr>
+          <p:cNvPr id="27" name="Text 25"/>
+          <p:cNvSpPr/>
+          <p:nvPr/>
+        </p:nvSpPr>
+        <p:spPr>
+          <a:xfrm>
+            <a:off x="6391656" y="4759452"/>
+            <a:ext cx="566928" cy="566928"/>
           </a:xfrm>
           <a:prstGeom prst="rect">
             <a:avLst/>
@@ -3933,11 +3772,11 @@
           <a:bodyPr wrap="square" rtlCol="0" anchor="ctr"/>
           <a:lstStyle/>
           <a:p>
-            <a:pPr marL="0" indent="0">
-              <a:buNone/>
-            </a:pPr>
-            <a:r>
-              <a:rPr lang="en-US" sz="2400" b="1" dirty="0">
+            <a:pPr algn="ctr" indent="0" marL="0">
+              <a:buNone/>
+            </a:pPr>
+            <a:r>
+              <a:rPr lang="en-US" sz="1700" b="1" dirty="0">
                 <a:solidFill>
                   <a:srgbClr val="FFFFFF"/>
                 </a:solidFill>
@@ -3945,22 +3784,22 @@
                 <a:ea typeface="Arial" pitchFamily="34" charset="-122"/>
                 <a:cs typeface="Arial" pitchFamily="34" charset="-120"/>
               </a:rPr>
-              <a:t>Ideas clave</a:t>
-            </a:r>
-            <a:endParaRPr lang="en-US" sz="2400" dirty="0"/>
-          </a:p>
-        </p:txBody>
-      </p:sp>
-      <p:sp>
-        <p:nvSpPr>
-          <p:cNvPr id="4" name="Text 2"/>
-          <p:cNvSpPr/>
-          <p:nvPr/>
-        </p:nvSpPr>
-        <p:spPr>
-          <a:xfrm>
-            <a:off x="548640" y="6473952"/>
-            <a:ext cx="11091672" cy="292608"/>
+              <a:t>6</a:t>
+            </a:r>
+            <a:endParaRPr lang="en-US" sz="1700" dirty="0"/>
+          </a:p>
+        </p:txBody>
+      </p:sp>
+      <p:sp>
+        <p:nvSpPr>
+          <p:cNvPr id="28" name="Text 26"/>
+          <p:cNvSpPr/>
+          <p:nvPr/>
+        </p:nvSpPr>
+        <p:spPr>
+          <a:xfrm>
+            <a:off x="7077456" y="4389120"/>
+            <a:ext cx="4379976" cy="1325880"/>
           </a:xfrm>
           <a:prstGeom prst="rect">
             <a:avLst/>
@@ -3972,54 +3811,11 @@
           <a:bodyPr wrap="square" rtlCol="0" anchor="ctr"/>
           <a:lstStyle/>
           <a:p>
-            <a:pPr marL="0" indent="0" algn="r">
-              <a:buNone/>
-            </a:pPr>
-            <a:r>
-              <a:rPr lang="en-US" sz="1100" dirty="0">
-                <a:solidFill>
-                  <a:srgbClr val="757575"/>
-                </a:solidFill>
-                <a:latin typeface="Arial" pitchFamily="34" charset="0"/>
-                <a:ea typeface="Arial" pitchFamily="34" charset="-122"/>
-                <a:cs typeface="Arial" pitchFamily="34" charset="-120"/>
-              </a:rPr>
-              <a:t>Introducción a la Nube Pública — Tema 5: Identidad y gestión de accesos</a:t>
-            </a:r>
-            <a:endParaRPr lang="en-US" sz="1100" dirty="0"/>
-          </a:p>
-        </p:txBody>
-      </p:sp>
-      <p:sp>
-        <p:nvSpPr>
-          <p:cNvPr id="5" name="Text 3"/>
-          <p:cNvSpPr/>
-          <p:nvPr/>
-        </p:nvSpPr>
-        <p:spPr>
-          <a:xfrm>
-            <a:off x="548640" y="1188720"/>
-            <a:ext cx="11091672" cy="4389120"/>
-          </a:xfrm>
-          <a:prstGeom prst="rect">
-            <a:avLst/>
-          </a:prstGeom>
-          <a:noFill/>
-          <a:ln/>
-        </p:spPr>
-        <p:txBody>
-          <a:bodyPr wrap="square" rtlCol="0" anchor="t"/>
-          <a:lstStyle/>
-          <a:p>
-            <a:pPr marL="190500" indent="-190500">
-              <a:spcAft>
-                <a:spcPts val="1400"/>
-              </a:spcAft>
-              <a:buSzPct val="100000"/>
-              <a:buChar char="•"/>
-            </a:pPr>
-            <a:r>
-              <a:rPr lang="en-US" sz="1600" dirty="0">
+            <a:pPr indent="0" marL="0">
+              <a:buNone/>
+            </a:pPr>
+            <a:r>
+              <a:rPr lang="en-US" sz="1500" dirty="0">
                 <a:solidFill>
                   <a:srgbClr val="212121"/>
                 </a:solidFill>
@@ -4027,114 +3823,9 @@
                 <a:ea typeface="Arial" pitchFamily="34" charset="-122"/>
                 <a:cs typeface="Arial" pitchFamily="34" charset="-120"/>
               </a:rPr>
-              <a:t>Un rol se presta temporalmente (credenciales que caducan); un usuario tiene credenciales fijas — el Learner Lab usa un rol preasignado.</a:t>
-            </a:r>
-            <a:endParaRPr lang="en-US" sz="1600" dirty="0"/>
-          </a:p>
-          <a:p>
-            <a:pPr marL="190500" indent="-190500">
-              <a:spcAft>
-                <a:spcPts val="1400"/>
-              </a:spcAft>
-              <a:buSzPct val="100000"/>
-              <a:buChar char="•"/>
-            </a:pPr>
-            <a:r>
-              <a:rPr lang="en-US" sz="1600" dirty="0">
-                <a:solidFill>
-                  <a:srgbClr val="212121"/>
-                </a:solidFill>
-                <a:latin typeface="Arial" pitchFamily="34" charset="0"/>
-                <a:ea typeface="Arial" pitchFamily="34" charset="-122"/>
-                <a:cs typeface="Arial" pitchFamily="34" charset="-120"/>
-              </a:rPr>
-              <a:t>Una política se lee en cuatro campos: efecto, acción, recurso y condición.</a:t>
-            </a:r>
-            <a:endParaRPr lang="en-US" sz="1600" dirty="0"/>
-          </a:p>
-          <a:p>
-            <a:pPr marL="190500" indent="-190500">
-              <a:spcAft>
-                <a:spcPts val="1400"/>
-              </a:spcAft>
-              <a:buSzPct val="100000"/>
-              <a:buChar char="•"/>
-            </a:pPr>
-            <a:r>
-              <a:rPr lang="en-US" sz="1600" dirty="0">
-                <a:solidFill>
-                  <a:srgbClr val="212121"/>
-                </a:solidFill>
-                <a:latin typeface="Arial" pitchFamily="34" charset="0"/>
-                <a:ea typeface="Arial" pitchFamily="34" charset="-122"/>
-                <a:cs typeface="Arial" pitchFamily="34" charset="-120"/>
-              </a:rPr>
-              <a:t>Cuando hay varias políticas en juego: un Deny explícito gana siempre; si no, un Allow explícito permite; si ninguna dice nada, deniega por defecto.</a:t>
-            </a:r>
-            <a:endParaRPr lang="en-US" sz="1600" dirty="0"/>
-          </a:p>
-          <a:p>
-            <a:pPr marL="190500" indent="-190500">
-              <a:spcAft>
-                <a:spcPts val="1400"/>
-              </a:spcAft>
-              <a:buSzPct val="100000"/>
-              <a:buChar char="•"/>
-            </a:pPr>
-            <a:r>
-              <a:rPr lang="en-US" sz="1600" dirty="0">
-                <a:solidFill>
-                  <a:srgbClr val="212121"/>
-                </a:solidFill>
-                <a:latin typeface="Arial" pitchFamily="34" charset="0"/>
-                <a:ea typeface="Arial" pitchFamily="34" charset="-122"/>
-                <a:cs typeface="Arial" pitchFamily="34" charset="-120"/>
-              </a:rPr>
-              <a:t>El principio de mínimo privilegio limita el alcance de cualquier fallo — un comodín de más es el error más común que lo rompe.</a:t>
-            </a:r>
-            <a:endParaRPr lang="en-US" sz="1600" dirty="0"/>
-          </a:p>
-          <a:p>
-            <a:pPr marL="190500" indent="-190500">
-              <a:spcAft>
-                <a:spcPts val="1400"/>
-              </a:spcAft>
-              <a:buSzPct val="100000"/>
-              <a:buChar char="•"/>
-            </a:pPr>
-            <a:r>
-              <a:rPr lang="en-US" sz="1600" dirty="0">
-                <a:solidFill>
-                  <a:srgbClr val="212121"/>
-                </a:solidFill>
-                <a:latin typeface="Arial" pitchFamily="34" charset="0"/>
-                <a:ea typeface="Arial" pitchFamily="34" charset="-122"/>
-                <a:cs typeface="Arial" pitchFamily="34" charset="-120"/>
-              </a:rPr>
-              <a:t>Ningún secreto va nunca en texto plano en un fichero versionado — si uno llega a estarlo, la solución es rotarlo, no borrarlo.</a:t>
-            </a:r>
-            <a:endParaRPr lang="en-US" sz="1600" dirty="0"/>
-          </a:p>
-          <a:p>
-            <a:pPr marL="190500" indent="-190500">
-              <a:spcAft>
-                <a:spcPts val="1400"/>
-              </a:spcAft>
-              <a:buSzPct val="100000"/>
-              <a:buChar char="•"/>
-            </a:pPr>
-            <a:r>
-              <a:rPr lang="en-US" sz="1600" dirty="0">
-                <a:solidFill>
-                  <a:srgbClr val="212121"/>
-                </a:solidFill>
-                <a:latin typeface="Arial" pitchFamily="34" charset="0"/>
-                <a:ea typeface="Arial" pitchFamily="34" charset="-122"/>
-                <a:cs typeface="Arial" pitchFamily="34" charset="-120"/>
-              </a:rPr>
-              <a:t>El registro de auditoría responde a quién ha hecho qué y cuándo — completa el diagnóstico más allá de métricas y registros.</a:t>
-            </a:r>
-            <a:endParaRPr lang="en-US" sz="1600" dirty="0"/>
+              <a:t>El registro de auditoría responde a quién ha hecho qué y cuándo — la pieza que completa el diagnóstico, más allá de métricas y registros.</a:t>
+            </a:r>
+            <a:endParaRPr lang="en-US" sz="1500" dirty="0"/>
           </a:p>
         </p:txBody>
       </p:sp>
@@ -4187,13 +3878,6 @@
             <a:prstDash val="solid"/>
           </a:ln>
         </p:spPr>
-        <p:txBody>
-          <a:bodyPr/>
-          <a:lstStyle/>
-          <a:p>
-            <a:endParaRPr lang="es-ES"/>
-          </a:p>
-        </p:txBody>
       </p:sp>
       <p:sp>
         <p:nvSpPr>
@@ -4216,7 +3900,7 @@
           <a:bodyPr wrap="square" rtlCol="0" anchor="ctr"/>
           <a:lstStyle/>
           <a:p>
-            <a:pPr marL="0" indent="0">
+            <a:pPr indent="0" marL="0">
               <a:buNone/>
             </a:pPr>
             <a:r>
@@ -4228,7 +3912,7 @@
                 <a:ea typeface="Arial" pitchFamily="34" charset="-122"/>
                 <a:cs typeface="Arial" pitchFamily="34" charset="-120"/>
               </a:rPr>
-              <a:t>IAM deja de ser una caja negra</a:t>
+              <a:t>Identidad y gestión de accesos</a:t>
             </a:r>
             <a:endParaRPr lang="en-US" sz="2400" dirty="0"/>
           </a:p>
@@ -4255,7 +3939,7 @@
           <a:bodyPr wrap="square" rtlCol="0" anchor="ctr"/>
           <a:lstStyle/>
           <a:p>
-            <a:pPr marL="0" indent="0" algn="r">
+            <a:pPr algn="r" indent="0" marL="0">
               <a:buNone/>
             </a:pPr>
             <a:r>
@@ -4275,14 +3959,39 @@
       </p:sp>
       <p:sp>
         <p:nvSpPr>
-          <p:cNvPr id="5" name="Text 3"/>
-          <p:cNvSpPr/>
-          <p:nvPr/>
-        </p:nvSpPr>
-        <p:spPr>
-          <a:xfrm>
-            <a:off x="548640" y="1554480"/>
-            <a:ext cx="11091672" cy="1005840"/>
+          <p:cNvPr id="5" name="Shape 3"/>
+          <p:cNvSpPr/>
+          <p:nvPr/>
+        </p:nvSpPr>
+        <p:spPr>
+          <a:xfrm>
+            <a:off x="548640" y="1188720"/>
+            <a:ext cx="11091672" cy="1554480"/>
+          </a:xfrm>
+          <a:prstGeom prst="roundRect">
+            <a:avLst/>
+          </a:prstGeom>
+          <a:solidFill>
+            <a:srgbClr val="E8EAF6"/>
+          </a:solidFill>
+          <a:ln w="15875">
+            <a:solidFill>
+              <a:srgbClr val="3949AB"/>
+            </a:solidFill>
+            <a:prstDash val="solid"/>
+          </a:ln>
+        </p:spPr>
+      </p:sp>
+      <p:sp>
+        <p:nvSpPr>
+          <p:cNvPr id="6" name="Text 4"/>
+          <p:cNvSpPr/>
+          <p:nvPr/>
+        </p:nvSpPr>
+        <p:spPr>
+          <a:xfrm>
+            <a:off x="731520" y="1261872"/>
+            <a:ext cx="10725912" cy="548640"/>
           </a:xfrm>
           <a:prstGeom prst="rect">
             <a:avLst/>
@@ -4291,14 +4000,53 @@
           <a:ln/>
         </p:spPr>
         <p:txBody>
+          <a:bodyPr wrap="square" rtlCol="0" anchor="ctr"/>
+          <a:lstStyle/>
+          <a:p>
+            <a:pPr indent="0" marL="0">
+              <a:buNone/>
+            </a:pPr>
+            <a:r>
+              <a:rPr lang="en-US" sz="2000" b="1" dirty="0">
+                <a:solidFill>
+                  <a:srgbClr val="1A237E"/>
+                </a:solidFill>
+                <a:latin typeface="Arial" pitchFamily="34" charset="0"/>
+                <a:ea typeface="Arial" pitchFamily="34" charset="-122"/>
+                <a:cs typeface="Arial" pitchFamily="34" charset="-120"/>
+              </a:rPr>
+              <a:t>De caja negra a herramienta que usas de verdad</a:t>
+            </a:r>
+            <a:endParaRPr lang="en-US" sz="2000" dirty="0"/>
+          </a:p>
+        </p:txBody>
+      </p:sp>
+      <p:sp>
+        <p:nvSpPr>
+          <p:cNvPr id="7" name="Text 5"/>
+          <p:cNvSpPr/>
+          <p:nvPr/>
+        </p:nvSpPr>
+        <p:spPr>
+          <a:xfrm>
+            <a:off x="731520" y="1810512"/>
+            <a:ext cx="10725912" cy="859536"/>
+          </a:xfrm>
+          <a:prstGeom prst="rect">
+            <a:avLst/>
+          </a:prstGeom>
+          <a:noFill/>
+          <a:ln/>
+        </p:spPr>
+        <p:txBody>
           <a:bodyPr wrap="square" rtlCol="0" anchor="t"/>
           <a:lstStyle/>
           <a:p>
-            <a:pPr marL="0" indent="0">
-              <a:buNone/>
-            </a:pPr>
-            <a:r>
-              <a:rPr lang="en-US" sz="2100" dirty="0">
+            <a:pPr indent="0" marL="0">
+              <a:buNone/>
+            </a:pPr>
+            <a:r>
+              <a:rPr lang="en-US" sz="1600" dirty="0">
                 <a:solidFill>
                   <a:srgbClr val="212121"/>
                 </a:solidFill>
@@ -4306,22 +4054,125 @@
                 <a:ea typeface="Arial" pitchFamily="34" charset="-122"/>
                 <a:cs typeface="Arial" pitchFamily="34" charset="-120"/>
               </a:rPr>
-              <a:t>Desde la primera sesión sabes que tu rol en el Learner Lab está preasignado, y que no puedes crear usuarios ni roles nuevos. Hoy no cambia esa regla.</a:t>
-            </a:r>
-            <a:endParaRPr lang="en-US" sz="2100" dirty="0"/>
-          </a:p>
-        </p:txBody>
-      </p:sp>
-      <p:sp>
-        <p:nvSpPr>
-          <p:cNvPr id="6" name="Shape 4"/>
-          <p:cNvSpPr/>
-          <p:nvPr/>
-        </p:nvSpPr>
-        <p:spPr>
-          <a:xfrm>
-            <a:off x="548640" y="2880360"/>
-            <a:ext cx="11091672" cy="1554480"/>
+              <a:t>Tu rol en el Learner Lab está preasignado y no puedes crear usuarios ni roles nuevos. Hoy no cambia esa regla — pero dejas de tratar IAM como algo que «ya viene configurado».</a:t>
+            </a:r>
+            <a:endParaRPr lang="en-US" sz="1600" dirty="0"/>
+          </a:p>
+        </p:txBody>
+      </p:sp>
+      <p:sp>
+        <p:nvSpPr>
+          <p:cNvPr id="8" name="Shape 6"/>
+          <p:cNvSpPr/>
+          <p:nvPr/>
+        </p:nvSpPr>
+        <p:spPr>
+          <a:xfrm>
+            <a:off x="548640" y="3063240"/>
+            <a:ext cx="5362956" cy="1691640"/>
+          </a:xfrm>
+          <a:prstGeom prst="roundRect">
+            <a:avLst/>
+          </a:prstGeom>
+          <a:solidFill>
+            <a:srgbClr val="E8EAF6"/>
+          </a:solidFill>
+          <a:ln w="15875">
+            <a:solidFill>
+              <a:srgbClr val="3949AB"/>
+            </a:solidFill>
+            <a:prstDash val="solid"/>
+          </a:ln>
+        </p:spPr>
+      </p:sp>
+      <p:sp>
+        <p:nvSpPr>
+          <p:cNvPr id="9" name="Text 7"/>
+          <p:cNvSpPr/>
+          <p:nvPr/>
+        </p:nvSpPr>
+        <p:spPr>
+          <a:xfrm>
+            <a:off x="685800" y="3154680"/>
+            <a:ext cx="5088636" cy="594360"/>
+          </a:xfrm>
+          <a:prstGeom prst="rect">
+            <a:avLst/>
+          </a:prstGeom>
+          <a:noFill/>
+          <a:ln/>
+        </p:spPr>
+        <p:txBody>
+          <a:bodyPr wrap="square" rtlCol="0" anchor="ctr"/>
+          <a:lstStyle/>
+          <a:p>
+            <a:pPr algn="ctr" indent="0" marL="0">
+              <a:buNone/>
+            </a:pPr>
+            <a:r>
+              <a:rPr lang="en-US" sz="1800" b="1" dirty="0">
+                <a:solidFill>
+                  <a:srgbClr val="1A237E"/>
+                </a:solidFill>
+                <a:latin typeface="Arial" pitchFamily="34" charset="0"/>
+                <a:ea typeface="Arial" pitchFamily="34" charset="-122"/>
+                <a:cs typeface="Arial" pitchFamily="34" charset="-120"/>
+              </a:rPr>
+              <a:t>Aplicar un rol existente</a:t>
+            </a:r>
+            <a:endParaRPr lang="en-US" sz="1800" dirty="0"/>
+          </a:p>
+        </p:txBody>
+      </p:sp>
+      <p:sp>
+        <p:nvSpPr>
+          <p:cNvPr id="10" name="Text 8"/>
+          <p:cNvSpPr/>
+          <p:nvPr/>
+        </p:nvSpPr>
+        <p:spPr>
+          <a:xfrm>
+            <a:off x="731520" y="3794760"/>
+            <a:ext cx="4997196" cy="868680"/>
+          </a:xfrm>
+          <a:prstGeom prst="rect">
+            <a:avLst/>
+          </a:prstGeom>
+          <a:noFill/>
+          <a:ln/>
+        </p:spPr>
+        <p:txBody>
+          <a:bodyPr wrap="square" rtlCol="0" anchor="t"/>
+          <a:lstStyle/>
+          <a:p>
+            <a:pPr algn="ctr" indent="0" marL="0">
+              <a:buNone/>
+            </a:pPr>
+            <a:r>
+              <a:rPr lang="en-US" sz="1500" dirty="0">
+                <a:solidFill>
+                  <a:srgbClr val="212121"/>
+                </a:solidFill>
+                <a:latin typeface="Arial" pitchFamily="34" charset="0"/>
+                <a:ea typeface="Arial" pitchFamily="34" charset="-122"/>
+                <a:cs typeface="Arial" pitchFamily="34" charset="-120"/>
+              </a:rPr>
+              <a:t>Para que una instancia acceda a otros servicios sin credenciales</a:t>
+            </a:r>
+            <a:endParaRPr lang="en-US" sz="1500" dirty="0"/>
+          </a:p>
+        </p:txBody>
+      </p:sp>
+      <p:sp>
+        <p:nvSpPr>
+          <p:cNvPr id="11" name="Shape 9"/>
+          <p:cNvSpPr/>
+          <p:nvPr/>
+        </p:nvSpPr>
+        <p:spPr>
+          <a:xfrm>
+            <a:off x="6277356" y="3063240"/>
+            <a:ext cx="5362956" cy="1691640"/>
           </a:xfrm>
           <a:prstGeom prst="roundRect">
             <a:avLst/>
@@ -4329,31 +4180,24 @@
           <a:solidFill>
             <a:srgbClr val="FFF8E1"/>
           </a:solidFill>
-          <a:ln w="19050">
+          <a:ln w="25400">
             <a:solidFill>
               <a:srgbClr val="FFA000"/>
             </a:solidFill>
             <a:prstDash val="solid"/>
           </a:ln>
         </p:spPr>
-        <p:txBody>
-          <a:bodyPr/>
-          <a:lstStyle/>
-          <a:p>
-            <a:endParaRPr lang="es-ES"/>
-          </a:p>
-        </p:txBody>
-      </p:sp>
-      <p:sp>
-        <p:nvSpPr>
-          <p:cNvPr id="7" name="Text 5"/>
-          <p:cNvSpPr/>
-          <p:nvPr/>
-        </p:nvSpPr>
-        <p:spPr>
-          <a:xfrm>
-            <a:off x="822960" y="2971800"/>
-            <a:ext cx="10543032" cy="1371600"/>
+      </p:sp>
+      <p:sp>
+        <p:nvSpPr>
+          <p:cNvPr id="12" name="Text 10"/>
+          <p:cNvSpPr/>
+          <p:nvPr/>
+        </p:nvSpPr>
+        <p:spPr>
+          <a:xfrm>
+            <a:off x="6414516" y="3154680"/>
+            <a:ext cx="5088636" cy="594360"/>
           </a:xfrm>
           <a:prstGeom prst="rect">
             <a:avLst/>
@@ -4365,11 +4209,50 @@
           <a:bodyPr wrap="square" rtlCol="0" anchor="ctr"/>
           <a:lstStyle/>
           <a:p>
-            <a:pPr marL="0" indent="0">
-              <a:buNone/>
-            </a:pPr>
-            <a:r>
-              <a:rPr lang="en-US" sz="1900" dirty="0">
+            <a:pPr algn="ctr" indent="0" marL="0">
+              <a:buNone/>
+            </a:pPr>
+            <a:r>
+              <a:rPr lang="en-US" sz="1800" b="1" dirty="0">
+                <a:solidFill>
+                  <a:srgbClr val="1A237E"/>
+                </a:solidFill>
+                <a:latin typeface="Arial" pitchFamily="34" charset="0"/>
+                <a:ea typeface="Arial" pitchFamily="34" charset="-122"/>
+                <a:cs typeface="Arial" pitchFamily="34" charset="-120"/>
+              </a:rPr>
+              <a:t>Detectar políticas mal escritas</a:t>
+            </a:r>
+            <a:endParaRPr lang="en-US" sz="1800" dirty="0"/>
+          </a:p>
+        </p:txBody>
+      </p:sp>
+      <p:sp>
+        <p:nvSpPr>
+          <p:cNvPr id="13" name="Text 11"/>
+          <p:cNvSpPr/>
+          <p:nvPr/>
+        </p:nvSpPr>
+        <p:spPr>
+          <a:xfrm>
+            <a:off x="6460236" y="3794760"/>
+            <a:ext cx="4997196" cy="868680"/>
+          </a:xfrm>
+          <a:prstGeom prst="rect">
+            <a:avLst/>
+          </a:prstGeom>
+          <a:noFill/>
+          <a:ln/>
+        </p:spPr>
+        <p:txBody>
+          <a:bodyPr wrap="square" rtlCol="0" anchor="t"/>
+          <a:lstStyle/>
+          <a:p>
+            <a:pPr algn="ctr" indent="0" marL="0">
+              <a:buNone/>
+            </a:pPr>
+            <a:r>
+              <a:rPr lang="en-US" sz="1500" dirty="0">
                 <a:solidFill>
                   <a:srgbClr val="212121"/>
                 </a:solidFill>
@@ -4377,9 +4260,9 @@
                 <a:ea typeface="Arial" pitchFamily="34" charset="-122"/>
                 <a:cs typeface="Arial" pitchFamily="34" charset="-120"/>
               </a:rPr>
-              <a:t>Pero sí dejas de tratar IAM como una caja negra que «ya viene configurada» y empiezas a leerla, corregirla y usarla de verdad: aplicar un rol existente a una instancia sin credenciales, y detectar por qué una política está mal escrita antes de que cause un problema real.</a:t>
-            </a:r>
-            <a:endParaRPr lang="en-US" sz="1900" dirty="0"/>
+              <a:t>Antes de que causen un problema real</a:t>
+            </a:r>
+            <a:endParaRPr lang="en-US" sz="1500" dirty="0"/>
           </a:p>
         </p:txBody>
       </p:sp>
@@ -4432,13 +4315,6 @@
             <a:prstDash val="solid"/>
           </a:ln>
         </p:spPr>
-        <p:txBody>
-          <a:bodyPr/>
-          <a:lstStyle/>
-          <a:p>
-            <a:endParaRPr lang="es-ES"/>
-          </a:p>
-        </p:txBody>
       </p:sp>
       <p:sp>
         <p:nvSpPr>
@@ -4461,7 +4337,7 @@
           <a:bodyPr wrap="square" rtlCol="0" anchor="ctr"/>
           <a:lstStyle/>
           <a:p>
-            <a:pPr marL="0" indent="0">
+            <a:pPr indent="0" marL="0">
               <a:buNone/>
             </a:pPr>
             <a:r>
@@ -4500,7 +4376,7 @@
           <a:bodyPr wrap="square" rtlCol="0" anchor="ctr"/>
           <a:lstStyle/>
           <a:p>
-            <a:pPr marL="0" indent="0" algn="r">
+            <a:pPr algn="r" indent="0" marL="0">
               <a:buNone/>
             </a:pPr>
             <a:r>
@@ -4526,8 +4402,8 @@
         </p:nvSpPr>
         <p:spPr>
           <a:xfrm>
-            <a:off x="548640" y="1280160"/>
-            <a:ext cx="11091672" cy="457200"/>
+            <a:off x="548640" y="1143000"/>
+            <a:ext cx="11091672" cy="365760"/>
           </a:xfrm>
           <a:prstGeom prst="rect">
             <a:avLst/>
@@ -4536,30 +4412,30 @@
           <a:ln/>
         </p:spPr>
         <p:txBody>
-          <a:bodyPr wrap="square" rtlCol="0" anchor="t"/>
-          <a:lstStyle/>
-          <a:p>
-            <a:pPr marL="0" indent="0">
-              <a:buNone/>
-            </a:pPr>
-            <a:r>
-              <a:rPr lang="en-US" sz="1800" dirty="0">
-                <a:solidFill>
-                  <a:srgbClr val="212121"/>
-                </a:solidFill>
-                <a:latin typeface="Arial" pitchFamily="34" charset="0"/>
-                <a:ea typeface="Arial" pitchFamily="34" charset="-122"/>
-                <a:cs typeface="Arial" pitchFamily="34" charset="-120"/>
-              </a:rPr>
-              <a:t>IAM tiene varias piezas que conviene distinguir bien — ya llevas semanas usando una de ellas sin nombrarla:</a:t>
-            </a:r>
-            <a:endParaRPr lang="en-US" sz="1800" dirty="0"/>
+          <a:bodyPr wrap="square" rtlCol="0" anchor="ctr"/>
+          <a:lstStyle/>
+          <a:p>
+            <a:pPr indent="0" marL="0">
+              <a:buNone/>
+            </a:pPr>
+            <a:r>
+              <a:rPr lang="en-US" sz="1500" b="1" dirty="0">
+                <a:solidFill>
+                  <a:srgbClr val="3949AB"/>
+                </a:solidFill>
+                <a:latin typeface="Arial" pitchFamily="34" charset="0"/>
+                <a:ea typeface="Arial" pitchFamily="34" charset="-122"/>
+                <a:cs typeface="Arial" pitchFamily="34" charset="-120"/>
+              </a:rPr>
+              <a:t>Ya llevas semanas usando una de estas piezas sin nombrarla</a:t>
+            </a:r>
+            <a:endParaRPr lang="en-US" sz="1500" dirty="0"/>
           </a:p>
         </p:txBody>
       </p:sp>
       <p:graphicFrame>
         <p:nvGraphicFramePr>
-          <p:cNvPr id="6" name="Table 0"/>
+          <p:cNvPr id="4" name="Table 0"/>
           <p:cNvGraphicFramePr>
             <a:graphicFrameLocks noGrp="1"/>
           </p:cNvGraphicFramePr>
@@ -4572,47 +4448,29 @@
           </p:nvPr>
         </p:nvGraphicFramePr>
         <p:xfrm>
-          <a:off x="548640" y="1965960"/>
-          <a:ext cx="11091672" cy="3886200"/>
+          <a:off x="548640" y="1554480"/>
+          <a:ext cx="11091672" cy="914400"/>
         </p:xfrm>
         <a:graphic>
           <a:graphicData uri="http://schemas.openxmlformats.org/drawingml/2006/table">
             <a:tbl>
               <a:tblPr/>
               <a:tblGrid>
-                <a:gridCol w="2440168">
-                  <a:extLst>
-                    <a:ext uri="{9D8B030D-6E8A-4147-A177-3AD203B41FA5}">
-                      <a16:colId xmlns:a16="http://schemas.microsoft.com/office/drawing/2014/main" val="20000"/>
-                    </a:ext>
-                  </a:extLst>
-                </a:gridCol>
-                <a:gridCol w="4658502">
-                  <a:extLst>
-                    <a:ext uri="{9D8B030D-6E8A-4147-A177-3AD203B41FA5}">
-                      <a16:colId xmlns:a16="http://schemas.microsoft.com/office/drawing/2014/main" val="20001"/>
-                    </a:ext>
-                  </a:extLst>
-                </a:gridCol>
-                <a:gridCol w="3993002">
-                  <a:extLst>
-                    <a:ext uri="{9D8B030D-6E8A-4147-A177-3AD203B41FA5}">
-                      <a16:colId xmlns:a16="http://schemas.microsoft.com/office/drawing/2014/main" val="20002"/>
-                    </a:ext>
-                  </a:extLst>
-                </a:gridCol>
+                <a:gridCol w="2218334"/>
+                <a:gridCol w="4658502"/>
+                <a:gridCol w="4214835"/>
               </a:tblGrid>
-              <a:tr h="777240">
+              <a:tr h="594360">
                 <a:tc>
                   <a:txBody>
                     <a:bodyPr/>
                     <a:lstStyle/>
                     <a:p>
-                      <a:pPr marL="0" indent="0" algn="ctr">
+                      <a:pPr algn="ctr" indent="0" marL="0">
                         <a:buNone/>
                       </a:pPr>
                       <a:r>
-                        <a:rPr lang="en-US" sz="1500" b="1" dirty="0">
+                        <a:rPr lang="en-US" sz="1350" b="1" dirty="0">
                           <a:solidFill>
                             <a:srgbClr val="FFFFFF"/>
                           </a:solidFill>
@@ -4622,14 +4480,14 @@
                         </a:rPr>
                         <a:t>Pieza</a:t>
                       </a:r>
-                      <a:endParaRPr lang="en-US" sz="1500" dirty="0">
+                      <a:endParaRPr lang="en-US" sz="1350" dirty="0">
                         <a:latin typeface="Arial" charset="0"/>
                         <a:ea typeface="Arial" charset="0"/>
                         <a:cs typeface="Arial" charset="0"/>
                       </a:endParaRPr>
                     </a:p>
                   </a:txBody>
-                  <a:tcPr anchor="ctr">
+                  <a:tcPr marL="91440" marR="91440" marT="45720" marB="45720" anchor="ctr">
                     <a:lnL w="12700" cap="flat" cmpd="sng" algn="ctr">
                       <a:solidFill>
                         <a:srgbClr val="EEEEEE"/>
@@ -4676,11 +4534,11 @@
                     <a:bodyPr/>
                     <a:lstStyle/>
                     <a:p>
-                      <a:pPr marL="0" indent="0" algn="ctr">
+                      <a:pPr algn="ctr" indent="0" marL="0">
                         <a:buNone/>
                       </a:pPr>
                       <a:r>
-                        <a:rPr lang="en-US" sz="1500" b="1" dirty="0">
+                        <a:rPr lang="en-US" sz="1350" b="1" dirty="0">
                           <a:solidFill>
                             <a:srgbClr val="FFFFFF"/>
                           </a:solidFill>
@@ -4690,14 +4548,14 @@
                         </a:rPr>
                         <a:t>Qué es</a:t>
                       </a:r>
-                      <a:endParaRPr lang="en-US" sz="1500" dirty="0">
+                      <a:endParaRPr lang="en-US" sz="1350" dirty="0">
                         <a:latin typeface="Arial" charset="0"/>
                         <a:ea typeface="Arial" charset="0"/>
                         <a:cs typeface="Arial" charset="0"/>
                       </a:endParaRPr>
                     </a:p>
                   </a:txBody>
-                  <a:tcPr anchor="ctr">
+                  <a:tcPr marL="91440" marR="91440" marT="45720" marB="45720" anchor="ctr">
                     <a:lnL w="12700" cap="flat" cmpd="sng" algn="ctr">
                       <a:solidFill>
                         <a:srgbClr val="EEEEEE"/>
@@ -4744,11 +4602,11 @@
                     <a:bodyPr/>
                     <a:lstStyle/>
                     <a:p>
-                      <a:pPr marL="0" indent="0" algn="ctr">
+                      <a:pPr algn="ctr" indent="0" marL="0">
                         <a:buNone/>
                       </a:pPr>
                       <a:r>
-                        <a:rPr lang="en-US" sz="1500" b="1" dirty="0">
+                        <a:rPr lang="en-US" sz="1350" b="1" dirty="0">
                           <a:solidFill>
                             <a:srgbClr val="FFFFFF"/>
                           </a:solidFill>
@@ -4758,14 +4616,14 @@
                         </a:rPr>
                         <a:t>En el Learner Lab</a:t>
                       </a:r>
-                      <a:endParaRPr lang="en-US" sz="1500" dirty="0">
+                      <a:endParaRPr lang="en-US" sz="1350" dirty="0">
                         <a:latin typeface="Arial" charset="0"/>
                         <a:ea typeface="Arial" charset="0"/>
                         <a:cs typeface="Arial" charset="0"/>
                       </a:endParaRPr>
                     </a:p>
                   </a:txBody>
-                  <a:tcPr anchor="ctr">
+                  <a:tcPr marL="91440" marR="91440" marT="45720" marB="45720" anchor="ctr">
                     <a:lnL w="12700" cap="flat" cmpd="sng" algn="ctr">
                       <a:solidFill>
                         <a:srgbClr val="EEEEEE"/>
@@ -4807,23 +4665,18 @@
                     </a:solidFill>
                   </a:tcPr>
                 </a:tc>
-                <a:extLst>
-                  <a:ext uri="{0D108BD9-81ED-4DB2-BD59-A6C34878D82A}">
-                    <a16:rowId xmlns:a16="http://schemas.microsoft.com/office/drawing/2014/main" val="10000"/>
-                  </a:ext>
-                </a:extLst>
               </a:tr>
-              <a:tr h="777240">
+              <a:tr h="594360">
                 <a:tc>
                   <a:txBody>
                     <a:bodyPr/>
                     <a:lstStyle/>
                     <a:p>
-                      <a:pPr marL="0" indent="0">
+                      <a:pPr indent="0" marL="0">
                         <a:buNone/>
                       </a:pPr>
                       <a:r>
-                        <a:rPr lang="en-US" sz="1400" b="1" dirty="0">
+                        <a:rPr lang="en-US" sz="1250" b="1" dirty="0">
                           <a:solidFill>
                             <a:srgbClr val="212121"/>
                           </a:solidFill>
@@ -4833,14 +4686,14 @@
                         </a:rPr>
                         <a:t>Usuario</a:t>
                       </a:r>
-                      <a:endParaRPr lang="en-US" sz="1400" dirty="0">
+                      <a:endParaRPr lang="en-US" sz="1250" dirty="0">
                         <a:latin typeface="Arial" charset="0"/>
                         <a:ea typeface="Arial" charset="0"/>
                         <a:cs typeface="Arial" charset="0"/>
                       </a:endParaRPr>
                     </a:p>
                   </a:txBody>
-                  <a:tcPr anchor="ctr">
+                  <a:tcPr marL="91440" marR="91440" marT="45720" marB="45720" anchor="ctr">
                     <a:lnL w="12700" cap="flat" cmpd="sng" algn="ctr">
                       <a:solidFill>
                         <a:srgbClr val="EEEEEE"/>
@@ -4887,11 +4740,11 @@
                     <a:bodyPr/>
                     <a:lstStyle/>
                     <a:p>
-                      <a:pPr marL="0" indent="0">
+                      <a:pPr indent="0" marL="0">
                         <a:buNone/>
                       </a:pPr>
                       <a:r>
-                        <a:rPr lang="en-US" sz="1400" dirty="0">
+                        <a:rPr lang="en-US" sz="1250" dirty="0">
                           <a:solidFill>
                             <a:srgbClr val="212121"/>
                           </a:solidFill>
@@ -4901,14 +4754,14 @@
                         </a:rPr>
                         <a:t>Identidad fija, con credenciales de larga duración</a:t>
                       </a:r>
-                      <a:endParaRPr lang="en-US" sz="1400" dirty="0">
+                      <a:endParaRPr lang="en-US" sz="1250" dirty="0">
                         <a:latin typeface="Arial" charset="0"/>
                         <a:ea typeface="Arial" charset="0"/>
                         <a:cs typeface="Arial" charset="0"/>
                       </a:endParaRPr>
                     </a:p>
                   </a:txBody>
-                  <a:tcPr anchor="ctr">
+                  <a:tcPr marL="91440" marR="91440" marT="45720" marB="45720" anchor="ctr">
                     <a:lnL w="12700" cap="flat" cmpd="sng" algn="ctr">
                       <a:solidFill>
                         <a:srgbClr val="EEEEEE"/>
@@ -4955,11 +4808,11 @@
                     <a:bodyPr/>
                     <a:lstStyle/>
                     <a:p>
-                      <a:pPr marL="0" indent="0">
+                      <a:pPr indent="0" marL="0">
                         <a:buNone/>
                       </a:pPr>
                       <a:r>
-                        <a:rPr lang="en-US" sz="1400" dirty="0">
+                        <a:rPr lang="en-US" sz="1250" dirty="0">
                           <a:solidFill>
                             <a:srgbClr val="212121"/>
                           </a:solidFill>
@@ -4969,14 +4822,14 @@
                         </a:rPr>
                         <a:t>No puedes crear ninguno — no lo necesitas</a:t>
                       </a:r>
-                      <a:endParaRPr lang="en-US" sz="1400" dirty="0">
+                      <a:endParaRPr lang="en-US" sz="1250" dirty="0">
                         <a:latin typeface="Arial" charset="0"/>
                         <a:ea typeface="Arial" charset="0"/>
                         <a:cs typeface="Arial" charset="0"/>
                       </a:endParaRPr>
                     </a:p>
                   </a:txBody>
-                  <a:tcPr anchor="ctr">
+                  <a:tcPr marL="91440" marR="91440" marT="45720" marB="45720" anchor="ctr">
                     <a:lnL w="12700" cap="flat" cmpd="sng" algn="ctr">
                       <a:solidFill>
                         <a:srgbClr val="EEEEEE"/>
@@ -5018,23 +4871,18 @@
                     </a:solidFill>
                   </a:tcPr>
                 </a:tc>
-                <a:extLst>
-                  <a:ext uri="{0D108BD9-81ED-4DB2-BD59-A6C34878D82A}">
-                    <a16:rowId xmlns:a16="http://schemas.microsoft.com/office/drawing/2014/main" val="10001"/>
-                  </a:ext>
-                </a:extLst>
               </a:tr>
-              <a:tr h="777240">
+              <a:tr h="594360">
                 <a:tc>
                   <a:txBody>
                     <a:bodyPr/>
                     <a:lstStyle/>
                     <a:p>
-                      <a:pPr marL="0" indent="0">
+                      <a:pPr indent="0" marL="0">
                         <a:buNone/>
                       </a:pPr>
                       <a:r>
-                        <a:rPr lang="en-US" sz="1400" b="1" dirty="0">
+                        <a:rPr lang="en-US" sz="1250" b="1" dirty="0">
                           <a:solidFill>
                             <a:srgbClr val="212121"/>
                           </a:solidFill>
@@ -5044,14 +4892,14 @@
                         </a:rPr>
                         <a:t>Rol</a:t>
                       </a:r>
-                      <a:endParaRPr lang="en-US" sz="1400" dirty="0">
+                      <a:endParaRPr lang="en-US" sz="1250" dirty="0">
                         <a:latin typeface="Arial" charset="0"/>
                         <a:ea typeface="Arial" charset="0"/>
                         <a:cs typeface="Arial" charset="0"/>
                       </a:endParaRPr>
                     </a:p>
                   </a:txBody>
-                  <a:tcPr anchor="ctr">
+                  <a:tcPr marL="91440" marR="91440" marT="45720" marB="45720" anchor="ctr">
                     <a:lnL w="12700" cap="flat" cmpd="sng" algn="ctr">
                       <a:solidFill>
                         <a:srgbClr val="EEEEEE"/>
@@ -5098,11 +4946,11 @@
                     <a:bodyPr/>
                     <a:lstStyle/>
                     <a:p>
-                      <a:pPr marL="0" indent="0">
+                      <a:pPr indent="0" marL="0">
                         <a:buNone/>
                       </a:pPr>
                       <a:r>
-                        <a:rPr lang="en-US" sz="1400" dirty="0">
+                        <a:rPr lang="en-US" sz="1250" dirty="0">
                           <a:solidFill>
                             <a:srgbClr val="212121"/>
                           </a:solidFill>
@@ -5110,16 +4958,16 @@
                           <a:ea typeface="Arial" pitchFamily="34" charset="-122"/>
                           <a:cs typeface="Arial" pitchFamily="34" charset="-120"/>
                         </a:rPr>
-                        <a:t>Identidad que se «presta» temporalmente a quien la asume</a:t>
+                        <a:t>Identidad que se presta temporalmente a quien la asume</a:t>
                       </a:r>
-                      <a:endParaRPr lang="en-US" sz="1400" dirty="0">
+                      <a:endParaRPr lang="en-US" sz="1250" dirty="0">
                         <a:latin typeface="Arial" charset="0"/>
                         <a:ea typeface="Arial" charset="0"/>
                         <a:cs typeface="Arial" charset="0"/>
                       </a:endParaRPr>
                     </a:p>
                   </a:txBody>
-                  <a:tcPr anchor="ctr">
+                  <a:tcPr marL="91440" marR="91440" marT="45720" marB="45720" anchor="ctr">
                     <a:lnL w="12700" cap="flat" cmpd="sng" algn="ctr">
                       <a:solidFill>
                         <a:srgbClr val="EEEEEE"/>
@@ -5166,11 +5014,11 @@
                     <a:bodyPr/>
                     <a:lstStyle/>
                     <a:p>
-                      <a:pPr marL="0" indent="0">
+                      <a:pPr indent="0" marL="0">
                         <a:buNone/>
                       </a:pPr>
                       <a:r>
-                        <a:rPr lang="en-US" sz="1400" dirty="0">
+                        <a:rPr lang="en-US" sz="1250" dirty="0">
                           <a:solidFill>
                             <a:srgbClr val="212121"/>
                           </a:solidFill>
@@ -5180,14 +5028,14 @@
                         </a:rPr>
                         <a:t>Tienes uno preasignado (assumed-role)</a:t>
                       </a:r>
-                      <a:endParaRPr lang="en-US" sz="1400" dirty="0">
+                      <a:endParaRPr lang="en-US" sz="1250" dirty="0">
                         <a:latin typeface="Arial" charset="0"/>
                         <a:ea typeface="Arial" charset="0"/>
                         <a:cs typeface="Arial" charset="0"/>
                       </a:endParaRPr>
                     </a:p>
                   </a:txBody>
-                  <a:tcPr anchor="ctr">
+                  <a:tcPr marL="91440" marR="91440" marT="45720" marB="45720" anchor="ctr">
                     <a:lnL w="12700" cap="flat" cmpd="sng" algn="ctr">
                       <a:solidFill>
                         <a:srgbClr val="EEEEEE"/>
@@ -5229,23 +5077,18 @@
                     </a:solidFill>
                   </a:tcPr>
                 </a:tc>
-                <a:extLst>
-                  <a:ext uri="{0D108BD9-81ED-4DB2-BD59-A6C34878D82A}">
-                    <a16:rowId xmlns:a16="http://schemas.microsoft.com/office/drawing/2014/main" val="10002"/>
-                  </a:ext>
-                </a:extLst>
               </a:tr>
-              <a:tr h="777240">
+              <a:tr h="594360">
                 <a:tc>
                   <a:txBody>
                     <a:bodyPr/>
                     <a:lstStyle/>
                     <a:p>
-                      <a:pPr marL="0" indent="0">
+                      <a:pPr indent="0" marL="0">
                         <a:buNone/>
                       </a:pPr>
                       <a:r>
-                        <a:rPr lang="en-US" sz="1400" b="1" dirty="0">
+                        <a:rPr lang="en-US" sz="1250" b="1" dirty="0">
                           <a:solidFill>
                             <a:srgbClr val="212121"/>
                           </a:solidFill>
@@ -5255,14 +5098,14 @@
                         </a:rPr>
                         <a:t>Política</a:t>
                       </a:r>
-                      <a:endParaRPr lang="en-US" sz="1400" dirty="0">
+                      <a:endParaRPr lang="en-US" sz="1250" dirty="0">
                         <a:latin typeface="Arial" charset="0"/>
                         <a:ea typeface="Arial" charset="0"/>
                         <a:cs typeface="Arial" charset="0"/>
                       </a:endParaRPr>
                     </a:p>
                   </a:txBody>
-                  <a:tcPr anchor="ctr">
+                  <a:tcPr marL="91440" marR="91440" marT="45720" marB="45720" anchor="ctr">
                     <a:lnL w="12700" cap="flat" cmpd="sng" algn="ctr">
                       <a:solidFill>
                         <a:srgbClr val="EEEEEE"/>
@@ -5309,11 +5152,11 @@
                     <a:bodyPr/>
                     <a:lstStyle/>
                     <a:p>
-                      <a:pPr marL="0" indent="0">
+                      <a:pPr indent="0" marL="0">
                         <a:buNone/>
                       </a:pPr>
                       <a:r>
-                        <a:rPr lang="en-US" sz="1400" dirty="0">
+                        <a:rPr lang="en-US" sz="1250" dirty="0">
                           <a:solidFill>
                             <a:srgbClr val="212121"/>
                           </a:solidFill>
@@ -5323,14 +5166,14 @@
                         </a:rPr>
                         <a:t>Documento que dice qué acciones están permitidas o denegadas</a:t>
                       </a:r>
-                      <a:endParaRPr lang="en-US" sz="1400" dirty="0">
+                      <a:endParaRPr lang="en-US" sz="1250" dirty="0">
                         <a:latin typeface="Arial" charset="0"/>
                         <a:ea typeface="Arial" charset="0"/>
                         <a:cs typeface="Arial" charset="0"/>
                       </a:endParaRPr>
                     </a:p>
                   </a:txBody>
-                  <a:tcPr anchor="ctr">
+                  <a:tcPr marL="91440" marR="91440" marT="45720" marB="45720" anchor="ctr">
                     <a:lnL w="12700" cap="flat" cmpd="sng" algn="ctr">
                       <a:solidFill>
                         <a:srgbClr val="EEEEEE"/>
@@ -5377,11 +5220,11 @@
                     <a:bodyPr/>
                     <a:lstStyle/>
                     <a:p>
-                      <a:pPr marL="0" indent="0">
+                      <a:pPr indent="0" marL="0">
                         <a:buNone/>
                       </a:pPr>
                       <a:r>
-                        <a:rPr lang="en-US" sz="1400" dirty="0">
+                        <a:rPr lang="en-US" sz="1250" dirty="0">
                           <a:solidFill>
                             <a:srgbClr val="212121"/>
                           </a:solidFill>
@@ -5389,16 +5232,16 @@
                           <a:ea typeface="Arial" pitchFamily="34" charset="-122"/>
                           <a:cs typeface="Arial" pitchFamily="34" charset="-120"/>
                         </a:rPr>
-                        <a:t>Puedes leerlas y corregirlas — no crear roles nuevos</a:t>
+                        <a:t>Puedes leerlas y corregirlas, no crear roles nuevos</a:t>
                       </a:r>
-                      <a:endParaRPr lang="en-US" sz="1400" dirty="0">
+                      <a:endParaRPr lang="en-US" sz="1250" dirty="0">
                         <a:latin typeface="Arial" charset="0"/>
                         <a:ea typeface="Arial" charset="0"/>
                         <a:cs typeface="Arial" charset="0"/>
                       </a:endParaRPr>
                     </a:p>
                   </a:txBody>
-                  <a:tcPr anchor="ctr">
+                  <a:tcPr marL="91440" marR="91440" marT="45720" marB="45720" anchor="ctr">
                     <a:lnL w="12700" cap="flat" cmpd="sng" algn="ctr">
                       <a:solidFill>
                         <a:srgbClr val="EEEEEE"/>
@@ -5440,23 +5283,18 @@
                     </a:solidFill>
                   </a:tcPr>
                 </a:tc>
-                <a:extLst>
-                  <a:ext uri="{0D108BD9-81ED-4DB2-BD59-A6C34878D82A}">
-                    <a16:rowId xmlns:a16="http://schemas.microsoft.com/office/drawing/2014/main" val="10003"/>
-                  </a:ext>
-                </a:extLst>
               </a:tr>
-              <a:tr h="777240">
+              <a:tr h="594360">
                 <a:tc>
                   <a:txBody>
                     <a:bodyPr/>
                     <a:lstStyle/>
                     <a:p>
-                      <a:pPr marL="0" indent="0">
+                      <a:pPr indent="0" marL="0">
                         <a:buNone/>
                       </a:pPr>
                       <a:r>
-                        <a:rPr lang="en-US" sz="1400" b="1" dirty="0">
+                        <a:rPr lang="en-US" sz="1250" b="1" dirty="0">
                           <a:solidFill>
                             <a:srgbClr val="212121"/>
                           </a:solidFill>
@@ -5466,14 +5304,14 @@
                         </a:rPr>
                         <a:t>Credenciales temporales</a:t>
                       </a:r>
-                      <a:endParaRPr lang="en-US" sz="1400" dirty="0">
+                      <a:endParaRPr lang="en-US" sz="1250" dirty="0">
                         <a:latin typeface="Arial" charset="0"/>
                         <a:ea typeface="Arial" charset="0"/>
                         <a:cs typeface="Arial" charset="0"/>
                       </a:endParaRPr>
                     </a:p>
                   </a:txBody>
-                  <a:tcPr anchor="ctr">
+                  <a:tcPr marL="91440" marR="91440" marT="45720" marB="45720" anchor="ctr">
                     <a:lnL w="12700" cap="flat" cmpd="sng" algn="ctr">
                       <a:solidFill>
                         <a:srgbClr val="EEEEEE"/>
@@ -5520,11 +5358,11 @@
                     <a:bodyPr/>
                     <a:lstStyle/>
                     <a:p>
-                      <a:pPr marL="0" indent="0">
+                      <a:pPr indent="0" marL="0">
                         <a:buNone/>
                       </a:pPr>
                       <a:r>
-                        <a:rPr lang="en-US" sz="1400" dirty="0">
+                        <a:rPr lang="en-US" sz="1250" dirty="0">
                           <a:solidFill>
                             <a:srgbClr val="212121"/>
                           </a:solidFill>
@@ -5532,16 +5370,16 @@
                           <a:ea typeface="Arial" pitchFamily="34" charset="-122"/>
                           <a:cs typeface="Arial" pitchFamily="34" charset="-120"/>
                         </a:rPr>
-                        <a:t>Claves con caducidad, generadas al asumir un rol</a:t>
+                        <a:t>Claves de acceso con caducidad, al asumir un rol</a:t>
                       </a:r>
-                      <a:endParaRPr lang="en-US" sz="1400" dirty="0">
+                      <a:endParaRPr lang="en-US" sz="1250" dirty="0">
                         <a:latin typeface="Arial" charset="0"/>
                         <a:ea typeface="Arial" charset="0"/>
                         <a:cs typeface="Arial" charset="0"/>
                       </a:endParaRPr>
                     </a:p>
                   </a:txBody>
-                  <a:tcPr anchor="ctr">
+                  <a:tcPr marL="91440" marR="91440" marT="45720" marB="45720" anchor="ctr">
                     <a:lnL w="12700" cap="flat" cmpd="sng" algn="ctr">
                       <a:solidFill>
                         <a:srgbClr val="EEEEEE"/>
@@ -5588,11 +5426,11 @@
                     <a:bodyPr/>
                     <a:lstStyle/>
                     <a:p>
-                      <a:pPr marL="0" indent="0">
+                      <a:pPr indent="0" marL="0">
                         <a:buNone/>
                       </a:pPr>
                       <a:r>
-                        <a:rPr lang="en-US" sz="1400" dirty="0">
+                        <a:rPr lang="en-US" sz="1250" dirty="0">
                           <a:solidFill>
                             <a:srgbClr val="212121"/>
                           </a:solidFill>
@@ -5602,14 +5440,14 @@
                         </a:rPr>
                         <a:t>Es lo que usa tu sesión ahora mismo</a:t>
                       </a:r>
-                      <a:endParaRPr lang="en-US" sz="1400" dirty="0">
+                      <a:endParaRPr lang="en-US" sz="1250" dirty="0">
                         <a:latin typeface="Arial" charset="0"/>
                         <a:ea typeface="Arial" charset="0"/>
                         <a:cs typeface="Arial" charset="0"/>
                       </a:endParaRPr>
                     </a:p>
                   </a:txBody>
-                  <a:tcPr anchor="ctr">
+                  <a:tcPr marL="91440" marR="91440" marT="45720" marB="45720" anchor="ctr">
                     <a:lnL w="12700" cap="flat" cmpd="sng" algn="ctr">
                       <a:solidFill>
                         <a:srgbClr val="EEEEEE"/>
@@ -5651,16 +5489,75 @@
                     </a:solidFill>
                   </a:tcPr>
                 </a:tc>
-                <a:extLst>
-                  <a:ext uri="{0D108BD9-81ED-4DB2-BD59-A6C34878D82A}">
-                    <a16:rowId xmlns:a16="http://schemas.microsoft.com/office/drawing/2014/main" val="10004"/>
-                  </a:ext>
-                </a:extLst>
               </a:tr>
             </a:tbl>
           </a:graphicData>
         </a:graphic>
       </p:graphicFrame>
+      <p:sp>
+        <p:nvSpPr>
+          <p:cNvPr id="7" name="Shape 4"/>
+          <p:cNvSpPr/>
+          <p:nvPr/>
+        </p:nvSpPr>
+        <p:spPr>
+          <a:xfrm>
+            <a:off x="548640" y="5029200"/>
+            <a:ext cx="11091672" cy="777240"/>
+          </a:xfrm>
+          <a:prstGeom prst="roundRect">
+            <a:avLst/>
+          </a:prstGeom>
+          <a:solidFill>
+            <a:srgbClr val="FFF8E1"/>
+          </a:solidFill>
+          <a:ln w="19050">
+            <a:solidFill>
+              <a:srgbClr val="FFA000"/>
+            </a:solidFill>
+            <a:prstDash val="solid"/>
+          </a:ln>
+        </p:spPr>
+      </p:sp>
+      <p:sp>
+        <p:nvSpPr>
+          <p:cNvPr id="8" name="Text 5"/>
+          <p:cNvSpPr/>
+          <p:nvPr/>
+        </p:nvSpPr>
+        <p:spPr>
+          <a:xfrm>
+            <a:off x="822960" y="5120640"/>
+            <a:ext cx="10543032" cy="594360"/>
+          </a:xfrm>
+          <a:prstGeom prst="rect">
+            <a:avLst/>
+          </a:prstGeom>
+          <a:noFill/>
+          <a:ln/>
+        </p:spPr>
+        <p:txBody>
+          <a:bodyPr wrap="square" rtlCol="0" anchor="ctr"/>
+          <a:lstStyle/>
+          <a:p>
+            <a:pPr indent="0" marL="0">
+              <a:buNone/>
+            </a:pPr>
+            <a:r>
+              <a:rPr lang="en-US" sz="1400" dirty="0">
+                <a:solidFill>
+                  <a:srgbClr val="212121"/>
+                </a:solidFill>
+                <a:latin typeface="Arial" pitchFamily="34" charset="0"/>
+                <a:ea typeface="Arial" pitchFamily="34" charset="-122"/>
+                <a:cs typeface="Arial" pitchFamily="34" charset="-120"/>
+              </a:rPr>
+              <a:t>Toda llamada a la API va firmada con una credencial — la pregunta es de dónde sale, y ahí es donde un rol resuelve algo que un usuario no puede.</a:t>
+            </a:r>
+            <a:endParaRPr lang="en-US" sz="1400" dirty="0"/>
+          </a:p>
+        </p:txBody>
+      </p:sp>
     </p:spTree>
   </p:cSld>
   <p:clrMapOvr>
@@ -5710,13 +5607,6 @@
             <a:prstDash val="solid"/>
           </a:ln>
         </p:spPr>
-        <p:txBody>
-          <a:bodyPr/>
-          <a:lstStyle/>
-          <a:p>
-            <a:endParaRPr lang="es-ES"/>
-          </a:p>
-        </p:txBody>
       </p:sp>
       <p:sp>
         <p:nvSpPr>
@@ -5739,7 +5629,7 @@
           <a:bodyPr wrap="square" rtlCol="0" anchor="ctr"/>
           <a:lstStyle/>
           <a:p>
-            <a:pPr marL="0" indent="0">
+            <a:pPr indent="0" marL="0">
               <a:buNone/>
             </a:pPr>
             <a:r>
@@ -5751,7 +5641,7 @@
                 <a:ea typeface="Arial" pitchFamily="34" charset="-122"/>
                 <a:cs typeface="Arial" pitchFamily="34" charset="-120"/>
               </a:rPr>
-              <a:t>De dónde sale la credencial de una instancia</a:t>
+              <a:t>Por qué un rol resuelve lo que un usuario no puede</a:t>
             </a:r>
             <a:endParaRPr lang="en-US" sz="2400" dirty="0"/>
           </a:p>
@@ -5778,7 +5668,7 @@
           <a:bodyPr wrap="square" rtlCol="0" anchor="ctr"/>
           <a:lstStyle/>
           <a:p>
-            <a:pPr marL="0" indent="0" algn="r">
+            <a:pPr algn="r" indent="0" marL="0">
               <a:buNone/>
             </a:pPr>
             <a:r>
@@ -5798,53 +5688,14 @@
       </p:sp>
       <p:sp>
         <p:nvSpPr>
-          <p:cNvPr id="5" name="Text 3"/>
-          <p:cNvSpPr/>
-          <p:nvPr/>
-        </p:nvSpPr>
-        <p:spPr>
-          <a:xfrm>
-            <a:off x="548640" y="1188720"/>
-            <a:ext cx="11091672" cy="1371600"/>
-          </a:xfrm>
-          <a:prstGeom prst="rect">
-            <a:avLst/>
-          </a:prstGeom>
-          <a:noFill/>
-          <a:ln/>
-        </p:spPr>
-        <p:txBody>
-          <a:bodyPr wrap="square" rtlCol="0" anchor="t"/>
-          <a:lstStyle/>
-          <a:p>
-            <a:pPr marL="0" indent="0">
-              <a:buNone/>
-            </a:pPr>
-            <a:r>
-              <a:rPr lang="en-US" sz="1800" dirty="0">
-                <a:solidFill>
-                  <a:srgbClr val="212121"/>
-                </a:solidFill>
-                <a:latin typeface="Arial" pitchFamily="34" charset="0"/>
-                <a:ea typeface="Arial" pitchFamily="34" charset="-122"/>
-                <a:cs typeface="Arial" pitchFamily="34" charset="-120"/>
-              </a:rPr>
-              <a:t>Toda llamada a la API de AWS va firmada con una credencial. Si una instancia necesitara las claves fijas de un usuario, esas claves tendrían que vivir guardadas dentro de ella — el mismo problema de «credenciales en el código» que ya evitaste en el Tema 3 con Secrets Manager.</a:t>
-            </a:r>
-            <a:endParaRPr lang="en-US" sz="1800" dirty="0"/>
-          </a:p>
-        </p:txBody>
-      </p:sp>
-      <p:sp>
-        <p:nvSpPr>
-          <p:cNvPr id="6" name="Shape 4"/>
-          <p:cNvSpPr/>
-          <p:nvPr/>
-        </p:nvSpPr>
-        <p:spPr>
-          <a:xfrm>
-            <a:off x="548640" y="2834640"/>
-            <a:ext cx="11091672" cy="1463040"/>
+          <p:cNvPr id="5" name="Shape 3"/>
+          <p:cNvSpPr/>
+          <p:nvPr/>
+        </p:nvSpPr>
+        <p:spPr>
+          <a:xfrm>
+            <a:off x="548640" y="1143000"/>
+            <a:ext cx="11091672" cy="1005840"/>
           </a:xfrm>
           <a:prstGeom prst="roundRect">
             <a:avLst/>
@@ -5859,24 +5710,17 @@
             <a:prstDash val="solid"/>
           </a:ln>
         </p:spPr>
-        <p:txBody>
-          <a:bodyPr/>
-          <a:lstStyle/>
-          <a:p>
-            <a:endParaRPr lang="es-ES"/>
-          </a:p>
-        </p:txBody>
-      </p:sp>
-      <p:sp>
-        <p:nvSpPr>
-          <p:cNvPr id="7" name="Text 5"/>
-          <p:cNvSpPr/>
-          <p:nvPr/>
-        </p:nvSpPr>
-        <p:spPr>
-          <a:xfrm>
-            <a:off x="822960" y="2926080"/>
-            <a:ext cx="10543032" cy="1280160"/>
+      </p:sp>
+      <p:sp>
+        <p:nvSpPr>
+          <p:cNvPr id="6" name="Text 4"/>
+          <p:cNvSpPr/>
+          <p:nvPr/>
+        </p:nvSpPr>
+        <p:spPr>
+          <a:xfrm>
+            <a:off x="822960" y="1234440"/>
+            <a:ext cx="10543032" cy="822960"/>
           </a:xfrm>
           <a:prstGeom prst="rect">
             <a:avLst/>
@@ -5888,11 +5732,11 @@
           <a:bodyPr wrap="square" rtlCol="0" anchor="ctr"/>
           <a:lstStyle/>
           <a:p>
-            <a:pPr marL="0" indent="0">
-              <a:buNone/>
-            </a:pPr>
-            <a:r>
-              <a:rPr lang="en-US" sz="1800" dirty="0">
+            <a:pPr indent="0" marL="0">
+              <a:buNone/>
+            </a:pPr>
+            <a:r>
+              <a:rPr lang="en-US" sz="1500" dirty="0">
                 <a:solidFill>
                   <a:srgbClr val="212121"/>
                 </a:solidFill>
@@ -5900,9 +5744,514 @@
                 <a:ea typeface="Arial" pitchFamily="34" charset="-122"/>
                 <a:cs typeface="Arial" pitchFamily="34" charset="-120"/>
               </a:rPr>
-              <a:t>Un rol asignado a la instancia lo evita de raíz: AWS publica credenciales temporales —caducan y se renuevan solas— en el servicio de metadatos de la instancia (169.254.169.254). El SDK ya sabe mirar ahí por defecto: tu código nunca necesita pedirlas.</a:t>
-            </a:r>
-            <a:endParaRPr lang="en-US" sz="1800" dirty="0"/>
+              <a:t>Si una instancia necesitara las claves fijas de un usuario, esas claves tendrían que vivir guardadas dentro de la instancia — el mismo problema de «credenciales en el código» que ya evitaste en el Tema 3.</a:t>
+            </a:r>
+            <a:endParaRPr lang="en-US" sz="1500" dirty="0"/>
+          </a:p>
+        </p:txBody>
+      </p:sp>
+      <p:sp>
+        <p:nvSpPr>
+          <p:cNvPr id="7" name="Shape 5"/>
+          <p:cNvSpPr/>
+          <p:nvPr/>
+        </p:nvSpPr>
+        <p:spPr>
+          <a:xfrm>
+            <a:off x="548640" y="2377440"/>
+            <a:ext cx="2567178" cy="1188720"/>
+          </a:xfrm>
+          <a:prstGeom prst="roundRect">
+            <a:avLst/>
+          </a:prstGeom>
+          <a:solidFill>
+            <a:srgbClr val="E8EAF6"/>
+          </a:solidFill>
+          <a:ln w="15875">
+            <a:solidFill>
+              <a:srgbClr val="3949AB"/>
+            </a:solidFill>
+            <a:prstDash val="solid"/>
+          </a:ln>
+        </p:spPr>
+      </p:sp>
+      <p:sp>
+        <p:nvSpPr>
+          <p:cNvPr id="8" name="Text 6"/>
+          <p:cNvSpPr/>
+          <p:nvPr/>
+        </p:nvSpPr>
+        <p:spPr>
+          <a:xfrm>
+            <a:off x="594360" y="2423160"/>
+            <a:ext cx="2475738" cy="1097280"/>
+          </a:xfrm>
+          <a:prstGeom prst="rect">
+            <a:avLst/>
+          </a:prstGeom>
+          <a:noFill/>
+          <a:ln/>
+        </p:spPr>
+        <p:txBody>
+          <a:bodyPr wrap="square" rtlCol="0" anchor="ctr"/>
+          <a:lstStyle/>
+          <a:p>
+            <a:pPr algn="ctr" indent="0" marL="0">
+              <a:buNone/>
+            </a:pPr>
+            <a:r>
+              <a:rPr lang="en-US" sz="1200" dirty="0">
+                <a:solidFill>
+                  <a:srgbClr val="212121"/>
+                </a:solidFill>
+                <a:latin typeface="Arial" pitchFamily="34" charset="0"/>
+                <a:ea typeface="Arial" pitchFamily="34" charset="-122"/>
+                <a:cs typeface="Arial" pitchFamily="34" charset="-120"/>
+              </a:rPr>
+              <a:t>🖥️ Rol asignado</a:t>
+            </a:r>
+            <a:endParaRPr lang="en-US" sz="1200" dirty="0"/>
+          </a:p>
+          <a:p>
+            <a:pPr algn="ctr" indent="0" marL="0">
+              <a:buNone/>
+            </a:pPr>
+            <a:r>
+              <a:rPr lang="en-US" sz="1200" dirty="0">
+                <a:solidFill>
+                  <a:srgbClr val="212121"/>
+                </a:solidFill>
+                <a:latin typeface="Arial" pitchFamily="34" charset="0"/>
+                <a:ea typeface="Arial" pitchFamily="34" charset="-122"/>
+                <a:cs typeface="Arial" pitchFamily="34" charset="-120"/>
+              </a:rPr>
+              <a:t>a la instancia</a:t>
+            </a:r>
+            <a:endParaRPr lang="en-US" sz="1200" dirty="0"/>
+          </a:p>
+        </p:txBody>
+      </p:sp>
+      <p:sp>
+        <p:nvSpPr>
+          <p:cNvPr id="9" name="Text 7"/>
+          <p:cNvSpPr/>
+          <p:nvPr/>
+        </p:nvSpPr>
+        <p:spPr>
+          <a:xfrm>
+            <a:off x="3070098" y="2377440"/>
+            <a:ext cx="365760" cy="1188720"/>
+          </a:xfrm>
+          <a:prstGeom prst="rect">
+            <a:avLst/>
+          </a:prstGeom>
+          <a:noFill/>
+          <a:ln/>
+        </p:spPr>
+        <p:txBody>
+          <a:bodyPr wrap="square" rtlCol="0" anchor="ctr"/>
+          <a:lstStyle/>
+          <a:p>
+            <a:pPr algn="ctr" indent="0" marL="0">
+              <a:buNone/>
+            </a:pPr>
+            <a:r>
+              <a:rPr lang="en-US" sz="1600" b="1" dirty="0">
+                <a:solidFill>
+                  <a:srgbClr val="3949AB"/>
+                </a:solidFill>
+                <a:latin typeface="Arial" pitchFamily="34" charset="0"/>
+                <a:ea typeface="Arial" pitchFamily="34" charset="-122"/>
+                <a:cs typeface="Arial" pitchFamily="34" charset="-120"/>
+              </a:rPr>
+              <a:t>→</a:t>
+            </a:r>
+            <a:endParaRPr lang="en-US" sz="1600" dirty="0"/>
+          </a:p>
+        </p:txBody>
+      </p:sp>
+      <p:sp>
+        <p:nvSpPr>
+          <p:cNvPr id="10" name="Shape 8"/>
+          <p:cNvSpPr/>
+          <p:nvPr/>
+        </p:nvSpPr>
+        <p:spPr>
+          <a:xfrm>
+            <a:off x="3390138" y="2377440"/>
+            <a:ext cx="2567178" cy="1188720"/>
+          </a:xfrm>
+          <a:prstGeom prst="roundRect">
+            <a:avLst/>
+          </a:prstGeom>
+          <a:solidFill>
+            <a:srgbClr val="E8EAF6"/>
+          </a:solidFill>
+          <a:ln w="15875">
+            <a:solidFill>
+              <a:srgbClr val="3949AB"/>
+            </a:solidFill>
+            <a:prstDash val="solid"/>
+          </a:ln>
+        </p:spPr>
+      </p:sp>
+      <p:sp>
+        <p:nvSpPr>
+          <p:cNvPr id="11" name="Text 9"/>
+          <p:cNvSpPr/>
+          <p:nvPr/>
+        </p:nvSpPr>
+        <p:spPr>
+          <a:xfrm>
+            <a:off x="3435858" y="2423160"/>
+            <a:ext cx="2475738" cy="1097280"/>
+          </a:xfrm>
+          <a:prstGeom prst="rect">
+            <a:avLst/>
+          </a:prstGeom>
+          <a:noFill/>
+          <a:ln/>
+        </p:spPr>
+        <p:txBody>
+          <a:bodyPr wrap="square" rtlCol="0" anchor="ctr"/>
+          <a:lstStyle/>
+          <a:p>
+            <a:pPr algn="ctr" indent="0" marL="0">
+              <a:buNone/>
+            </a:pPr>
+            <a:r>
+              <a:rPr lang="en-US" sz="1200" dirty="0">
+                <a:solidFill>
+                  <a:srgbClr val="212121"/>
+                </a:solidFill>
+                <a:latin typeface="Arial" pitchFamily="34" charset="0"/>
+                <a:ea typeface="Arial" pitchFamily="34" charset="-122"/>
+                <a:cs typeface="Arial" pitchFamily="34" charset="-120"/>
+              </a:rPr>
+              <a:t>🔑 Credenciales temporales</a:t>
+            </a:r>
+            <a:endParaRPr lang="en-US" sz="1200" dirty="0"/>
+          </a:p>
+          <a:p>
+            <a:pPr algn="ctr" indent="0" marL="0">
+              <a:buNone/>
+            </a:pPr>
+            <a:r>
+              <a:rPr lang="en-US" sz="1200" dirty="0">
+                <a:solidFill>
+                  <a:srgbClr val="212121"/>
+                </a:solidFill>
+                <a:latin typeface="Arial" pitchFamily="34" charset="0"/>
+                <a:ea typeface="Arial" pitchFamily="34" charset="-122"/>
+                <a:cs typeface="Arial" pitchFamily="34" charset="-120"/>
+              </a:rPr>
+              <a:t>caducan y se renuevan solas</a:t>
+            </a:r>
+            <a:endParaRPr lang="en-US" sz="1200" dirty="0"/>
+          </a:p>
+        </p:txBody>
+      </p:sp>
+      <p:sp>
+        <p:nvSpPr>
+          <p:cNvPr id="12" name="Text 10"/>
+          <p:cNvSpPr/>
+          <p:nvPr/>
+        </p:nvSpPr>
+        <p:spPr>
+          <a:xfrm>
+            <a:off x="5911596" y="2377440"/>
+            <a:ext cx="365760" cy="1188720"/>
+          </a:xfrm>
+          <a:prstGeom prst="rect">
+            <a:avLst/>
+          </a:prstGeom>
+          <a:noFill/>
+          <a:ln/>
+        </p:spPr>
+        <p:txBody>
+          <a:bodyPr wrap="square" rtlCol="0" anchor="ctr"/>
+          <a:lstStyle/>
+          <a:p>
+            <a:pPr algn="ctr" indent="0" marL="0">
+              <a:buNone/>
+            </a:pPr>
+            <a:r>
+              <a:rPr lang="en-US" sz="1600" b="1" dirty="0">
+                <a:solidFill>
+                  <a:srgbClr val="3949AB"/>
+                </a:solidFill>
+                <a:latin typeface="Arial" pitchFamily="34" charset="0"/>
+                <a:ea typeface="Arial" pitchFamily="34" charset="-122"/>
+                <a:cs typeface="Arial" pitchFamily="34" charset="-120"/>
+              </a:rPr>
+              <a:t>→</a:t>
+            </a:r>
+            <a:endParaRPr lang="en-US" sz="1600" dirty="0"/>
+          </a:p>
+        </p:txBody>
+      </p:sp>
+      <p:sp>
+        <p:nvSpPr>
+          <p:cNvPr id="13" name="Shape 11"/>
+          <p:cNvSpPr/>
+          <p:nvPr/>
+        </p:nvSpPr>
+        <p:spPr>
+          <a:xfrm>
+            <a:off x="6231636" y="2377440"/>
+            <a:ext cx="2567178" cy="1188720"/>
+          </a:xfrm>
+          <a:prstGeom prst="roundRect">
+            <a:avLst/>
+          </a:prstGeom>
+          <a:solidFill>
+            <a:srgbClr val="E8EAF6"/>
+          </a:solidFill>
+          <a:ln w="15875">
+            <a:solidFill>
+              <a:srgbClr val="3949AB"/>
+            </a:solidFill>
+            <a:prstDash val="solid"/>
+          </a:ln>
+        </p:spPr>
+      </p:sp>
+      <p:sp>
+        <p:nvSpPr>
+          <p:cNvPr id="14" name="Text 12"/>
+          <p:cNvSpPr/>
+          <p:nvPr/>
+        </p:nvSpPr>
+        <p:spPr>
+          <a:xfrm>
+            <a:off x="6277356" y="2423160"/>
+            <a:ext cx="2475738" cy="1097280"/>
+          </a:xfrm>
+          <a:prstGeom prst="rect">
+            <a:avLst/>
+          </a:prstGeom>
+          <a:noFill/>
+          <a:ln/>
+        </p:spPr>
+        <p:txBody>
+          <a:bodyPr wrap="square" rtlCol="0" anchor="ctr"/>
+          <a:lstStyle/>
+          <a:p>
+            <a:pPr algn="ctr" indent="0" marL="0">
+              <a:buNone/>
+            </a:pPr>
+            <a:r>
+              <a:rPr lang="en-US" sz="1200" dirty="0">
+                <a:solidFill>
+                  <a:srgbClr val="212121"/>
+                </a:solidFill>
+                <a:latin typeface="Arial" pitchFamily="34" charset="0"/>
+                <a:ea typeface="Arial" pitchFamily="34" charset="-122"/>
+                <a:cs typeface="Arial" pitchFamily="34" charset="-120"/>
+              </a:rPr>
+              <a:t>📡 169.254.169.254</a:t>
+            </a:r>
+            <a:endParaRPr lang="en-US" sz="1200" dirty="0"/>
+          </a:p>
+          <a:p>
+            <a:pPr algn="ctr" indent="0" marL="0">
+              <a:buNone/>
+            </a:pPr>
+            <a:r>
+              <a:rPr lang="en-US" sz="1200" dirty="0">
+                <a:solidFill>
+                  <a:srgbClr val="212121"/>
+                </a:solidFill>
+                <a:latin typeface="Arial" pitchFamily="34" charset="0"/>
+                <a:ea typeface="Arial" pitchFamily="34" charset="-122"/>
+                <a:cs typeface="Arial" pitchFamily="34" charset="-120"/>
+              </a:rPr>
+              <a:t>servicio de metadatos</a:t>
+            </a:r>
+            <a:endParaRPr lang="en-US" sz="1200" dirty="0"/>
+          </a:p>
+        </p:txBody>
+      </p:sp>
+      <p:sp>
+        <p:nvSpPr>
+          <p:cNvPr id="15" name="Text 13"/>
+          <p:cNvSpPr/>
+          <p:nvPr/>
+        </p:nvSpPr>
+        <p:spPr>
+          <a:xfrm>
+            <a:off x="8753094" y="2377440"/>
+            <a:ext cx="365760" cy="1188720"/>
+          </a:xfrm>
+          <a:prstGeom prst="rect">
+            <a:avLst/>
+          </a:prstGeom>
+          <a:noFill/>
+          <a:ln/>
+        </p:spPr>
+        <p:txBody>
+          <a:bodyPr wrap="square" rtlCol="0" anchor="ctr"/>
+          <a:lstStyle/>
+          <a:p>
+            <a:pPr algn="ctr" indent="0" marL="0">
+              <a:buNone/>
+            </a:pPr>
+            <a:r>
+              <a:rPr lang="en-US" sz="1600" b="1" dirty="0">
+                <a:solidFill>
+                  <a:srgbClr val="3949AB"/>
+                </a:solidFill>
+                <a:latin typeface="Arial" pitchFamily="34" charset="0"/>
+                <a:ea typeface="Arial" pitchFamily="34" charset="-122"/>
+                <a:cs typeface="Arial" pitchFamily="34" charset="-120"/>
+              </a:rPr>
+              <a:t>→</a:t>
+            </a:r>
+            <a:endParaRPr lang="en-US" sz="1600" dirty="0"/>
+          </a:p>
+        </p:txBody>
+      </p:sp>
+      <p:sp>
+        <p:nvSpPr>
+          <p:cNvPr id="16" name="Shape 14"/>
+          <p:cNvSpPr/>
+          <p:nvPr/>
+        </p:nvSpPr>
+        <p:spPr>
+          <a:xfrm>
+            <a:off x="9073134" y="2377440"/>
+            <a:ext cx="2567178" cy="1188720"/>
+          </a:xfrm>
+          <a:prstGeom prst="roundRect">
+            <a:avLst/>
+          </a:prstGeom>
+          <a:solidFill>
+            <a:srgbClr val="E8EAF6"/>
+          </a:solidFill>
+          <a:ln w="15875">
+            <a:solidFill>
+              <a:srgbClr val="3949AB"/>
+            </a:solidFill>
+            <a:prstDash val="solid"/>
+          </a:ln>
+        </p:spPr>
+      </p:sp>
+      <p:sp>
+        <p:nvSpPr>
+          <p:cNvPr id="17" name="Text 15"/>
+          <p:cNvSpPr/>
+          <p:nvPr/>
+        </p:nvSpPr>
+        <p:spPr>
+          <a:xfrm>
+            <a:off x="9118854" y="2423160"/>
+            <a:ext cx="2475738" cy="1097280"/>
+          </a:xfrm>
+          <a:prstGeom prst="rect">
+            <a:avLst/>
+          </a:prstGeom>
+          <a:noFill/>
+          <a:ln/>
+        </p:spPr>
+        <p:txBody>
+          <a:bodyPr wrap="square" rtlCol="0" anchor="ctr"/>
+          <a:lstStyle/>
+          <a:p>
+            <a:pPr algn="ctr" indent="0" marL="0">
+              <a:buNone/>
+            </a:pPr>
+            <a:r>
+              <a:rPr lang="en-US" sz="1200" dirty="0">
+                <a:solidFill>
+                  <a:srgbClr val="212121"/>
+                </a:solidFill>
+                <a:latin typeface="Arial" pitchFamily="34" charset="0"/>
+                <a:ea typeface="Arial" pitchFamily="34" charset="-122"/>
+                <a:cs typeface="Arial" pitchFamily="34" charset="-120"/>
+              </a:rPr>
+              <a:t>💻 El SDK las usa</a:t>
+            </a:r>
+            <a:endParaRPr lang="en-US" sz="1200" dirty="0"/>
+          </a:p>
+          <a:p>
+            <a:pPr algn="ctr" indent="0" marL="0">
+              <a:buNone/>
+            </a:pPr>
+            <a:r>
+              <a:rPr lang="en-US" sz="1200" dirty="0">
+                <a:solidFill>
+                  <a:srgbClr val="212121"/>
+                </a:solidFill>
+                <a:latin typeface="Arial" pitchFamily="34" charset="0"/>
+                <a:ea typeface="Arial" pitchFamily="34" charset="-122"/>
+                <a:cs typeface="Arial" pitchFamily="34" charset="-120"/>
+              </a:rPr>
+              <a:t>sin que tu código las pida</a:t>
+            </a:r>
+            <a:endParaRPr lang="en-US" sz="1200" dirty="0"/>
+          </a:p>
+        </p:txBody>
+      </p:sp>
+      <p:sp>
+        <p:nvSpPr>
+          <p:cNvPr id="18" name="Shape 16"/>
+          <p:cNvSpPr/>
+          <p:nvPr/>
+        </p:nvSpPr>
+        <p:spPr>
+          <a:xfrm>
+            <a:off x="548640" y="3794760"/>
+            <a:ext cx="11091672" cy="731520"/>
+          </a:xfrm>
+          <a:prstGeom prst="roundRect">
+            <a:avLst/>
+          </a:prstGeom>
+          <a:solidFill>
+            <a:srgbClr val="FFF8E1"/>
+          </a:solidFill>
+          <a:ln w="19050">
+            <a:solidFill>
+              <a:srgbClr val="FFA000"/>
+            </a:solidFill>
+            <a:prstDash val="solid"/>
+          </a:ln>
+        </p:spPr>
+      </p:sp>
+      <p:sp>
+        <p:nvSpPr>
+          <p:cNvPr id="19" name="Text 17"/>
+          <p:cNvSpPr/>
+          <p:nvPr/>
+        </p:nvSpPr>
+        <p:spPr>
+          <a:xfrm>
+            <a:off x="822960" y="3886200"/>
+            <a:ext cx="10543032" cy="548640"/>
+          </a:xfrm>
+          <a:prstGeom prst="rect">
+            <a:avLst/>
+          </a:prstGeom>
+          <a:noFill/>
+          <a:ln/>
+        </p:spPr>
+        <p:txBody>
+          <a:bodyPr wrap="square" rtlCol="0" anchor="ctr"/>
+          <a:lstStyle/>
+          <a:p>
+            <a:pPr indent="0" marL="0">
+              <a:buNone/>
+            </a:pPr>
+            <a:r>
+              <a:rPr lang="en-US" sz="1500" dirty="0">
+                <a:solidFill>
+                  <a:srgbClr val="212121"/>
+                </a:solidFill>
+                <a:latin typeface="Arial" pitchFamily="34" charset="0"/>
+                <a:ea typeface="Arial" pitchFamily="34" charset="-122"/>
+                <a:cs typeface="Arial" pitchFamily="34" charset="-120"/>
+              </a:rPr>
+              <a:t>Tu código nunca necesita saber dónde están esas claves ni pedirlas explícitamente.</a:t>
+            </a:r>
+            <a:endParaRPr lang="en-US" sz="1500" dirty="0"/>
           </a:p>
         </p:txBody>
       </p:sp>
@@ -5955,13 +6304,6 @@
             <a:prstDash val="solid"/>
           </a:ln>
         </p:spPr>
-        <p:txBody>
-          <a:bodyPr/>
-          <a:lstStyle/>
-          <a:p>
-            <a:endParaRPr lang="es-ES"/>
-          </a:p>
-        </p:txBody>
       </p:sp>
       <p:sp>
         <p:nvSpPr>
@@ -5984,7 +6326,7 @@
           <a:bodyPr wrap="square" rtlCol="0" anchor="ctr"/>
           <a:lstStyle/>
           <a:p>
-            <a:pPr marL="0" indent="0">
+            <a:pPr indent="0" marL="0">
               <a:buNone/>
             </a:pPr>
             <a:r>
@@ -6023,7 +6365,7 @@
           <a:bodyPr wrap="square" rtlCol="0" anchor="ctr"/>
           <a:lstStyle/>
           <a:p>
-            <a:pPr marL="0" indent="0" algn="r">
+            <a:pPr algn="r" indent="0" marL="0">
               <a:buNone/>
             </a:pPr>
             <a:r>
@@ -6049,72 +6391,136 @@
         </p:nvSpPr>
         <p:spPr>
           <a:xfrm>
-            <a:off x="548640" y="1645920"/>
-            <a:ext cx="11091672" cy="1097280"/>
-          </a:xfrm>
-          <a:prstGeom prst="rect">
+            <a:off x="548640" y="1280160"/>
+            <a:ext cx="11091672" cy="2103120"/>
+          </a:xfrm>
+          <a:prstGeom prst="roundRect">
             <a:avLst/>
           </a:prstGeom>
           <a:solidFill>
-            <a:srgbClr val="ECEFF1"/>
+            <a:srgbClr val="E8EAF6"/>
           </a:solidFill>
-          <a:ln w="12700">
+          <a:ln w="15875">
             <a:solidFill>
-              <a:srgbClr val="EEEEEE"/>
+              <a:srgbClr val="3949AB"/>
             </a:solidFill>
             <a:prstDash val="solid"/>
           </a:ln>
         </p:spPr>
-        <p:txBody>
-          <a:bodyPr/>
-          <a:lstStyle/>
-          <a:p>
-            <a:endParaRPr lang="es-ES"/>
-          </a:p>
-        </p:txBody>
-      </p:sp>
-      <p:sp>
-        <p:nvSpPr>
-          <p:cNvPr id="6" name="Shape 4"/>
-          <p:cNvSpPr/>
-          <p:nvPr/>
-        </p:nvSpPr>
-        <p:spPr>
-          <a:xfrm>
-            <a:off x="548640" y="1645920"/>
-            <a:ext cx="73152" cy="1097280"/>
-          </a:xfrm>
-          <a:prstGeom prst="rect">
+      </p:sp>
+      <p:sp>
+        <p:nvSpPr>
+          <p:cNvPr id="6" name="Text 4"/>
+          <p:cNvSpPr/>
+          <p:nvPr/>
+        </p:nvSpPr>
+        <p:spPr>
+          <a:xfrm>
+            <a:off x="731520" y="1353312"/>
+            <a:ext cx="10725912" cy="548640"/>
+          </a:xfrm>
+          <a:prstGeom prst="rect">
+            <a:avLst/>
+          </a:prstGeom>
+          <a:noFill/>
+          <a:ln/>
+        </p:spPr>
+        <p:txBody>
+          <a:bodyPr wrap="square" rtlCol="0" anchor="ctr"/>
+          <a:lstStyle/>
+          <a:p>
+            <a:pPr indent="0" marL="0">
+              <a:buNone/>
+            </a:pPr>
+            <a:r>
+              <a:rPr lang="en-US" sz="1800" b="1" dirty="0">
+                <a:solidFill>
+                  <a:srgbClr val="1A237E"/>
+                </a:solidFill>
+                <a:latin typeface="Courier New" pitchFamily="34" charset="0"/>
+                <a:ea typeface="Courier New" pitchFamily="34" charset="-122"/>
+                <a:cs typeface="Courier New" pitchFamily="34" charset="-120"/>
+              </a:rPr>
+              <a:t>S3Client.builder().build()</a:t>
+            </a:r>
+            <a:endParaRPr lang="en-US" sz="1800" dirty="0"/>
+          </a:p>
+        </p:txBody>
+      </p:sp>
+      <p:sp>
+        <p:nvSpPr>
+          <p:cNvPr id="7" name="Text 5"/>
+          <p:cNvSpPr/>
+          <p:nvPr/>
+        </p:nvSpPr>
+        <p:spPr>
+          <a:xfrm>
+            <a:off x="731520" y="1901952"/>
+            <a:ext cx="10725912" cy="1408176"/>
+          </a:xfrm>
+          <a:prstGeom prst="rect">
+            <a:avLst/>
+          </a:prstGeom>
+          <a:noFill/>
+          <a:ln/>
+        </p:spPr>
+        <p:txBody>
+          <a:bodyPr wrap="square" rtlCol="0" anchor="t"/>
+          <a:lstStyle/>
+          <a:p>
+            <a:pPr indent="0" marL="0">
+              <a:buNone/>
+            </a:pPr>
+            <a:r>
+              <a:rPr lang="en-US" sz="1600" dirty="0">
+                <a:solidFill>
+                  <a:srgbClr val="212121"/>
+                </a:solidFill>
+                <a:latin typeface="Arial" pitchFamily="34" charset="0"/>
+                <a:ea typeface="Arial" pitchFamily="34" charset="-122"/>
+                <a:cs typeface="Arial" pitchFamily="34" charset="-120"/>
+              </a:rPr>
+              <a:t>En la Actividad 5.2, la clase que guarda las fotos de Escaparate en S3 crea su cliente así, sin pasarle ninguna credencial. El SDK pregunta solo al servicio de metadatos qué credenciales temporales tiene la instancia ahora mismo, y las usa.</a:t>
+            </a:r>
+            <a:endParaRPr lang="en-US" sz="1600" dirty="0"/>
+          </a:p>
+        </p:txBody>
+      </p:sp>
+      <p:sp>
+        <p:nvSpPr>
+          <p:cNvPr id="8" name="Shape 6"/>
+          <p:cNvSpPr/>
+          <p:nvPr/>
+        </p:nvSpPr>
+        <p:spPr>
+          <a:xfrm>
+            <a:off x="548640" y="3566160"/>
+            <a:ext cx="11091672" cy="1371600"/>
+          </a:xfrm>
+          <a:prstGeom prst="roundRect">
             <a:avLst/>
           </a:prstGeom>
           <a:solidFill>
-            <a:srgbClr val="FFA000"/>
+            <a:srgbClr val="E8EAF6"/>
           </a:solidFill>
-          <a:ln w="12700">
+          <a:ln w="15875">
             <a:solidFill>
-              <a:srgbClr val="FFA000"/>
+              <a:srgbClr val="3949AB"/>
             </a:solidFill>
             <a:prstDash val="solid"/>
           </a:ln>
         </p:spPr>
-        <p:txBody>
-          <a:bodyPr/>
-          <a:lstStyle/>
-          <a:p>
-            <a:endParaRPr lang="es-ES"/>
-          </a:p>
-        </p:txBody>
-      </p:sp>
-      <p:sp>
-        <p:nvSpPr>
-          <p:cNvPr id="7" name="Text 5"/>
-          <p:cNvSpPr/>
-          <p:nvPr/>
-        </p:nvSpPr>
-        <p:spPr>
-          <a:xfrm>
-            <a:off x="822960" y="1755648"/>
-            <a:ext cx="10588752" cy="877824"/>
+      </p:sp>
+      <p:sp>
+        <p:nvSpPr>
+          <p:cNvPr id="9" name="Text 7"/>
+          <p:cNvSpPr/>
+          <p:nvPr/>
+        </p:nvSpPr>
+        <p:spPr>
+          <a:xfrm>
+            <a:off x="731520" y="3639312"/>
+            <a:ext cx="10725912" cy="548640"/>
           </a:xfrm>
           <a:prstGeom prst="rect">
             <a:avLst/>
@@ -6123,86 +6529,37 @@
           <a:ln/>
         </p:spPr>
         <p:txBody>
-          <a:bodyPr wrap="square" rtlCol="0" anchor="t"/>
-          <a:lstStyle/>
-          <a:p>
-            <a:pPr marL="0" indent="0">
-              <a:buNone/>
-            </a:pPr>
-            <a:r>
-              <a:rPr lang="en-US" sz="1800" dirty="0">
-                <a:solidFill>
-                  <a:srgbClr val="263238"/>
-                </a:solidFill>
-                <a:latin typeface="Courier New" pitchFamily="34" charset="0"/>
-                <a:ea typeface="Courier New" pitchFamily="34" charset="-122"/>
-                <a:cs typeface="Courier New" pitchFamily="34" charset="-120"/>
-              </a:rPr>
-              <a:t>S3Client.builder().build()</a:t>
+          <a:bodyPr wrap="square" rtlCol="0" anchor="ctr"/>
+          <a:lstStyle/>
+          <a:p>
+            <a:pPr indent="0" marL="0">
+              <a:buNone/>
+            </a:pPr>
+            <a:r>
+              <a:rPr lang="en-US" sz="1800" b="1" dirty="0">
+                <a:solidFill>
+                  <a:srgbClr val="1A237E"/>
+                </a:solidFill>
+                <a:latin typeface="Arial" pitchFamily="34" charset="0"/>
+                <a:ea typeface="Arial" pitchFamily="34" charset="-122"/>
+                <a:cs typeface="Arial" pitchFamily="34" charset="-120"/>
+              </a:rPr>
+              <a:t>Si la instancia cambia, nada se rompe</a:t>
             </a:r>
             <a:endParaRPr lang="en-US" sz="1800" dirty="0"/>
           </a:p>
-          <a:p>
-            <a:pPr marL="0" indent="0">
-              <a:buNone/>
-            </a:pPr>
-            <a:r>
-              <a:rPr lang="en-US" sz="1800" dirty="0">
-                <a:solidFill>
-                  <a:srgbClr val="263238"/>
-                </a:solidFill>
-                <a:latin typeface="Courier New" pitchFamily="34" charset="0"/>
-                <a:ea typeface="Courier New" pitchFamily="34" charset="-122"/>
-                <a:cs typeface="Courier New" pitchFamily="34" charset="-120"/>
-              </a:rPr>
-              <a:t>// sin pasarle ninguna credencial</a:t>
-            </a:r>
-            <a:endParaRPr lang="en-US" sz="1800" dirty="0"/>
-          </a:p>
-        </p:txBody>
-      </p:sp>
-      <p:sp>
-        <p:nvSpPr>
-          <p:cNvPr id="8" name="Shape 6"/>
-          <p:cNvSpPr/>
-          <p:nvPr/>
-        </p:nvSpPr>
-        <p:spPr>
-          <a:xfrm>
-            <a:off x="548640" y="3063240"/>
-            <a:ext cx="11091672" cy="1554480"/>
-          </a:xfrm>
-          <a:prstGeom prst="roundRect">
-            <a:avLst/>
-          </a:prstGeom>
-          <a:solidFill>
-            <a:srgbClr val="FFF8E1"/>
-          </a:solidFill>
-          <a:ln w="19050">
-            <a:solidFill>
-              <a:srgbClr val="FFA000"/>
-            </a:solidFill>
-            <a:prstDash val="solid"/>
-          </a:ln>
-        </p:spPr>
-        <p:txBody>
-          <a:bodyPr/>
-          <a:lstStyle/>
-          <a:p>
-            <a:endParaRPr lang="es-ES"/>
-          </a:p>
-        </p:txBody>
-      </p:sp>
-      <p:sp>
-        <p:nvSpPr>
-          <p:cNvPr id="9" name="Text 7"/>
-          <p:cNvSpPr/>
-          <p:nvPr/>
-        </p:nvSpPr>
-        <p:spPr>
-          <a:xfrm>
-            <a:off x="822960" y="3154680"/>
-            <a:ext cx="10543032" cy="1371600"/>
+        </p:txBody>
+      </p:sp>
+      <p:sp>
+        <p:nvSpPr>
+          <p:cNvPr id="10" name="Text 8"/>
+          <p:cNvSpPr/>
+          <p:nvPr/>
+        </p:nvSpPr>
+        <p:spPr>
+          <a:xfrm>
+            <a:off x="731520" y="4187952"/>
+            <a:ext cx="10725912" cy="676656"/>
           </a:xfrm>
           <a:prstGeom prst="rect">
             <a:avLst/>
@@ -6211,14 +6568,14 @@
           <a:ln/>
         </p:spPr>
         <p:txBody>
-          <a:bodyPr wrap="square" rtlCol="0" anchor="ctr"/>
-          <a:lstStyle/>
-          <a:p>
-            <a:pPr marL="0" indent="0">
-              <a:buNone/>
-            </a:pPr>
-            <a:r>
-              <a:rPr lang="en-US" sz="1900" dirty="0">
+          <a:bodyPr wrap="square" rtlCol="0" anchor="t"/>
+          <a:lstStyle/>
+          <a:p>
+            <a:pPr indent="0" marL="0">
+              <a:buNone/>
+            </a:pPr>
+            <a:r>
+              <a:rPr lang="en-US" sz="1500" dirty="0">
                 <a:solidFill>
                   <a:srgbClr val="212121"/>
                 </a:solidFill>
@@ -6226,9 +6583,9 @@
                 <a:ea typeface="Arial" pitchFamily="34" charset="-122"/>
                 <a:cs typeface="Arial" pitchFamily="34" charset="-120"/>
               </a:rPr>
-              <a:t>El SDK, al no recibir ninguna clave explícita, pregunta al servicio de metadatos qué credenciales tiene la instancia ahora mismo, y las usa. Si esa instancia se termina y otra la sustituye, la nueva pregunta lo mismo y recibe las suyas — nadie ha copiado ni rotado nada a mano.</a:t>
-            </a:r>
-            <a:endParaRPr lang="en-US" sz="1900" dirty="0"/>
+              <a:t>Si esa instancia se termina y otra la sustituye, la nueva pregunta lo mismo y recibe sus propias credenciales — nadie ha copiado ni rotado ninguna clave a mano.</a:t>
+            </a:r>
+            <a:endParaRPr lang="en-US" sz="1500" dirty="0"/>
           </a:p>
         </p:txBody>
       </p:sp>
@@ -6281,13 +6638,6 @@
             <a:prstDash val="solid"/>
           </a:ln>
         </p:spPr>
-        <p:txBody>
-          <a:bodyPr/>
-          <a:lstStyle/>
-          <a:p>
-            <a:endParaRPr lang="es-ES"/>
-          </a:p>
-        </p:txBody>
       </p:sp>
       <p:sp>
         <p:nvSpPr>
@@ -6310,7 +6660,7 @@
           <a:bodyPr wrap="square" rtlCol="0" anchor="ctr"/>
           <a:lstStyle/>
           <a:p>
-            <a:pPr marL="0" indent="0">
+            <a:pPr indent="0" marL="0">
               <a:buNone/>
             </a:pPr>
             <a:r>
@@ -6349,7 +6699,7 @@
           <a:bodyPr wrap="square" rtlCol="0" anchor="ctr"/>
           <a:lstStyle/>
           <a:p>
-            <a:pPr marL="0" indent="0" algn="r">
+            <a:pPr algn="r" indent="0" marL="0">
               <a:buNone/>
             </a:pPr>
             <a:r>
@@ -6369,14 +6719,53 @@
       </p:sp>
       <p:sp>
         <p:nvSpPr>
-          <p:cNvPr id="5" name="Shape 3"/>
-          <p:cNvSpPr/>
-          <p:nvPr/>
-        </p:nvSpPr>
-        <p:spPr>
-          <a:xfrm>
-            <a:off x="548640" y="1097280"/>
-            <a:ext cx="11091672" cy="2286000"/>
+          <p:cNvPr id="5" name="Text 3"/>
+          <p:cNvSpPr/>
+          <p:nvPr/>
+        </p:nvSpPr>
+        <p:spPr>
+          <a:xfrm>
+            <a:off x="548640" y="1143000"/>
+            <a:ext cx="11091672" cy="365760"/>
+          </a:xfrm>
+          <a:prstGeom prst="rect">
+            <a:avLst/>
+          </a:prstGeom>
+          <a:noFill/>
+          <a:ln/>
+        </p:spPr>
+        <p:txBody>
+          <a:bodyPr wrap="square" rtlCol="0" anchor="ctr"/>
+          <a:lstStyle/>
+          <a:p>
+            <a:pPr indent="0" marL="0">
+              <a:buNone/>
+            </a:pPr>
+            <a:r>
+              <a:rPr lang="en-US" sz="1500" b="1" dirty="0">
+                <a:solidFill>
+                  <a:srgbClr val="3949AB"/>
+                </a:solidFill>
+                <a:latin typeface="Arial" pitchFamily="34" charset="0"/>
+                <a:ea typeface="Arial" pitchFamily="34" charset="-122"/>
+                <a:cs typeface="Arial" pitchFamily="34" charset="-120"/>
+              </a:rPr>
+              <a:t>El mismo formato JSON de la sesión 1 — con una estructura fija</a:t>
+            </a:r>
+            <a:endParaRPr lang="en-US" sz="1500" dirty="0"/>
+          </a:p>
+        </p:txBody>
+      </p:sp>
+      <p:sp>
+        <p:nvSpPr>
+          <p:cNvPr id="6" name="Shape 4"/>
+          <p:cNvSpPr/>
+          <p:nvPr/>
+        </p:nvSpPr>
+        <p:spPr>
+          <a:xfrm>
+            <a:off x="548640" y="1554480"/>
+            <a:ext cx="11091672" cy="1463040"/>
           </a:xfrm>
           <a:prstGeom prst="rect">
             <a:avLst/>
@@ -6391,24 +6780,17 @@
             <a:prstDash val="solid"/>
           </a:ln>
         </p:spPr>
-        <p:txBody>
-          <a:bodyPr/>
-          <a:lstStyle/>
-          <a:p>
-            <a:endParaRPr lang="es-ES"/>
-          </a:p>
-        </p:txBody>
-      </p:sp>
-      <p:sp>
-        <p:nvSpPr>
-          <p:cNvPr id="6" name="Shape 4"/>
-          <p:cNvSpPr/>
-          <p:nvPr/>
-        </p:nvSpPr>
-        <p:spPr>
-          <a:xfrm>
-            <a:off x="548640" y="1097280"/>
-            <a:ext cx="73152" cy="2286000"/>
+      </p:sp>
+      <p:sp>
+        <p:nvSpPr>
+          <p:cNvPr id="7" name="Shape 5"/>
+          <p:cNvSpPr/>
+          <p:nvPr/>
+        </p:nvSpPr>
+        <p:spPr>
+          <a:xfrm>
+            <a:off x="548640" y="1554480"/>
+            <a:ext cx="73152" cy="1463040"/>
           </a:xfrm>
           <a:prstGeom prst="rect">
             <a:avLst/>
@@ -6423,24 +6805,17 @@
             <a:prstDash val="solid"/>
           </a:ln>
         </p:spPr>
-        <p:txBody>
-          <a:bodyPr/>
-          <a:lstStyle/>
-          <a:p>
-            <a:endParaRPr lang="es-ES"/>
-          </a:p>
-        </p:txBody>
-      </p:sp>
-      <p:sp>
-        <p:nvSpPr>
-          <p:cNvPr id="7" name="Text 5"/>
-          <p:cNvSpPr/>
-          <p:nvPr/>
-        </p:nvSpPr>
-        <p:spPr>
-          <a:xfrm>
-            <a:off x="822960" y="1207008"/>
-            <a:ext cx="10588752" cy="2066544"/>
+      </p:sp>
+      <p:sp>
+        <p:nvSpPr>
+          <p:cNvPr id="8" name="Text 6"/>
+          <p:cNvSpPr/>
+          <p:nvPr/>
+        </p:nvSpPr>
+        <p:spPr>
+          <a:xfrm>
+            <a:off x="822960" y="1645920"/>
+            <a:ext cx="10634472" cy="1280160"/>
           </a:xfrm>
           <a:prstGeom prst="rect">
             <a:avLst/>
@@ -6452,11 +6827,11 @@
           <a:bodyPr wrap="square" rtlCol="0" anchor="t"/>
           <a:lstStyle/>
           <a:p>
-            <a:pPr marL="0" indent="0">
-              <a:buNone/>
-            </a:pPr>
-            <a:r>
-              <a:rPr lang="en-US" sz="1500" dirty="0">
+            <a:pPr indent="0" marL="0">
+              <a:buNone/>
+            </a:pPr>
+            <a:r>
+              <a:rPr lang="en-US" sz="1300" dirty="0">
                 <a:solidFill>
                   <a:srgbClr val="263238"/>
                 </a:solidFill>
@@ -6466,14 +6841,14 @@
               </a:rPr>
               <a:t>{</a:t>
             </a:r>
-            <a:endParaRPr lang="en-US" sz="1500" dirty="0"/>
-          </a:p>
-          <a:p>
-            <a:pPr marL="0" indent="0">
-              <a:buNone/>
-            </a:pPr>
-            <a:r>
-              <a:rPr lang="en-US" sz="1500" dirty="0">
+            <a:endParaRPr lang="en-US" sz="1300" dirty="0"/>
+          </a:p>
+          <a:p>
+            <a:pPr indent="0" marL="0">
+              <a:buNone/>
+            </a:pPr>
+            <a:r>
+              <a:rPr lang="en-US" sz="1300" dirty="0">
                 <a:solidFill>
                   <a:srgbClr val="263238"/>
                 </a:solidFill>
@@ -6483,14 +6858,14 @@
               </a:rPr>
               <a:t>  "Effect": "Allow",</a:t>
             </a:r>
-            <a:endParaRPr lang="en-US" sz="1500" dirty="0"/>
-          </a:p>
-          <a:p>
-            <a:pPr marL="0" indent="0">
-              <a:buNone/>
-            </a:pPr>
-            <a:r>
-              <a:rPr lang="en-US" sz="1500" dirty="0">
+            <a:endParaRPr lang="en-US" sz="1300" dirty="0"/>
+          </a:p>
+          <a:p>
+            <a:pPr indent="0" marL="0">
+              <a:buNone/>
+            </a:pPr>
+            <a:r>
+              <a:rPr lang="en-US" sz="1300" dirty="0">
                 <a:solidFill>
                   <a:srgbClr val="263238"/>
                 </a:solidFill>
@@ -6500,14 +6875,14 @@
               </a:rPr>
               <a:t>  "Action": ["s3:GetObject", "s3:PutObject"],</a:t>
             </a:r>
-            <a:endParaRPr lang="en-US" sz="1500" dirty="0"/>
-          </a:p>
-          <a:p>
-            <a:pPr marL="0" indent="0">
-              <a:buNone/>
-            </a:pPr>
-            <a:r>
-              <a:rPr lang="en-US" sz="1500" dirty="0">
+            <a:endParaRPr lang="en-US" sz="1300" dirty="0"/>
+          </a:p>
+          <a:p>
+            <a:pPr indent="0" marL="0">
+              <a:buNone/>
+            </a:pPr>
+            <a:r>
+              <a:rPr lang="en-US" sz="1300" dirty="0">
                 <a:solidFill>
                   <a:srgbClr val="263238"/>
                 </a:solidFill>
@@ -6517,14 +6892,14 @@
               </a:rPr>
               <a:t>  "Resource": "arn:aws:s3:::escaparate-imagenes-&lt;id&gt;/*",</a:t>
             </a:r>
-            <a:endParaRPr lang="en-US" sz="1500" dirty="0"/>
-          </a:p>
-          <a:p>
-            <a:pPr marL="0" indent="0">
-              <a:buNone/>
-            </a:pPr>
-            <a:r>
-              <a:rPr lang="en-US" sz="1500" dirty="0">
+            <a:endParaRPr lang="en-US" sz="1300" dirty="0"/>
+          </a:p>
+          <a:p>
+            <a:pPr indent="0" marL="0">
+              <a:buNone/>
+            </a:pPr>
+            <a:r>
+              <a:rPr lang="en-US" sz="1300" dirty="0">
                 <a:solidFill>
                   <a:srgbClr val="263238"/>
                 </a:solidFill>
@@ -6532,16 +6907,16 @@
                 <a:ea typeface="Courier New" pitchFamily="34" charset="-122"/>
                 <a:cs typeface="Courier New" pitchFamily="34" charset="-120"/>
               </a:rPr>
-              <a:t>  "Condition": {</a:t>
-            </a:r>
-            <a:endParaRPr lang="en-US" sz="1500" dirty="0"/>
-          </a:p>
-          <a:p>
-            <a:pPr marL="0" indent="0">
-              <a:buNone/>
-            </a:pPr>
-            <a:r>
-              <a:rPr lang="en-US" sz="1500" dirty="0">
+              <a:t>  "Condition": { "Bool": { "aws:SecureTransport": "true" } }</a:t>
+            </a:r>
+            <a:endParaRPr lang="en-US" sz="1300" dirty="0"/>
+          </a:p>
+          <a:p>
+            <a:pPr indent="0" marL="0">
+              <a:buNone/>
+            </a:pPr>
+            <a:r>
+              <a:rPr lang="en-US" sz="1300" dirty="0">
                 <a:solidFill>
                   <a:srgbClr val="263238"/>
                 </a:solidFill>
@@ -6549,49 +6924,15 @@
                 <a:ea typeface="Courier New" pitchFamily="34" charset="-122"/>
                 <a:cs typeface="Courier New" pitchFamily="34" charset="-120"/>
               </a:rPr>
-              <a:t>    "Bool": { "aws:SecureTransport": "true" }</a:t>
-            </a:r>
-            <a:endParaRPr lang="en-US" sz="1500" dirty="0"/>
-          </a:p>
-          <a:p>
-            <a:pPr marL="0" indent="0">
-              <a:buNone/>
-            </a:pPr>
-            <a:r>
-              <a:rPr lang="en-US" sz="1500" dirty="0">
-                <a:solidFill>
-                  <a:srgbClr val="263238"/>
-                </a:solidFill>
-                <a:latin typeface="Courier New" pitchFamily="34" charset="0"/>
-                <a:ea typeface="Courier New" pitchFamily="34" charset="-122"/>
-                <a:cs typeface="Courier New" pitchFamily="34" charset="-120"/>
-              </a:rPr>
-              <a:t>  }</a:t>
-            </a:r>
-            <a:endParaRPr lang="en-US" sz="1500" dirty="0"/>
-          </a:p>
-          <a:p>
-            <a:pPr marL="0" indent="0">
-              <a:buNone/>
-            </a:pPr>
-            <a:r>
-              <a:rPr lang="en-US" sz="1500" dirty="0">
-                <a:solidFill>
-                  <a:srgbClr val="263238"/>
-                </a:solidFill>
-                <a:latin typeface="Courier New" pitchFamily="34" charset="0"/>
-                <a:ea typeface="Courier New" pitchFamily="34" charset="-122"/>
-                <a:cs typeface="Courier New" pitchFamily="34" charset="-120"/>
-              </a:rPr>
               <a:t>}</a:t>
             </a:r>
-            <a:endParaRPr lang="en-US" sz="1500" dirty="0"/>
+            <a:endParaRPr lang="en-US" sz="1300" dirty="0"/>
           </a:p>
         </p:txBody>
       </p:sp>
       <p:graphicFrame>
         <p:nvGraphicFramePr>
-          <p:cNvPr id="8" name="Table 0"/>
+          <p:cNvPr id="7" name="Table 0"/>
           <p:cNvGraphicFramePr>
             <a:graphicFrameLocks noGrp="1"/>
           </p:cNvGraphicFramePr>
@@ -6604,43 +6945,25 @@
           </p:nvPr>
         </p:nvGraphicFramePr>
         <p:xfrm>
-          <a:off x="548640" y="3611880"/>
-          <a:ext cx="11091672" cy="1920240"/>
+          <a:off x="548640" y="3291840"/>
+          <a:ext cx="11091672" cy="914400"/>
         </p:xfrm>
         <a:graphic>
           <a:graphicData uri="http://schemas.openxmlformats.org/drawingml/2006/table">
             <a:tbl>
               <a:tblPr/>
               <a:tblGrid>
-                <a:gridCol w="2218334">
-                  <a:extLst>
-                    <a:ext uri="{9D8B030D-6E8A-4147-A177-3AD203B41FA5}">
-                      <a16:colId xmlns:a16="http://schemas.microsoft.com/office/drawing/2014/main" val="20000"/>
-                    </a:ext>
-                  </a:extLst>
-                </a:gridCol>
-                <a:gridCol w="3993002">
-                  <a:extLst>
-                    <a:ext uri="{9D8B030D-6E8A-4147-A177-3AD203B41FA5}">
-                      <a16:colId xmlns:a16="http://schemas.microsoft.com/office/drawing/2014/main" val="20001"/>
-                    </a:ext>
-                  </a:extLst>
-                </a:gridCol>
-                <a:gridCol w="4880336">
-                  <a:extLst>
-                    <a:ext uri="{9D8B030D-6E8A-4147-A177-3AD203B41FA5}">
-                      <a16:colId xmlns:a16="http://schemas.microsoft.com/office/drawing/2014/main" val="20002"/>
-                    </a:ext>
-                  </a:extLst>
-                </a:gridCol>
+                <a:gridCol w="1774668"/>
+                <a:gridCol w="3549335"/>
+                <a:gridCol w="5767669"/>
               </a:tblGrid>
-              <a:tr h="384048">
+              <a:tr h="457200">
                 <a:tc>
                   <a:txBody>
                     <a:bodyPr/>
                     <a:lstStyle/>
                     <a:p>
-                      <a:pPr marL="0" indent="0" algn="ctr">
+                      <a:pPr algn="ctr" indent="0" marL="0">
                         <a:buNone/>
                       </a:pPr>
                       <a:r>
@@ -6661,7 +6984,7 @@
                       </a:endParaRPr>
                     </a:p>
                   </a:txBody>
-                  <a:tcPr anchor="ctr">
+                  <a:tcPr marL="91440" marR="91440" marT="45720" marB="45720" anchor="ctr">
                     <a:lnL w="12700" cap="flat" cmpd="sng" algn="ctr">
                       <a:solidFill>
                         <a:srgbClr val="EEEEEE"/>
@@ -6708,7 +7031,7 @@
                     <a:bodyPr/>
                     <a:lstStyle/>
                     <a:p>
-                      <a:pPr marL="0" indent="0" algn="ctr">
+                      <a:pPr algn="ctr" indent="0" marL="0">
                         <a:buNone/>
                       </a:pPr>
                       <a:r>
@@ -6729,7 +7052,7 @@
                       </a:endParaRPr>
                     </a:p>
                   </a:txBody>
-                  <a:tcPr anchor="ctr">
+                  <a:tcPr marL="91440" marR="91440" marT="45720" marB="45720" anchor="ctr">
                     <a:lnL w="12700" cap="flat" cmpd="sng" algn="ctr">
                       <a:solidFill>
                         <a:srgbClr val="EEEEEE"/>
@@ -6776,7 +7099,7 @@
                     <a:bodyPr/>
                     <a:lstStyle/>
                     <a:p>
-                      <a:pPr marL="0" indent="0" algn="ctr">
+                      <a:pPr algn="ctr" indent="0" marL="0">
                         <a:buNone/>
                       </a:pPr>
                       <a:r>
@@ -6797,7 +7120,7 @@
                       </a:endParaRPr>
                     </a:p>
                   </a:txBody>
-                  <a:tcPr anchor="ctr">
+                  <a:tcPr marL="91440" marR="91440" marT="45720" marB="45720" anchor="ctr">
                     <a:lnL w="12700" cap="flat" cmpd="sng" algn="ctr">
                       <a:solidFill>
                         <a:srgbClr val="EEEEEE"/>
@@ -6839,19 +7162,14 @@
                     </a:solidFill>
                   </a:tcPr>
                 </a:tc>
-                <a:extLst>
-                  <a:ext uri="{0D108BD9-81ED-4DB2-BD59-A6C34878D82A}">
-                    <a16:rowId xmlns:a16="http://schemas.microsoft.com/office/drawing/2014/main" val="10000"/>
-                  </a:ext>
-                </a:extLst>
               </a:tr>
-              <a:tr h="384048">
+              <a:tr h="457200">
                 <a:tc>
                   <a:txBody>
                     <a:bodyPr/>
                     <a:lstStyle/>
                     <a:p>
-                      <a:pPr marL="0" indent="0">
+                      <a:pPr indent="0" marL="0">
                         <a:buNone/>
                       </a:pPr>
                       <a:r>
@@ -6872,7 +7190,7 @@
                       </a:endParaRPr>
                     </a:p>
                   </a:txBody>
-                  <a:tcPr anchor="ctr">
+                  <a:tcPr marL="91440" marR="91440" marT="45720" marB="45720" anchor="ctr">
                     <a:lnL w="12700" cap="flat" cmpd="sng" algn="ctr">
                       <a:solidFill>
                         <a:srgbClr val="EEEEEE"/>
@@ -6919,7 +7237,7 @@
                     <a:bodyPr/>
                     <a:lstStyle/>
                     <a:p>
-                      <a:pPr marL="0" indent="0">
+                      <a:pPr indent="0" marL="0">
                         <a:buNone/>
                       </a:pPr>
                       <a:r>
@@ -6940,7 +7258,7 @@
                       </a:endParaRPr>
                     </a:p>
                   </a:txBody>
-                  <a:tcPr anchor="ctr">
+                  <a:tcPr marL="91440" marR="91440" marT="45720" marB="45720" anchor="ctr">
                     <a:lnL w="12700" cap="flat" cmpd="sng" algn="ctr">
                       <a:solidFill>
                         <a:srgbClr val="EEEEEE"/>
@@ -6987,7 +7305,7 @@
                     <a:bodyPr/>
                     <a:lstStyle/>
                     <a:p>
-                      <a:pPr marL="0" indent="0">
+                      <a:pPr indent="0" marL="0">
                         <a:buNone/>
                       </a:pPr>
                       <a:r>
@@ -7008,7 +7326,7 @@
                       </a:endParaRPr>
                     </a:p>
                   </a:txBody>
-                  <a:tcPr anchor="ctr">
+                  <a:tcPr marL="91440" marR="91440" marT="45720" marB="45720" anchor="ctr">
                     <a:lnL w="12700" cap="flat" cmpd="sng" algn="ctr">
                       <a:solidFill>
                         <a:srgbClr val="EEEEEE"/>
@@ -7050,19 +7368,14 @@
                     </a:solidFill>
                   </a:tcPr>
                 </a:tc>
-                <a:extLst>
-                  <a:ext uri="{0D108BD9-81ED-4DB2-BD59-A6C34878D82A}">
-                    <a16:rowId xmlns:a16="http://schemas.microsoft.com/office/drawing/2014/main" val="10001"/>
-                  </a:ext>
-                </a:extLst>
               </a:tr>
-              <a:tr h="384048">
+              <a:tr h="457200">
                 <a:tc>
                   <a:txBody>
                     <a:bodyPr/>
                     <a:lstStyle/>
                     <a:p>
-                      <a:pPr marL="0" indent="0">
+                      <a:pPr indent="0" marL="0">
                         <a:buNone/>
                       </a:pPr>
                       <a:r>
@@ -7083,7 +7396,7 @@
                       </a:endParaRPr>
                     </a:p>
                   </a:txBody>
-                  <a:tcPr anchor="ctr">
+                  <a:tcPr marL="91440" marR="91440" marT="45720" marB="45720" anchor="ctr">
                     <a:lnL w="12700" cap="flat" cmpd="sng" algn="ctr">
                       <a:solidFill>
                         <a:srgbClr val="EEEEEE"/>
@@ -7130,7 +7443,7 @@
                     <a:bodyPr/>
                     <a:lstStyle/>
                     <a:p>
-                      <a:pPr marL="0" indent="0">
+                      <a:pPr indent="0" marL="0">
                         <a:buNone/>
                       </a:pPr>
                       <a:r>
@@ -7151,7 +7464,7 @@
                       </a:endParaRPr>
                     </a:p>
                   </a:txBody>
-                  <a:tcPr anchor="ctr">
+                  <a:tcPr marL="91440" marR="91440" marT="45720" marB="45720" anchor="ctr">
                     <a:lnL w="12700" cap="flat" cmpd="sng" algn="ctr">
                       <a:solidFill>
                         <a:srgbClr val="EEEEEE"/>
@@ -7198,7 +7511,7 @@
                     <a:bodyPr/>
                     <a:lstStyle/>
                     <a:p>
-                      <a:pPr marL="0" indent="0">
+                      <a:pPr indent="0" marL="0">
                         <a:buNone/>
                       </a:pPr>
                       <a:r>
@@ -7210,7 +7523,7 @@
                           <a:ea typeface="Arial" pitchFamily="34" charset="-122"/>
                           <a:cs typeface="Arial" pitchFamily="34" charset="-120"/>
                         </a:rPr>
-                        <a:t>Leer y escribir un objeto</a:t>
+                        <a:t>GetObject y PutObject (leer y escribir)</a:t>
                       </a:r>
                       <a:endParaRPr lang="en-US" sz="1200" dirty="0">
                         <a:latin typeface="Arial" charset="0"/>
@@ -7219,7 +7532,7 @@
                       </a:endParaRPr>
                     </a:p>
                   </a:txBody>
-                  <a:tcPr anchor="ctr">
+                  <a:tcPr marL="91440" marR="91440" marT="45720" marB="45720" anchor="ctr">
                     <a:lnL w="12700" cap="flat" cmpd="sng" algn="ctr">
                       <a:solidFill>
                         <a:srgbClr val="EEEEEE"/>
@@ -7261,19 +7574,14 @@
                     </a:solidFill>
                   </a:tcPr>
                 </a:tc>
-                <a:extLst>
-                  <a:ext uri="{0D108BD9-81ED-4DB2-BD59-A6C34878D82A}">
-                    <a16:rowId xmlns:a16="http://schemas.microsoft.com/office/drawing/2014/main" val="10002"/>
-                  </a:ext>
-                </a:extLst>
               </a:tr>
-              <a:tr h="384048">
+              <a:tr h="457200">
                 <a:tc>
                   <a:txBody>
                     <a:bodyPr/>
                     <a:lstStyle/>
                     <a:p>
-                      <a:pPr marL="0" indent="0">
+                      <a:pPr indent="0" marL="0">
                         <a:buNone/>
                       </a:pPr>
                       <a:r>
@@ -7294,7 +7602,7 @@
                       </a:endParaRPr>
                     </a:p>
                   </a:txBody>
-                  <a:tcPr anchor="ctr">
+                  <a:tcPr marL="91440" marR="91440" marT="45720" marB="45720" anchor="ctr">
                     <a:lnL w="12700" cap="flat" cmpd="sng" algn="ctr">
                       <a:solidFill>
                         <a:srgbClr val="EEEEEE"/>
@@ -7341,7 +7649,7 @@
                     <a:bodyPr/>
                     <a:lstStyle/>
                     <a:p>
-                      <a:pPr marL="0" indent="0">
+                      <a:pPr indent="0" marL="0">
                         <a:buNone/>
                       </a:pPr>
                       <a:r>
@@ -7353,7 +7661,7 @@
                           <a:ea typeface="Arial" pitchFamily="34" charset="-122"/>
                           <a:cs typeface="Arial" pitchFamily="34" charset="-120"/>
                         </a:rPr>
-                        <a:t>¿Sobre qué recurso?</a:t>
+                        <a:t>¿Sobre qué recurso concreto?</a:t>
                       </a:r>
                       <a:endParaRPr lang="en-US" sz="1200" dirty="0">
                         <a:latin typeface="Arial" charset="0"/>
@@ -7362,7 +7670,7 @@
                       </a:endParaRPr>
                     </a:p>
                   </a:txBody>
-                  <a:tcPr anchor="ctr">
+                  <a:tcPr marL="91440" marR="91440" marT="45720" marB="45720" anchor="ctr">
                     <a:lnL w="12700" cap="flat" cmpd="sng" algn="ctr">
                       <a:solidFill>
                         <a:srgbClr val="EEEEEE"/>
@@ -7409,7 +7717,7 @@
                     <a:bodyPr/>
                     <a:lstStyle/>
                     <a:p>
-                      <a:pPr marL="0" indent="0">
+                      <a:pPr indent="0" marL="0">
                         <a:buNone/>
                       </a:pPr>
                       <a:r>
@@ -7430,7 +7738,7 @@
                       </a:endParaRPr>
                     </a:p>
                   </a:txBody>
-                  <a:tcPr anchor="ctr">
+                  <a:tcPr marL="91440" marR="91440" marT="45720" marB="45720" anchor="ctr">
                     <a:lnL w="12700" cap="flat" cmpd="sng" algn="ctr">
                       <a:solidFill>
                         <a:srgbClr val="EEEEEE"/>
@@ -7472,19 +7780,14 @@
                     </a:solidFill>
                   </a:tcPr>
                 </a:tc>
-                <a:extLst>
-                  <a:ext uri="{0D108BD9-81ED-4DB2-BD59-A6C34878D82A}">
-                    <a16:rowId xmlns:a16="http://schemas.microsoft.com/office/drawing/2014/main" val="10003"/>
-                  </a:ext>
-                </a:extLst>
               </a:tr>
-              <a:tr h="384048">
+              <a:tr h="457200">
                 <a:tc>
                   <a:txBody>
                     <a:bodyPr/>
                     <a:lstStyle/>
                     <a:p>
-                      <a:pPr marL="0" indent="0">
+                      <a:pPr indent="0" marL="0">
                         <a:buNone/>
                       </a:pPr>
                       <a:r>
@@ -7505,7 +7808,7 @@
                       </a:endParaRPr>
                     </a:p>
                   </a:txBody>
-                  <a:tcPr anchor="ctr">
+                  <a:tcPr marL="91440" marR="91440" marT="45720" marB="45720" anchor="ctr">
                     <a:lnL w="12700" cap="flat" cmpd="sng" algn="ctr">
                       <a:solidFill>
                         <a:srgbClr val="EEEEEE"/>
@@ -7552,7 +7855,7 @@
                     <a:bodyPr/>
                     <a:lstStyle/>
                     <a:p>
-                      <a:pPr marL="0" indent="0">
+                      <a:pPr indent="0" marL="0">
                         <a:buNone/>
                       </a:pPr>
                       <a:r>
@@ -7564,7 +7867,7 @@
                           <a:ea typeface="Arial" pitchFamily="34" charset="-122"/>
                           <a:cs typeface="Arial" pitchFamily="34" charset="-120"/>
                         </a:rPr>
-                        <a:t>¿Bajo qué circunstancia?</a:t>
+                        <a:t>¿Bajo qué circunstancia adicional?</a:t>
                       </a:r>
                       <a:endParaRPr lang="en-US" sz="1200" dirty="0">
                         <a:latin typeface="Arial" charset="0"/>
@@ -7573,7 +7876,7 @@
                       </a:endParaRPr>
                     </a:p>
                   </a:txBody>
-                  <a:tcPr anchor="ctr">
+                  <a:tcPr marL="91440" marR="91440" marT="45720" marB="45720" anchor="ctr">
                     <a:lnL w="12700" cap="flat" cmpd="sng" algn="ctr">
                       <a:solidFill>
                         <a:srgbClr val="EEEEEE"/>
@@ -7620,7 +7923,7 @@
                     <a:bodyPr/>
                     <a:lstStyle/>
                     <a:p>
-                      <a:pPr marL="0" indent="0">
+                      <a:pPr indent="0" marL="0">
                         <a:buNone/>
                       </a:pPr>
                       <a:r>
@@ -7632,7 +7935,7 @@
                           <a:ea typeface="Arial" pitchFamily="34" charset="-122"/>
                           <a:cs typeface="Arial" pitchFamily="34" charset="-120"/>
                         </a:rPr>
-                        <a:t>Solo si la conexión va cifrada</a:t>
+                        <a:t>Solo si la petición viaja cifrada (HTTPS)</a:t>
                       </a:r>
                       <a:endParaRPr lang="en-US" sz="1200" dirty="0">
                         <a:latin typeface="Arial" charset="0"/>
@@ -7641,7 +7944,7 @@
                       </a:endParaRPr>
                     </a:p>
                   </a:txBody>
-                  <a:tcPr anchor="ctr">
+                  <a:tcPr marL="91440" marR="91440" marT="45720" marB="45720" anchor="ctr">
                     <a:lnL w="12700" cap="flat" cmpd="sng" algn="ctr">
                       <a:solidFill>
                         <a:srgbClr val="EEEEEE"/>
@@ -7683,11 +7986,6 @@
                     </a:solidFill>
                   </a:tcPr>
                 </a:tc>
-                <a:extLst>
-                  <a:ext uri="{0D108BD9-81ED-4DB2-BD59-A6C34878D82A}">
-                    <a16:rowId xmlns:a16="http://schemas.microsoft.com/office/drawing/2014/main" val="10004"/>
-                  </a:ext>
-                </a:extLst>
               </a:tr>
             </a:tbl>
           </a:graphicData>
@@ -7742,13 +8040,6 @@
             <a:prstDash val="solid"/>
           </a:ln>
         </p:spPr>
-        <p:txBody>
-          <a:bodyPr/>
-          <a:lstStyle/>
-          <a:p>
-            <a:endParaRPr lang="es-ES"/>
-          </a:p>
-        </p:txBody>
       </p:sp>
       <p:sp>
         <p:nvSpPr>
@@ -7771,7 +8062,7 @@
           <a:bodyPr wrap="square" rtlCol="0" anchor="ctr"/>
           <a:lstStyle/>
           <a:p>
-            <a:pPr marL="0" indent="0">
+            <a:pPr indent="0" marL="0">
               <a:buNone/>
             </a:pPr>
             <a:r>
@@ -7783,7 +8074,7 @@
                 <a:ea typeface="Arial" pitchFamily="34" charset="-122"/>
                 <a:cs typeface="Arial" pitchFamily="34" charset="-120"/>
               </a:rPr>
-              <a:t>Leer una política, frase por frase</a:t>
+              <a:t>Leer una política, y comprobarlo con el simulador</a:t>
             </a:r>
             <a:endParaRPr lang="en-US" sz="2400" dirty="0"/>
           </a:p>
@@ -7810,7 +8101,7 @@
           <a:bodyPr wrap="square" rtlCol="0" anchor="ctr"/>
           <a:lstStyle/>
           <a:p>
-            <a:pPr marL="0" indent="0" algn="r">
+            <a:pPr algn="r" indent="0" marL="0">
               <a:buNone/>
             </a:pPr>
             <a:r>
@@ -7836,8 +8127,8 @@
         </p:nvSpPr>
         <p:spPr>
           <a:xfrm>
-            <a:off x="548640" y="1737360"/>
-            <a:ext cx="11091672" cy="1737360"/>
+            <a:off x="548640" y="1143000"/>
+            <a:ext cx="11091672" cy="868680"/>
           </a:xfrm>
           <a:prstGeom prst="roundRect">
             <a:avLst/>
@@ -7852,13 +8143,6 @@
             <a:prstDash val="solid"/>
           </a:ln>
         </p:spPr>
-        <p:txBody>
-          <a:bodyPr/>
-          <a:lstStyle/>
-          <a:p>
-            <a:endParaRPr lang="es-ES"/>
-          </a:p>
-        </p:txBody>
       </p:sp>
       <p:sp>
         <p:nvSpPr>
@@ -7868,8 +8152,8 @@
         </p:nvSpPr>
         <p:spPr>
           <a:xfrm>
-            <a:off x="822960" y="1828800"/>
-            <a:ext cx="10543032" cy="1554480"/>
+            <a:off x="822960" y="1234440"/>
+            <a:ext cx="10543032" cy="685800"/>
           </a:xfrm>
           <a:prstGeom prst="rect">
             <a:avLst/>
@@ -7881,11 +8165,11 @@
           <a:bodyPr wrap="square" rtlCol="0" anchor="ctr"/>
           <a:lstStyle/>
           <a:p>
-            <a:pPr marL="0" indent="0">
-              <a:buNone/>
-            </a:pPr>
-            <a:r>
-              <a:rPr lang="en-US" sz="2100" dirty="0">
+            <a:pPr indent="0" marL="0">
+              <a:buNone/>
+            </a:pPr>
+            <a:r>
+              <a:rPr lang="en-US" sz="1500" dirty="0">
                 <a:solidFill>
                   <a:srgbClr val="212121"/>
                 </a:solidFill>
@@ -7893,9 +8177,176 @@
                 <a:ea typeface="Arial" pitchFamily="34" charset="-122"/>
                 <a:cs typeface="Arial" pitchFamily="34" charset="-120"/>
               </a:rPr>
-              <a:t>«Permite leer y escribir objetos dentro del bucket de imágenes de Escaparate, pero solo si la conexión va cifrada.» Cuatro campos, una frase — cuando te enfrentes a la política real de tu rol en la Actividad 5.2, sigue leyéndola exactamente así, campo a campo.</a:t>
-            </a:r>
-            <a:endParaRPr lang="en-US" sz="2100" dirty="0"/>
+              <a:t>«Permite leer y escribir objetos del bucket de imágenes, pero solo si la conexión va cifrada» — cuatro campos, una frase.</a:t>
+            </a:r>
+            <a:endParaRPr lang="en-US" sz="1500" dirty="0"/>
+          </a:p>
+        </p:txBody>
+      </p:sp>
+      <p:sp>
+        <p:nvSpPr>
+          <p:cNvPr id="7" name="Shape 5"/>
+          <p:cNvSpPr/>
+          <p:nvPr/>
+        </p:nvSpPr>
+        <p:spPr>
+          <a:xfrm>
+            <a:off x="548640" y="2286000"/>
+            <a:ext cx="11091672" cy="1508760"/>
+          </a:xfrm>
+          <a:prstGeom prst="roundRect">
+            <a:avLst/>
+          </a:prstGeom>
+          <a:solidFill>
+            <a:srgbClr val="E8EAF6"/>
+          </a:solidFill>
+          <a:ln w="15875">
+            <a:solidFill>
+              <a:srgbClr val="3949AB"/>
+            </a:solidFill>
+            <a:prstDash val="solid"/>
+          </a:ln>
+        </p:spPr>
+      </p:sp>
+      <p:sp>
+        <p:nvSpPr>
+          <p:cNvPr id="8" name="Text 6"/>
+          <p:cNvSpPr/>
+          <p:nvPr/>
+        </p:nvSpPr>
+        <p:spPr>
+          <a:xfrm>
+            <a:off x="731520" y="2359152"/>
+            <a:ext cx="10725912" cy="548640"/>
+          </a:xfrm>
+          <a:prstGeom prst="rect">
+            <a:avLst/>
+          </a:prstGeom>
+          <a:noFill/>
+          <a:ln/>
+        </p:spPr>
+        <p:txBody>
+          <a:bodyPr wrap="square" rtlCol="0" anchor="ctr"/>
+          <a:lstStyle/>
+          <a:p>
+            <a:pPr indent="0" marL="0">
+              <a:buNone/>
+            </a:pPr>
+            <a:r>
+              <a:rPr lang="en-US" sz="1800" b="1" dirty="0">
+                <a:solidFill>
+                  <a:srgbClr val="1A237E"/>
+                </a:solidFill>
+                <a:latin typeface="Arial" pitchFamily="34" charset="0"/>
+                <a:ea typeface="Arial" pitchFamily="34" charset="-122"/>
+                <a:cs typeface="Arial" pitchFamily="34" charset="-120"/>
+              </a:rPr>
+              <a:t>Simulador de políticas de IAM</a:t>
+            </a:r>
+            <a:endParaRPr lang="en-US" sz="1800" dirty="0"/>
+          </a:p>
+        </p:txBody>
+      </p:sp>
+      <p:sp>
+        <p:nvSpPr>
+          <p:cNvPr id="9" name="Text 7"/>
+          <p:cNvSpPr/>
+          <p:nvPr/>
+        </p:nvSpPr>
+        <p:spPr>
+          <a:xfrm>
+            <a:off x="731520" y="2907792"/>
+            <a:ext cx="10725912" cy="813816"/>
+          </a:xfrm>
+          <a:prstGeom prst="rect">
+            <a:avLst/>
+          </a:prstGeom>
+          <a:noFill/>
+          <a:ln/>
+        </p:spPr>
+        <p:txBody>
+          <a:bodyPr wrap="square" rtlCol="0" anchor="t"/>
+          <a:lstStyle/>
+          <a:p>
+            <a:pPr indent="0" marL="0">
+              <a:buNone/>
+            </a:pPr>
+            <a:r>
+              <a:rPr lang="en-US" sz="1600" dirty="0">
+                <a:solidFill>
+                  <a:srgbClr val="212121"/>
+                </a:solidFill>
+                <a:latin typeface="Arial" pitchFamily="34" charset="0"/>
+                <a:ea typeface="Arial" pitchFamily="34" charset="-122"/>
+                <a:cs typeface="Arial" pitchFamily="34" charset="-120"/>
+              </a:rPr>
+              <a:t>Eliges una política, una acción y un recurso concretos, y te responde «permitido» o «denegado» — sin ejecutar nada de verdad contra tu cuenta.</a:t>
+            </a:r>
+            <a:endParaRPr lang="en-US" sz="1600" dirty="0"/>
+          </a:p>
+        </p:txBody>
+      </p:sp>
+      <p:sp>
+        <p:nvSpPr>
+          <p:cNvPr id="10" name="Shape 8"/>
+          <p:cNvSpPr/>
+          <p:nvPr/>
+        </p:nvSpPr>
+        <p:spPr>
+          <a:xfrm>
+            <a:off x="548640" y="4069080"/>
+            <a:ext cx="11091672" cy="1188720"/>
+          </a:xfrm>
+          <a:prstGeom prst="roundRect">
+            <a:avLst/>
+          </a:prstGeom>
+          <a:solidFill>
+            <a:srgbClr val="FFF8E1"/>
+          </a:solidFill>
+          <a:ln w="19050">
+            <a:solidFill>
+              <a:srgbClr val="FFA000"/>
+            </a:solidFill>
+            <a:prstDash val="solid"/>
+          </a:ln>
+        </p:spPr>
+      </p:sp>
+      <p:sp>
+        <p:nvSpPr>
+          <p:cNvPr id="11" name="Text 9"/>
+          <p:cNvSpPr/>
+          <p:nvPr/>
+        </p:nvSpPr>
+        <p:spPr>
+          <a:xfrm>
+            <a:off x="822960" y="4160520"/>
+            <a:ext cx="10543032" cy="1005840"/>
+          </a:xfrm>
+          <a:prstGeom prst="rect">
+            <a:avLst/>
+          </a:prstGeom>
+          <a:noFill/>
+          <a:ln/>
+        </p:spPr>
+        <p:txBody>
+          <a:bodyPr wrap="square" rtlCol="0" anchor="ctr"/>
+          <a:lstStyle/>
+          <a:p>
+            <a:pPr indent="0" marL="0">
+              <a:buNone/>
+            </a:pPr>
+            <a:r>
+              <a:rPr lang="en-US" sz="1450" dirty="0">
+                <a:solidFill>
+                  <a:srgbClr val="212121"/>
+                </a:solidFill>
+                <a:latin typeface="Arial" pitchFamily="34" charset="0"/>
+                <a:ea typeface="Arial" pitchFamily="34" charset="-122"/>
+                <a:cs typeface="Arial" pitchFamily="34" charset="-120"/>
+              </a:rPr>
+              <a:t>Con esta política: s3:GetObject sobre un objeto del bucket → Permitido. s3:DeleteObject sobre ese mismo objeto → Denegado, porque esta política nunca menciona esa acción.</a:t>
+            </a:r>
+            <a:endParaRPr lang="en-US" sz="1450" dirty="0"/>
           </a:p>
         </p:txBody>
       </p:sp>
@@ -7948,13 +8399,6 @@
             <a:prstDash val="solid"/>
           </a:ln>
         </p:spPr>
-        <p:txBody>
-          <a:bodyPr/>
-          <a:lstStyle/>
-          <a:p>
-            <a:endParaRPr lang="es-ES"/>
-          </a:p>
-        </p:txBody>
       </p:sp>
       <p:sp>
         <p:nvSpPr>
@@ -7977,7 +8421,7 @@
           <a:bodyPr wrap="square" rtlCol="0" anchor="ctr"/>
           <a:lstStyle/>
           <a:p>
-            <a:pPr marL="0" indent="0">
+            <a:pPr indent="0" marL="0">
               <a:buNone/>
             </a:pPr>
             <a:r>
@@ -7989,7 +8433,7 @@
                 <a:ea typeface="Arial" pitchFamily="34" charset="-122"/>
                 <a:cs typeface="Arial" pitchFamily="34" charset="-120"/>
               </a:rPr>
-              <a:t>El simulador de políticas de IAM</a:t>
+              <a:t>Cómo se evalúa una política: quién gana</a:t>
             </a:r>
             <a:endParaRPr lang="en-US" sz="2400" dirty="0"/>
           </a:p>
@@ -8016,7 +8460,7 @@
           <a:bodyPr wrap="square" rtlCol="0" anchor="ctr"/>
           <a:lstStyle/>
           <a:p>
-            <a:pPr marL="0" indent="0" algn="r">
+            <a:pPr algn="r" indent="0" marL="0">
               <a:buNone/>
             </a:pPr>
             <a:r>
@@ -8042,8 +8486,8 @@
         </p:nvSpPr>
         <p:spPr>
           <a:xfrm>
-            <a:off x="548640" y="1188720"/>
-            <a:ext cx="11091672" cy="1463040"/>
+            <a:off x="548640" y="1143000"/>
+            <a:ext cx="11091672" cy="365760"/>
           </a:xfrm>
           <a:prstGeom prst="rect">
             <a:avLst/>
@@ -8052,14 +8496,78 @@
           <a:ln/>
         </p:spPr>
         <p:txBody>
-          <a:bodyPr wrap="square" rtlCol="0" anchor="t"/>
-          <a:lstStyle/>
-          <a:p>
-            <a:pPr marL="0" indent="0">
-              <a:buNone/>
-            </a:pPr>
-            <a:r>
-              <a:rPr lang="en-US" sz="1800" dirty="0">
+          <a:bodyPr wrap="square" rtlCol="0" anchor="ctr"/>
+          <a:lstStyle/>
+          <a:p>
+            <a:pPr indent="0" marL="0">
+              <a:buNone/>
+            </a:pPr>
+            <a:r>
+              <a:rPr lang="en-US" sz="1500" b="1" dirty="0">
+                <a:solidFill>
+                  <a:srgbClr val="3949AB"/>
+                </a:solidFill>
+                <a:latin typeface="Arial" pitchFamily="34" charset="0"/>
+                <a:ea typeface="Arial" pitchFamily="34" charset="-122"/>
+                <a:cs typeface="Arial" pitchFamily="34" charset="-120"/>
+              </a:rPr>
+              <a:t>El resultado nunca se decide sumando políticas — siempre con este orden fijo</a:t>
+            </a:r>
+            <a:endParaRPr lang="en-US" sz="1500" dirty="0"/>
+          </a:p>
+        </p:txBody>
+      </p:sp>
+      <p:sp>
+        <p:nvSpPr>
+          <p:cNvPr id="6" name="Shape 4"/>
+          <p:cNvSpPr/>
+          <p:nvPr/>
+        </p:nvSpPr>
+        <p:spPr>
+          <a:xfrm>
+            <a:off x="548640" y="1554480"/>
+            <a:ext cx="4174236" cy="777240"/>
+          </a:xfrm>
+          <a:prstGeom prst="roundRect">
+            <a:avLst/>
+          </a:prstGeom>
+          <a:solidFill>
+            <a:srgbClr val="E8EAF6"/>
+          </a:solidFill>
+          <a:ln w="15875">
+            <a:solidFill>
+              <a:srgbClr val="3949AB"/>
+            </a:solidFill>
+            <a:prstDash val="solid"/>
+          </a:ln>
+        </p:spPr>
+      </p:sp>
+      <p:sp>
+        <p:nvSpPr>
+          <p:cNvPr id="7" name="Text 5"/>
+          <p:cNvSpPr/>
+          <p:nvPr/>
+        </p:nvSpPr>
+        <p:spPr>
+          <a:xfrm>
+            <a:off x="640080" y="1554480"/>
+            <a:ext cx="3991356" cy="777240"/>
+          </a:xfrm>
+          <a:prstGeom prst="rect">
+            <a:avLst/>
+          </a:prstGeom>
+          <a:noFill/>
+          <a:ln/>
+        </p:spPr>
+        <p:txBody>
+          <a:bodyPr wrap="square" rtlCol="0" anchor="ctr"/>
+          <a:lstStyle/>
+          <a:p>
+            <a:pPr algn="ctr" indent="0" marL="0">
+              <a:buNone/>
+            </a:pPr>
+            <a:r>
+              <a:rPr lang="en-US" sz="1400" dirty="0">
                 <a:solidFill>
                   <a:srgbClr val="212121"/>
                 </a:solidFill>
@@ -8067,22 +8575,544 @@
                 <a:ea typeface="Arial" pitchFamily="34" charset="-122"/>
                 <a:cs typeface="Arial" pitchFamily="34" charset="-120"/>
               </a:rPr>
-              <a:t>Leer una política te dice qué debería permitir sobre el papel, pero con varias líneas y comodines de por medio es fácil equivocarse. El simulador te deja elegir una política, una acción y un recurso, y responde directamente «permitido» o «denegado» — sin ejecutar nada de verdad contra tu cuenta.</a:t>
-            </a:r>
-            <a:endParaRPr lang="en-US" sz="1800" dirty="0"/>
-          </a:p>
-        </p:txBody>
-      </p:sp>
-      <p:sp>
-        <p:nvSpPr>
-          <p:cNvPr id="6" name="Shape 4"/>
-          <p:cNvSpPr/>
-          <p:nvPr/>
-        </p:nvSpPr>
-        <p:spPr>
-          <a:xfrm>
-            <a:off x="548640" y="2926080"/>
-            <a:ext cx="11091672" cy="1463040"/>
+              <a:t>¿Deny explícito en</a:t>
+            </a:r>
+            <a:endParaRPr lang="en-US" sz="1400" dirty="0"/>
+          </a:p>
+          <a:p>
+            <a:pPr algn="ctr" indent="0" marL="0">
+              <a:buNone/>
+            </a:pPr>
+            <a:r>
+              <a:rPr lang="en-US" sz="1400" dirty="0">
+                <a:solidFill>
+                  <a:srgbClr val="212121"/>
+                </a:solidFill>
+                <a:latin typeface="Arial" pitchFamily="34" charset="0"/>
+                <a:ea typeface="Arial" pitchFamily="34" charset="-122"/>
+                <a:cs typeface="Arial" pitchFamily="34" charset="-120"/>
+              </a:rPr>
+              <a:t>alguna política aplicable?</a:t>
+            </a:r>
+            <a:endParaRPr lang="en-US" sz="1400" dirty="0"/>
+          </a:p>
+        </p:txBody>
+      </p:sp>
+      <p:sp>
+        <p:nvSpPr>
+          <p:cNvPr id="8" name="Shape 6"/>
+          <p:cNvSpPr/>
+          <p:nvPr/>
+        </p:nvSpPr>
+        <p:spPr>
+          <a:xfrm>
+            <a:off x="7466076" y="1554480"/>
+            <a:ext cx="4174236" cy="777240"/>
+          </a:xfrm>
+          <a:prstGeom prst="roundRect">
+            <a:avLst/>
+          </a:prstGeom>
+          <a:solidFill>
+            <a:srgbClr val="E8EAF6"/>
+          </a:solidFill>
+          <a:ln w="15875">
+            <a:solidFill>
+              <a:srgbClr val="3949AB"/>
+            </a:solidFill>
+            <a:prstDash val="solid"/>
+          </a:ln>
+        </p:spPr>
+      </p:sp>
+      <p:sp>
+        <p:nvSpPr>
+          <p:cNvPr id="9" name="Text 7"/>
+          <p:cNvSpPr/>
+          <p:nvPr/>
+        </p:nvSpPr>
+        <p:spPr>
+          <a:xfrm>
+            <a:off x="7557516" y="1554480"/>
+            <a:ext cx="3991356" cy="777240"/>
+          </a:xfrm>
+          <a:prstGeom prst="rect">
+            <a:avLst/>
+          </a:prstGeom>
+          <a:noFill/>
+          <a:ln/>
+        </p:spPr>
+        <p:txBody>
+          <a:bodyPr wrap="square" rtlCol="0" anchor="ctr"/>
+          <a:lstStyle/>
+          <a:p>
+            <a:pPr algn="ctr" indent="0" marL="0">
+              <a:buNone/>
+            </a:pPr>
+            <a:r>
+              <a:rPr lang="en-US" sz="1400" dirty="0">
+                <a:solidFill>
+                  <a:srgbClr val="212121"/>
+                </a:solidFill>
+                <a:latin typeface="Arial" pitchFamily="34" charset="0"/>
+                <a:ea typeface="Arial" pitchFamily="34" charset="-122"/>
+                <a:cs typeface="Arial" pitchFamily="34" charset="-120"/>
+              </a:rPr>
+              <a:t>❌ Denegado,</a:t>
+            </a:r>
+            <a:endParaRPr lang="en-US" sz="1400" dirty="0"/>
+          </a:p>
+          <a:p>
+            <a:pPr algn="ctr" indent="0" marL="0">
+              <a:buNone/>
+            </a:pPr>
+            <a:r>
+              <a:rPr lang="en-US" sz="1400" dirty="0">
+                <a:solidFill>
+                  <a:srgbClr val="212121"/>
+                </a:solidFill>
+                <a:latin typeface="Arial" pitchFamily="34" charset="0"/>
+                <a:ea typeface="Arial" pitchFamily="34" charset="-122"/>
+                <a:cs typeface="Arial" pitchFamily="34" charset="-120"/>
+              </a:rPr>
+              <a:t>sin excepciones</a:t>
+            </a:r>
+            <a:endParaRPr lang="en-US" sz="1400" dirty="0"/>
+          </a:p>
+        </p:txBody>
+      </p:sp>
+      <p:sp>
+        <p:nvSpPr>
+          <p:cNvPr id="10" name="Text 8"/>
+          <p:cNvSpPr/>
+          <p:nvPr/>
+        </p:nvSpPr>
+        <p:spPr>
+          <a:xfrm>
+            <a:off x="4722876" y="1554480"/>
+            <a:ext cx="2743200" cy="777240"/>
+          </a:xfrm>
+          <a:prstGeom prst="rect">
+            <a:avLst/>
+          </a:prstGeom>
+          <a:noFill/>
+          <a:ln/>
+        </p:spPr>
+        <p:txBody>
+          <a:bodyPr wrap="square" rtlCol="0" anchor="ctr"/>
+          <a:lstStyle/>
+          <a:p>
+            <a:pPr algn="ctr" indent="0" marL="0">
+              <a:buNone/>
+            </a:pPr>
+            <a:r>
+              <a:rPr lang="en-US" sz="1300" b="1" i="1" dirty="0">
+                <a:solidFill>
+                  <a:srgbClr val="3949AB"/>
+                </a:solidFill>
+                <a:latin typeface="Arial" pitchFamily="34" charset="0"/>
+                <a:ea typeface="Arial" pitchFamily="34" charset="-122"/>
+                <a:cs typeface="Arial" pitchFamily="34" charset="-120"/>
+              </a:rPr>
+              <a:t>Sí →</a:t>
+            </a:r>
+            <a:endParaRPr lang="en-US" sz="1300" dirty="0"/>
+          </a:p>
+        </p:txBody>
+      </p:sp>
+      <p:sp>
+        <p:nvSpPr>
+          <p:cNvPr id="11" name="Shape 9"/>
+          <p:cNvSpPr/>
+          <p:nvPr/>
+        </p:nvSpPr>
+        <p:spPr>
+          <a:xfrm>
+            <a:off x="548640" y="2468880"/>
+            <a:ext cx="4174236" cy="777240"/>
+          </a:xfrm>
+          <a:prstGeom prst="roundRect">
+            <a:avLst/>
+          </a:prstGeom>
+          <a:solidFill>
+            <a:srgbClr val="E8EAF6"/>
+          </a:solidFill>
+          <a:ln w="15875">
+            <a:solidFill>
+              <a:srgbClr val="3949AB"/>
+            </a:solidFill>
+            <a:prstDash val="solid"/>
+          </a:ln>
+        </p:spPr>
+      </p:sp>
+      <p:sp>
+        <p:nvSpPr>
+          <p:cNvPr id="12" name="Text 10"/>
+          <p:cNvSpPr/>
+          <p:nvPr/>
+        </p:nvSpPr>
+        <p:spPr>
+          <a:xfrm>
+            <a:off x="640080" y="2468880"/>
+            <a:ext cx="3991356" cy="777240"/>
+          </a:xfrm>
+          <a:prstGeom prst="rect">
+            <a:avLst/>
+          </a:prstGeom>
+          <a:noFill/>
+          <a:ln/>
+        </p:spPr>
+        <p:txBody>
+          <a:bodyPr wrap="square" rtlCol="0" anchor="ctr"/>
+          <a:lstStyle/>
+          <a:p>
+            <a:pPr algn="ctr" indent="0" marL="0">
+              <a:buNone/>
+            </a:pPr>
+            <a:r>
+              <a:rPr lang="en-US" sz="1300" dirty="0">
+                <a:solidFill>
+                  <a:srgbClr val="212121"/>
+                </a:solidFill>
+                <a:latin typeface="Arial" pitchFamily="34" charset="0"/>
+                <a:ea typeface="Arial" pitchFamily="34" charset="-122"/>
+                <a:cs typeface="Arial" pitchFamily="34" charset="-120"/>
+              </a:rPr>
+              <a:t>¿Allow explícito en</a:t>
+            </a:r>
+            <a:endParaRPr lang="en-US" sz="1300" dirty="0"/>
+          </a:p>
+          <a:p>
+            <a:pPr algn="ctr" indent="0" marL="0">
+              <a:buNone/>
+            </a:pPr>
+            <a:r>
+              <a:rPr lang="en-US" sz="1300" dirty="0">
+                <a:solidFill>
+                  <a:srgbClr val="212121"/>
+                </a:solidFill>
+                <a:latin typeface="Arial" pitchFamily="34" charset="0"/>
+                <a:ea typeface="Arial" pitchFamily="34" charset="-122"/>
+                <a:cs typeface="Arial" pitchFamily="34" charset="-120"/>
+              </a:rPr>
+              <a:t>alguna política?</a:t>
+            </a:r>
+            <a:endParaRPr lang="en-US" sz="1300" dirty="0"/>
+          </a:p>
+        </p:txBody>
+      </p:sp>
+      <p:sp>
+        <p:nvSpPr>
+          <p:cNvPr id="13" name="Shape 11"/>
+          <p:cNvSpPr/>
+          <p:nvPr/>
+        </p:nvSpPr>
+        <p:spPr>
+          <a:xfrm>
+            <a:off x="7466076" y="2468880"/>
+            <a:ext cx="4174236" cy="777240"/>
+          </a:xfrm>
+          <a:prstGeom prst="roundRect">
+            <a:avLst/>
+          </a:prstGeom>
+          <a:solidFill>
+            <a:srgbClr val="E8EAF6"/>
+          </a:solidFill>
+          <a:ln w="15875">
+            <a:solidFill>
+              <a:srgbClr val="3949AB"/>
+            </a:solidFill>
+            <a:prstDash val="solid"/>
+          </a:ln>
+        </p:spPr>
+      </p:sp>
+      <p:sp>
+        <p:nvSpPr>
+          <p:cNvPr id="14" name="Text 12"/>
+          <p:cNvSpPr/>
+          <p:nvPr/>
+        </p:nvSpPr>
+        <p:spPr>
+          <a:xfrm>
+            <a:off x="7557516" y="2468880"/>
+            <a:ext cx="3991356" cy="777240"/>
+          </a:xfrm>
+          <a:prstGeom prst="rect">
+            <a:avLst/>
+          </a:prstGeom>
+          <a:noFill/>
+          <a:ln/>
+        </p:spPr>
+        <p:txBody>
+          <a:bodyPr wrap="square" rtlCol="0" anchor="ctr"/>
+          <a:lstStyle/>
+          <a:p>
+            <a:pPr algn="ctr" indent="0" marL="0">
+              <a:buNone/>
+            </a:pPr>
+            <a:r>
+              <a:rPr lang="en-US" sz="1300" dirty="0">
+                <a:solidFill>
+                  <a:srgbClr val="212121"/>
+                </a:solidFill>
+                <a:latin typeface="Arial" pitchFamily="34" charset="0"/>
+                <a:ea typeface="Arial" pitchFamily="34" charset="-122"/>
+                <a:cs typeface="Arial" pitchFamily="34" charset="-120"/>
+              </a:rPr>
+              <a:t>✅ Permitido</a:t>
+            </a:r>
+            <a:endParaRPr lang="en-US" sz="1300" dirty="0"/>
+          </a:p>
+        </p:txBody>
+      </p:sp>
+      <p:sp>
+        <p:nvSpPr>
+          <p:cNvPr id="15" name="Text 13"/>
+          <p:cNvSpPr/>
+          <p:nvPr/>
+        </p:nvSpPr>
+        <p:spPr>
+          <a:xfrm>
+            <a:off x="4722876" y="2468880"/>
+            <a:ext cx="2743200" cy="777240"/>
+          </a:xfrm>
+          <a:prstGeom prst="rect">
+            <a:avLst/>
+          </a:prstGeom>
+          <a:noFill/>
+          <a:ln/>
+        </p:spPr>
+        <p:txBody>
+          <a:bodyPr wrap="square" rtlCol="0" anchor="ctr"/>
+          <a:lstStyle/>
+          <a:p>
+            <a:pPr algn="ctr" indent="0" marL="0">
+              <a:buNone/>
+            </a:pPr>
+            <a:r>
+              <a:rPr lang="en-US" sz="1300" b="1" i="1" dirty="0">
+                <a:solidFill>
+                  <a:srgbClr val="3949AB"/>
+                </a:solidFill>
+                <a:latin typeface="Arial" pitchFamily="34" charset="0"/>
+                <a:ea typeface="Arial" pitchFamily="34" charset="-122"/>
+                <a:cs typeface="Arial" pitchFamily="34" charset="-120"/>
+              </a:rPr>
+              <a:t>Sí, y no había Deny →</a:t>
+            </a:r>
+            <a:endParaRPr lang="en-US" sz="1300" dirty="0"/>
+          </a:p>
+        </p:txBody>
+      </p:sp>
+      <p:sp>
+        <p:nvSpPr>
+          <p:cNvPr id="16" name="Shape 14"/>
+          <p:cNvSpPr/>
+          <p:nvPr/>
+        </p:nvSpPr>
+        <p:spPr>
+          <a:xfrm>
+            <a:off x="548640" y="3383280"/>
+            <a:ext cx="4174236" cy="777240"/>
+          </a:xfrm>
+          <a:prstGeom prst="roundRect">
+            <a:avLst/>
+          </a:prstGeom>
+          <a:solidFill>
+            <a:srgbClr val="E8EAF6"/>
+          </a:solidFill>
+          <a:ln w="15875">
+            <a:solidFill>
+              <a:srgbClr val="3949AB"/>
+            </a:solidFill>
+            <a:prstDash val="solid"/>
+          </a:ln>
+        </p:spPr>
+      </p:sp>
+      <p:sp>
+        <p:nvSpPr>
+          <p:cNvPr id="17" name="Text 15"/>
+          <p:cNvSpPr/>
+          <p:nvPr/>
+        </p:nvSpPr>
+        <p:spPr>
+          <a:xfrm>
+            <a:off x="640080" y="3383280"/>
+            <a:ext cx="3991356" cy="777240"/>
+          </a:xfrm>
+          <a:prstGeom prst="rect">
+            <a:avLst/>
+          </a:prstGeom>
+          <a:noFill/>
+          <a:ln/>
+        </p:spPr>
+        <p:txBody>
+          <a:bodyPr wrap="square" rtlCol="0" anchor="ctr"/>
+          <a:lstStyle/>
+          <a:p>
+            <a:pPr algn="ctr" indent="0" marL="0">
+              <a:buNone/>
+            </a:pPr>
+            <a:r>
+              <a:rPr lang="en-US" sz="1400" dirty="0">
+                <a:solidFill>
+                  <a:srgbClr val="212121"/>
+                </a:solidFill>
+                <a:latin typeface="Arial" pitchFamily="34" charset="0"/>
+                <a:ea typeface="Arial" pitchFamily="34" charset="-122"/>
+                <a:cs typeface="Arial" pitchFamily="34" charset="-120"/>
+              </a:rPr>
+              <a:t>Ninguna política</a:t>
+            </a:r>
+            <a:endParaRPr lang="en-US" sz="1400" dirty="0"/>
+          </a:p>
+          <a:p>
+            <a:pPr algn="ctr" indent="0" marL="0">
+              <a:buNone/>
+            </a:pPr>
+            <a:r>
+              <a:rPr lang="en-US" sz="1400" dirty="0">
+                <a:solidFill>
+                  <a:srgbClr val="212121"/>
+                </a:solidFill>
+                <a:latin typeface="Arial" pitchFamily="34" charset="0"/>
+                <a:ea typeface="Arial" pitchFamily="34" charset="-122"/>
+                <a:cs typeface="Arial" pitchFamily="34" charset="-120"/>
+              </a:rPr>
+              <a:t>menciona la acción</a:t>
+            </a:r>
+            <a:endParaRPr lang="en-US" sz="1400" dirty="0"/>
+          </a:p>
+        </p:txBody>
+      </p:sp>
+      <p:sp>
+        <p:nvSpPr>
+          <p:cNvPr id="18" name="Shape 16"/>
+          <p:cNvSpPr/>
+          <p:nvPr/>
+        </p:nvSpPr>
+        <p:spPr>
+          <a:xfrm>
+            <a:off x="7466076" y="3383280"/>
+            <a:ext cx="4174236" cy="777240"/>
+          </a:xfrm>
+          <a:prstGeom prst="roundRect">
+            <a:avLst/>
+          </a:prstGeom>
+          <a:solidFill>
+            <a:srgbClr val="E8EAF6"/>
+          </a:solidFill>
+          <a:ln w="15875">
+            <a:solidFill>
+              <a:srgbClr val="3949AB"/>
+            </a:solidFill>
+            <a:prstDash val="solid"/>
+          </a:ln>
+        </p:spPr>
+      </p:sp>
+      <p:sp>
+        <p:nvSpPr>
+          <p:cNvPr id="19" name="Text 17"/>
+          <p:cNvSpPr/>
+          <p:nvPr/>
+        </p:nvSpPr>
+        <p:spPr>
+          <a:xfrm>
+            <a:off x="7557516" y="3383280"/>
+            <a:ext cx="3991356" cy="777240"/>
+          </a:xfrm>
+          <a:prstGeom prst="rect">
+            <a:avLst/>
+          </a:prstGeom>
+          <a:noFill/>
+          <a:ln/>
+        </p:spPr>
+        <p:txBody>
+          <a:bodyPr wrap="square" rtlCol="0" anchor="ctr"/>
+          <a:lstStyle/>
+          <a:p>
+            <a:pPr algn="ctr" indent="0" marL="0">
+              <a:buNone/>
+            </a:pPr>
+            <a:r>
+              <a:rPr lang="en-US" sz="1400" dirty="0">
+                <a:solidFill>
+                  <a:srgbClr val="212121"/>
+                </a:solidFill>
+                <a:latin typeface="Arial" pitchFamily="34" charset="0"/>
+                <a:ea typeface="Arial" pitchFamily="34" charset="-122"/>
+                <a:cs typeface="Arial" pitchFamily="34" charset="-120"/>
+              </a:rPr>
+              <a:t>❌ Denegado</a:t>
+            </a:r>
+            <a:endParaRPr lang="en-US" sz="1400" dirty="0"/>
+          </a:p>
+          <a:p>
+            <a:pPr algn="ctr" indent="0" marL="0">
+              <a:buNone/>
+            </a:pPr>
+            <a:r>
+              <a:rPr lang="en-US" sz="1400" dirty="0">
+                <a:solidFill>
+                  <a:srgbClr val="212121"/>
+                </a:solidFill>
+                <a:latin typeface="Arial" pitchFamily="34" charset="0"/>
+                <a:ea typeface="Arial" pitchFamily="34" charset="-122"/>
+                <a:cs typeface="Arial" pitchFamily="34" charset="-120"/>
+              </a:rPr>
+              <a:t>por defecto</a:t>
+            </a:r>
+            <a:endParaRPr lang="en-US" sz="1400" dirty="0"/>
+          </a:p>
+        </p:txBody>
+      </p:sp>
+      <p:sp>
+        <p:nvSpPr>
+          <p:cNvPr id="20" name="Text 18"/>
+          <p:cNvSpPr/>
+          <p:nvPr/>
+        </p:nvSpPr>
+        <p:spPr>
+          <a:xfrm>
+            <a:off x="4722876" y="3383280"/>
+            <a:ext cx="2743200" cy="777240"/>
+          </a:xfrm>
+          <a:prstGeom prst="rect">
+            <a:avLst/>
+          </a:prstGeom>
+          <a:noFill/>
+          <a:ln/>
+        </p:spPr>
+        <p:txBody>
+          <a:bodyPr wrap="square" rtlCol="0" anchor="ctr"/>
+          <a:lstStyle/>
+          <a:p>
+            <a:pPr algn="ctr" indent="0" marL="0">
+              <a:buNone/>
+            </a:pPr>
+            <a:r>
+              <a:rPr lang="en-US" sz="1300" b="1" i="1" dirty="0">
+                <a:solidFill>
+                  <a:srgbClr val="3949AB"/>
+                </a:solidFill>
+                <a:latin typeface="Arial" pitchFamily="34" charset="0"/>
+                <a:ea typeface="Arial" pitchFamily="34" charset="-122"/>
+                <a:cs typeface="Arial" pitchFamily="34" charset="-120"/>
+              </a:rPr>
+              <a:t>→</a:t>
+            </a:r>
+            <a:endParaRPr lang="en-US" sz="1300" dirty="0"/>
+          </a:p>
+        </p:txBody>
+      </p:sp>
+      <p:sp>
+        <p:nvSpPr>
+          <p:cNvPr id="21" name="Shape 19"/>
+          <p:cNvSpPr/>
+          <p:nvPr/>
+        </p:nvSpPr>
+        <p:spPr>
+          <a:xfrm>
+            <a:off x="548640" y="4343400"/>
+            <a:ext cx="11091672" cy="1051560"/>
           </a:xfrm>
           <a:prstGeom prst="roundRect">
             <a:avLst/>
@@ -8097,24 +9127,17 @@
             <a:prstDash val="solid"/>
           </a:ln>
         </p:spPr>
-        <p:txBody>
-          <a:bodyPr/>
-          <a:lstStyle/>
-          <a:p>
-            <a:endParaRPr lang="es-ES"/>
-          </a:p>
-        </p:txBody>
-      </p:sp>
-      <p:sp>
-        <p:nvSpPr>
-          <p:cNvPr id="7" name="Text 5"/>
-          <p:cNvSpPr/>
-          <p:nvPr/>
-        </p:nvSpPr>
-        <p:spPr>
-          <a:xfrm>
-            <a:off x="822960" y="3017520"/>
-            <a:ext cx="10543032" cy="1280160"/>
+      </p:sp>
+      <p:sp>
+        <p:nvSpPr>
+          <p:cNvPr id="22" name="Text 20"/>
+          <p:cNvSpPr/>
+          <p:nvPr/>
+        </p:nvSpPr>
+        <p:spPr>
+          <a:xfrm>
+            <a:off x="822960" y="4434840"/>
+            <a:ext cx="10543032" cy="868680"/>
           </a:xfrm>
           <a:prstGeom prst="rect">
             <a:avLst/>
@@ -8126,11 +9149,11 @@
           <a:bodyPr wrap="square" rtlCol="0" anchor="ctr"/>
           <a:lstStyle/>
           <a:p>
-            <a:pPr marL="0" indent="0">
-              <a:buNone/>
-            </a:pPr>
-            <a:r>
-              <a:rPr lang="en-US" sz="1800" dirty="0">
+            <a:pPr indent="0" marL="0">
+              <a:buNone/>
+            </a:pPr>
+            <a:r>
+              <a:rPr lang="en-US" sz="1500" dirty="0">
                 <a:solidFill>
                   <a:srgbClr val="212121"/>
                 </a:solidFill>
@@ -8138,9 +9161,9 @@
                 <a:ea typeface="Arial" pitchFamily="34" charset="-122"/>
                 <a:cs typeface="Arial" pitchFamily="34" charset="-120"/>
               </a:rPr>
-              <a:t>Con la política del ejemplo: s3:GetObject sobre un objeto del bucket → Permitido. s3:DeleteObject sobre ese mismo objeto → Denegado, porque la política nunca menciona esa acción. Vas a hacer esta comprobación con la política real de tu rol en la Actividad 5.2.</a:t>
-            </a:r>
-            <a:endParaRPr lang="en-US" sz="1800" dirty="0"/>
+              <a:t>Un Deny explícito gana siempre, aunque otra política diga Allow. Si ninguna política menciona una acción, queda denegada por defecto, nunca permitida «por si acaso».</a:t>
+            </a:r>
+            <a:endParaRPr lang="en-US" sz="1500" dirty="0"/>
           </a:p>
         </p:txBody>
       </p:sp>
@@ -8193,13 +9216,6 @@
             <a:prstDash val="solid"/>
           </a:ln>
         </p:spPr>
-        <p:txBody>
-          <a:bodyPr/>
-          <a:lstStyle/>
-          <a:p>
-            <a:endParaRPr lang="es-ES"/>
-          </a:p>
-        </p:txBody>
       </p:sp>
       <p:sp>
         <p:nvSpPr>
@@ -8222,7 +9238,7 @@
           <a:bodyPr wrap="square" rtlCol="0" anchor="ctr"/>
           <a:lstStyle/>
           <a:p>
-            <a:pPr marL="0" indent="0">
+            <a:pPr indent="0" marL="0">
               <a:buNone/>
             </a:pPr>
             <a:r>
@@ -8234,7 +9250,7 @@
                 <a:ea typeface="Arial" pitchFamily="34" charset="-122"/>
                 <a:cs typeface="Arial" pitchFamily="34" charset="-120"/>
               </a:rPr>
-              <a:t>Cómo se evalúa una política: quién gana</a:t>
+              <a:t>Principio de mínimo privilegio y MFA</a:t>
             </a:r>
             <a:endParaRPr lang="en-US" sz="2400" dirty="0"/>
           </a:p>
@@ -8261,7 +9277,7 @@
           <a:bodyPr wrap="square" rtlCol="0" anchor="ctr"/>
           <a:lstStyle/>
           <a:p>
-            <a:pPr marL="0" indent="0" algn="r">
+            <a:pPr algn="r" indent="0" marL="0">
               <a:buNone/>
             </a:pPr>
             <a:r>
@@ -8281,14 +9297,39 @@
       </p:sp>
       <p:sp>
         <p:nvSpPr>
-          <p:cNvPr id="5" name="Text 3"/>
-          <p:cNvSpPr/>
-          <p:nvPr/>
-        </p:nvSpPr>
-        <p:spPr>
-          <a:xfrm>
-            <a:off x="548640" y="1097280"/>
-            <a:ext cx="11091672" cy="640080"/>
+          <p:cNvPr id="5" name="Shape 3"/>
+          <p:cNvSpPr/>
+          <p:nvPr/>
+        </p:nvSpPr>
+        <p:spPr>
+          <a:xfrm>
+            <a:off x="548640" y="1280160"/>
+            <a:ext cx="4174236" cy="777240"/>
+          </a:xfrm>
+          <a:prstGeom prst="roundRect">
+            <a:avLst/>
+          </a:prstGeom>
+          <a:solidFill>
+            <a:srgbClr val="E8EAF6"/>
+          </a:solidFill>
+          <a:ln w="15875">
+            <a:solidFill>
+              <a:srgbClr val="3949AB"/>
+            </a:solidFill>
+            <a:prstDash val="solid"/>
+          </a:ln>
+        </p:spPr>
+      </p:sp>
+      <p:sp>
+        <p:nvSpPr>
+          <p:cNvPr id="6" name="Text 4"/>
+          <p:cNvSpPr/>
+          <p:nvPr/>
+        </p:nvSpPr>
+        <p:spPr>
+          <a:xfrm>
+            <a:off x="640080" y="1280160"/>
+            <a:ext cx="3991356" cy="777240"/>
           </a:xfrm>
           <a:prstGeom prst="rect">
             <a:avLst/>
@@ -8297,14 +9338,417 @@
           <a:ln/>
         </p:spPr>
         <p:txBody>
+          <a:bodyPr wrap="square" rtlCol="0" anchor="ctr"/>
+          <a:lstStyle/>
+          <a:p>
+            <a:pPr algn="ctr" indent="0" marL="0">
+              <a:buNone/>
+            </a:pPr>
+            <a:r>
+              <a:rPr lang="en-US" sz="1400" dirty="0">
+                <a:solidFill>
+                  <a:srgbClr val="212121"/>
+                </a:solidFill>
+                <a:latin typeface="Arial" pitchFamily="34" charset="0"/>
+                <a:ea typeface="Arial" pitchFamily="34" charset="-122"/>
+                <a:cs typeface="Arial" pitchFamily="34" charset="-120"/>
+              </a:rPr>
+              <a:t>🔓 Permisos amplios</a:t>
+            </a:r>
+            <a:endParaRPr lang="en-US" sz="1400" dirty="0"/>
+          </a:p>
+          <a:p>
+            <a:pPr algn="ctr" indent="0" marL="0">
+              <a:buNone/>
+            </a:pPr>
+            <a:r>
+              <a:rPr lang="en-US" sz="1400" dirty="0">
+                <a:solidFill>
+                  <a:srgbClr val="212121"/>
+                </a:solidFill>
+                <a:latin typeface="Arial" pitchFamily="34" charset="0"/>
+                <a:ea typeface="Arial" pitchFamily="34" charset="-122"/>
+                <a:cs typeface="Arial" pitchFamily="34" charset="-120"/>
+              </a:rPr>
+              <a:t>«por si acaso»</a:t>
+            </a:r>
+            <a:endParaRPr lang="en-US" sz="1400" dirty="0"/>
+          </a:p>
+        </p:txBody>
+      </p:sp>
+      <p:sp>
+        <p:nvSpPr>
+          <p:cNvPr id="7" name="Shape 5"/>
+          <p:cNvSpPr/>
+          <p:nvPr/>
+        </p:nvSpPr>
+        <p:spPr>
+          <a:xfrm>
+            <a:off x="7466076" y="1280160"/>
+            <a:ext cx="4174236" cy="777240"/>
+          </a:xfrm>
+          <a:prstGeom prst="roundRect">
+            <a:avLst/>
+          </a:prstGeom>
+          <a:solidFill>
+            <a:srgbClr val="E8EAF6"/>
+          </a:solidFill>
+          <a:ln w="15875">
+            <a:solidFill>
+              <a:srgbClr val="3949AB"/>
+            </a:solidFill>
+            <a:prstDash val="solid"/>
+          </a:ln>
+        </p:spPr>
+      </p:sp>
+      <p:sp>
+        <p:nvSpPr>
+          <p:cNvPr id="8" name="Text 6"/>
+          <p:cNvSpPr/>
+          <p:nvPr/>
+        </p:nvSpPr>
+        <p:spPr>
+          <a:xfrm>
+            <a:off x="7557516" y="1280160"/>
+            <a:ext cx="3991356" cy="777240"/>
+          </a:xfrm>
+          <a:prstGeom prst="rect">
+            <a:avLst/>
+          </a:prstGeom>
+          <a:noFill/>
+          <a:ln/>
+        </p:spPr>
+        <p:txBody>
+          <a:bodyPr wrap="square" rtlCol="0" anchor="ctr"/>
+          <a:lstStyle/>
+          <a:p>
+            <a:pPr algn="ctr" indent="0" marL="0">
+              <a:buNone/>
+            </a:pPr>
+            <a:r>
+              <a:rPr lang="en-US" sz="1400" dirty="0">
+                <a:solidFill>
+                  <a:srgbClr val="212121"/>
+                </a:solidFill>
+                <a:latin typeface="Arial" pitchFamily="34" charset="0"/>
+                <a:ea typeface="Arial" pitchFamily="34" charset="-122"/>
+                <a:cs typeface="Arial" pitchFamily="34" charset="-120"/>
+              </a:rPr>
+              <a:t>⚠️ Un fallo tiene</a:t>
+            </a:r>
+            <a:endParaRPr lang="en-US" sz="1400" dirty="0"/>
+          </a:p>
+          <a:p>
+            <a:pPr algn="ctr" indent="0" marL="0">
+              <a:buNone/>
+            </a:pPr>
+            <a:r>
+              <a:rPr lang="en-US" sz="1400" dirty="0">
+                <a:solidFill>
+                  <a:srgbClr val="212121"/>
+                </a:solidFill>
+                <a:latin typeface="Arial" pitchFamily="34" charset="0"/>
+                <a:ea typeface="Arial" pitchFamily="34" charset="-122"/>
+                <a:cs typeface="Arial" pitchFamily="34" charset="-120"/>
+              </a:rPr>
+              <a:t>alcance mucho mayor</a:t>
+            </a:r>
+            <a:endParaRPr lang="en-US" sz="1400" dirty="0"/>
+          </a:p>
+        </p:txBody>
+      </p:sp>
+      <p:sp>
+        <p:nvSpPr>
+          <p:cNvPr id="9" name="Text 7"/>
+          <p:cNvSpPr/>
+          <p:nvPr/>
+        </p:nvSpPr>
+        <p:spPr>
+          <a:xfrm>
+            <a:off x="4722876" y="1280160"/>
+            <a:ext cx="2743200" cy="777240"/>
+          </a:xfrm>
+          <a:prstGeom prst="rect">
+            <a:avLst/>
+          </a:prstGeom>
+          <a:noFill/>
+          <a:ln/>
+        </p:spPr>
+        <p:txBody>
+          <a:bodyPr wrap="square" rtlCol="0" anchor="ctr"/>
+          <a:lstStyle/>
+          <a:p>
+            <a:pPr algn="ctr" indent="0" marL="0">
+              <a:buNone/>
+            </a:pPr>
+            <a:r>
+              <a:rPr lang="en-US" sz="1300" b="1" i="1" dirty="0">
+                <a:solidFill>
+                  <a:srgbClr val="3949AB"/>
+                </a:solidFill>
+                <a:latin typeface="Arial" pitchFamily="34" charset="0"/>
+                <a:ea typeface="Arial" pitchFamily="34" charset="-122"/>
+                <a:cs typeface="Arial" pitchFamily="34" charset="-120"/>
+              </a:rPr>
+              <a:t>→</a:t>
+            </a:r>
+            <a:endParaRPr lang="en-US" sz="1300" dirty="0"/>
+          </a:p>
+        </p:txBody>
+      </p:sp>
+      <p:sp>
+        <p:nvSpPr>
+          <p:cNvPr id="10" name="Shape 8"/>
+          <p:cNvSpPr/>
+          <p:nvPr/>
+        </p:nvSpPr>
+        <p:spPr>
+          <a:xfrm>
+            <a:off x="548640" y="2194560"/>
+            <a:ext cx="4174236" cy="777240"/>
+          </a:xfrm>
+          <a:prstGeom prst="roundRect">
+            <a:avLst/>
+          </a:prstGeom>
+          <a:solidFill>
+            <a:srgbClr val="E8EAF6"/>
+          </a:solidFill>
+          <a:ln w="15875">
+            <a:solidFill>
+              <a:srgbClr val="3949AB"/>
+            </a:solidFill>
+            <a:prstDash val="solid"/>
+          </a:ln>
+        </p:spPr>
+      </p:sp>
+      <p:sp>
+        <p:nvSpPr>
+          <p:cNvPr id="11" name="Text 9"/>
+          <p:cNvSpPr/>
+          <p:nvPr/>
+        </p:nvSpPr>
+        <p:spPr>
+          <a:xfrm>
+            <a:off x="640080" y="2194560"/>
+            <a:ext cx="3991356" cy="777240"/>
+          </a:xfrm>
+          <a:prstGeom prst="rect">
+            <a:avLst/>
+          </a:prstGeom>
+          <a:noFill/>
+          <a:ln/>
+        </p:spPr>
+        <p:txBody>
+          <a:bodyPr wrap="square" rtlCol="0" anchor="ctr"/>
+          <a:lstStyle/>
+          <a:p>
+            <a:pPr algn="ctr" indent="0" marL="0">
+              <a:buNone/>
+            </a:pPr>
+            <a:r>
+              <a:rPr lang="en-US" sz="1400" dirty="0">
+                <a:solidFill>
+                  <a:srgbClr val="212121"/>
+                </a:solidFill>
+                <a:latin typeface="Arial" pitchFamily="34" charset="0"/>
+                <a:ea typeface="Arial" pitchFamily="34" charset="-122"/>
+                <a:cs typeface="Arial" pitchFamily="34" charset="-120"/>
+              </a:rPr>
+              <a:t>🔒 Mínimo privilegio</a:t>
+            </a:r>
+            <a:endParaRPr lang="en-US" sz="1400" dirty="0"/>
+          </a:p>
+        </p:txBody>
+      </p:sp>
+      <p:sp>
+        <p:nvSpPr>
+          <p:cNvPr id="12" name="Shape 10"/>
+          <p:cNvSpPr/>
+          <p:nvPr/>
+        </p:nvSpPr>
+        <p:spPr>
+          <a:xfrm>
+            <a:off x="7466076" y="2194560"/>
+            <a:ext cx="4174236" cy="777240"/>
+          </a:xfrm>
+          <a:prstGeom prst="roundRect">
+            <a:avLst/>
+          </a:prstGeom>
+          <a:solidFill>
+            <a:srgbClr val="E8EAF6"/>
+          </a:solidFill>
+          <a:ln w="15875">
+            <a:solidFill>
+              <a:srgbClr val="3949AB"/>
+            </a:solidFill>
+            <a:prstDash val="solid"/>
+          </a:ln>
+        </p:spPr>
+      </p:sp>
+      <p:sp>
+        <p:nvSpPr>
+          <p:cNvPr id="13" name="Text 11"/>
+          <p:cNvSpPr/>
+          <p:nvPr/>
+        </p:nvSpPr>
+        <p:spPr>
+          <a:xfrm>
+            <a:off x="7557516" y="2194560"/>
+            <a:ext cx="3991356" cy="777240"/>
+          </a:xfrm>
+          <a:prstGeom prst="rect">
+            <a:avLst/>
+          </a:prstGeom>
+          <a:noFill/>
+          <a:ln/>
+        </p:spPr>
+        <p:txBody>
+          <a:bodyPr wrap="square" rtlCol="0" anchor="ctr"/>
+          <a:lstStyle/>
+          <a:p>
+            <a:pPr algn="ctr" indent="0" marL="0">
+              <a:buNone/>
+            </a:pPr>
+            <a:r>
+              <a:rPr lang="en-US" sz="1400" dirty="0">
+                <a:solidFill>
+                  <a:srgbClr val="212121"/>
+                </a:solidFill>
+                <a:latin typeface="Arial" pitchFamily="34" charset="0"/>
+                <a:ea typeface="Arial" pitchFamily="34" charset="-122"/>
+                <a:cs typeface="Arial" pitchFamily="34" charset="-120"/>
+              </a:rPr>
+              <a:t>✅ Un fallo queda</a:t>
+            </a:r>
+            <a:endParaRPr lang="en-US" sz="1400" dirty="0"/>
+          </a:p>
+          <a:p>
+            <a:pPr algn="ctr" indent="0" marL="0">
+              <a:buNone/>
+            </a:pPr>
+            <a:r>
+              <a:rPr lang="en-US" sz="1400" dirty="0">
+                <a:solidFill>
+                  <a:srgbClr val="212121"/>
+                </a:solidFill>
+                <a:latin typeface="Arial" pitchFamily="34" charset="0"/>
+                <a:ea typeface="Arial" pitchFamily="34" charset="-122"/>
+                <a:cs typeface="Arial" pitchFamily="34" charset="-120"/>
+              </a:rPr>
+              <a:t>contenido</a:t>
+            </a:r>
+            <a:endParaRPr lang="en-US" sz="1400" dirty="0"/>
+          </a:p>
+        </p:txBody>
+      </p:sp>
+      <p:sp>
+        <p:nvSpPr>
+          <p:cNvPr id="14" name="Text 12"/>
+          <p:cNvSpPr/>
+          <p:nvPr/>
+        </p:nvSpPr>
+        <p:spPr>
+          <a:xfrm>
+            <a:off x="4722876" y="2194560"/>
+            <a:ext cx="2743200" cy="777240"/>
+          </a:xfrm>
+          <a:prstGeom prst="rect">
+            <a:avLst/>
+          </a:prstGeom>
+          <a:noFill/>
+          <a:ln/>
+        </p:spPr>
+        <p:txBody>
+          <a:bodyPr wrap="square" rtlCol="0" anchor="ctr"/>
+          <a:lstStyle/>
+          <a:p>
+            <a:pPr algn="ctr" indent="0" marL="0">
+              <a:buNone/>
+            </a:pPr>
+            <a:r>
+              <a:rPr lang="en-US" sz="1300" b="1" i="1" dirty="0">
+                <a:solidFill>
+                  <a:srgbClr val="3949AB"/>
+                </a:solidFill>
+                <a:latin typeface="Arial" pitchFamily="34" charset="0"/>
+                <a:ea typeface="Arial" pitchFamily="34" charset="-122"/>
+                <a:cs typeface="Arial" pitchFamily="34" charset="-120"/>
+              </a:rPr>
+              <a:t>→</a:t>
+            </a:r>
+            <a:endParaRPr lang="en-US" sz="1300" dirty="0"/>
+          </a:p>
+        </p:txBody>
+      </p:sp>
+      <p:sp>
+        <p:nvSpPr>
+          <p:cNvPr id="15" name="Shape 13"/>
+          <p:cNvSpPr/>
+          <p:nvPr/>
+        </p:nvSpPr>
+        <p:spPr>
+          <a:xfrm>
+            <a:off x="548640" y="3108960"/>
+            <a:ext cx="11091672" cy="1143000"/>
+          </a:xfrm>
+          <a:prstGeom prst="roundRect">
+            <a:avLst/>
+          </a:prstGeom>
+          <a:solidFill>
+            <a:srgbClr val="FFF8E1"/>
+          </a:solidFill>
+          <a:ln w="28575">
+            <a:solidFill>
+              <a:srgbClr val="FFA000"/>
+            </a:solidFill>
+            <a:prstDash val="solid"/>
+          </a:ln>
+        </p:spPr>
+      </p:sp>
+      <p:sp>
+        <p:nvSpPr>
+          <p:cNvPr id="16" name="Text 14"/>
+          <p:cNvSpPr/>
+          <p:nvPr/>
+        </p:nvSpPr>
+        <p:spPr>
+          <a:xfrm>
+            <a:off x="822960" y="3218688"/>
+            <a:ext cx="10543032" cy="923544"/>
+          </a:xfrm>
+          <a:prstGeom prst="rect">
+            <a:avLst/>
+          </a:prstGeom>
+          <a:noFill/>
+          <a:ln/>
+        </p:spPr>
+        <p:txBody>
           <a:bodyPr wrap="square" rtlCol="0" anchor="t"/>
           <a:lstStyle/>
           <a:p>
-            <a:pPr marL="0" indent="0">
-              <a:buNone/>
-            </a:pPr>
-            <a:r>
-              <a:rPr lang="en-US" sz="1700" dirty="0">
+            <a:pPr indent="0" marL="0">
+              <a:buNone/>
+            </a:pPr>
+            <a:r>
+              <a:rPr lang="en-US" sz="1500" b="1" dirty="0">
+                <a:solidFill>
+                  <a:srgbClr val="1A237E"/>
+                </a:solidFill>
+                <a:latin typeface="Arial" pitchFamily="34" charset="0"/>
+                <a:ea typeface="Arial" pitchFamily="34" charset="-122"/>
+                <a:cs typeface="Arial" pitchFamily="34" charset="-120"/>
+              </a:rPr>
+              <a:t>Un comodín de más es el error más común
+</a:t>
+            </a:r>
+            <a:endParaRPr lang="en-US" sz="1500" dirty="0"/>
+          </a:p>
+          <a:p>
+            <a:pPr indent="0" marL="0">
+              <a:buNone/>
+            </a:pPr>
+            <a:r>
+              <a:rPr lang="en-US" sz="1400" dirty="0">
                 <a:solidFill>
                   <a:srgbClr val="212121"/>
                 </a:solidFill>
@@ -8312,36 +9756,115 @@
                 <a:ea typeface="Arial" pitchFamily="34" charset="-122"/>
                 <a:cs typeface="Arial" pitchFamily="34" charset="-120"/>
               </a:rPr>
-              <a:t>Casi nunca hay una sola política de por medio. El resultado no se decide sumando políticas: se decide con un orden fijo, siempre el mismo.</a:t>
+              <a:t>Una política con "Action": "s3:*" en vez de "s3:GetObject" da permiso para borrar y cambiar todo el almacenamiento, cuando quizás solo hacía falta leer.</a:t>
+            </a:r>
+            <a:endParaRPr lang="en-US" sz="1500" dirty="0"/>
+          </a:p>
+        </p:txBody>
+      </p:sp>
+      <p:sp>
+        <p:nvSpPr>
+          <p:cNvPr id="17" name="Shape 15"/>
+          <p:cNvSpPr/>
+          <p:nvPr/>
+        </p:nvSpPr>
+        <p:spPr>
+          <a:xfrm>
+            <a:off x="548640" y="4389120"/>
+            <a:ext cx="11091672" cy="1371600"/>
+          </a:xfrm>
+          <a:prstGeom prst="roundRect">
+            <a:avLst/>
+          </a:prstGeom>
+          <a:solidFill>
+            <a:srgbClr val="E8EAF6"/>
+          </a:solidFill>
+          <a:ln w="15875">
+            <a:solidFill>
+              <a:srgbClr val="3949AB"/>
+            </a:solidFill>
+            <a:prstDash val="solid"/>
+          </a:ln>
+        </p:spPr>
+      </p:sp>
+      <p:sp>
+        <p:nvSpPr>
+          <p:cNvPr id="18" name="Text 16"/>
+          <p:cNvSpPr/>
+          <p:nvPr/>
+        </p:nvSpPr>
+        <p:spPr>
+          <a:xfrm>
+            <a:off x="731520" y="4462272"/>
+            <a:ext cx="10725912" cy="548640"/>
+          </a:xfrm>
+          <a:prstGeom prst="rect">
+            <a:avLst/>
+          </a:prstGeom>
+          <a:noFill/>
+          <a:ln/>
+        </p:spPr>
+        <p:txBody>
+          <a:bodyPr wrap="square" rtlCol="0" anchor="ctr"/>
+          <a:lstStyle/>
+          <a:p>
+            <a:pPr indent="0" marL="0">
+              <a:buNone/>
+            </a:pPr>
+            <a:r>
+              <a:rPr lang="en-US" sz="1700" b="1" dirty="0">
+                <a:solidFill>
+                  <a:srgbClr val="1A237E"/>
+                </a:solidFill>
+                <a:latin typeface="Arial" pitchFamily="34" charset="0"/>
+                <a:ea typeface="Arial" pitchFamily="34" charset="-122"/>
+                <a:cs typeface="Arial" pitchFamily="34" charset="-120"/>
+              </a:rPr>
+              <a:t>MFA: una segunda prueba de identidad</a:t>
             </a:r>
             <a:endParaRPr lang="en-US" sz="1700" dirty="0"/>
           </a:p>
         </p:txBody>
       </p:sp>
-      <p:pic>
-        <p:nvPicPr>
-          <p:cNvPr id="6" name="Image 0" descr="C:/Users/Aitor/docxgen/img/inu_t5_orden_evaluacion.png"/>
-          <p:cNvPicPr>
-            <a:picLocks noChangeAspect="1"/>
-          </p:cNvPicPr>
-          <p:nvPr/>
-        </p:nvPicPr>
-        <p:blipFill>
-          <a:blip r:embed="rId3"/>
-          <a:stretch>
-            <a:fillRect/>
-          </a:stretch>
-        </p:blipFill>
-        <p:spPr>
-          <a:xfrm>
-            <a:off x="2831479" y="1657395"/>
-            <a:ext cx="7779688" cy="4696751"/>
-          </a:xfrm>
-          <a:prstGeom prst="rect">
-            <a:avLst/>
-          </a:prstGeom>
-        </p:spPr>
-      </p:pic>
+      <p:sp>
+        <p:nvSpPr>
+          <p:cNvPr id="19" name="Text 17"/>
+          <p:cNvSpPr/>
+          <p:nvPr/>
+        </p:nvSpPr>
+        <p:spPr>
+          <a:xfrm>
+            <a:off x="731520" y="5010912"/>
+            <a:ext cx="10725912" cy="676656"/>
+          </a:xfrm>
+          <a:prstGeom prst="rect">
+            <a:avLst/>
+          </a:prstGeom>
+          <a:noFill/>
+          <a:ln/>
+        </p:spPr>
+        <p:txBody>
+          <a:bodyPr wrap="square" rtlCol="0" anchor="t"/>
+          <a:lstStyle/>
+          <a:p>
+            <a:pPr indent="0" marL="0">
+              <a:buNone/>
+            </a:pPr>
+            <a:r>
+              <a:rPr lang="en-US" sz="1450" dirty="0">
+                <a:solidFill>
+                  <a:srgbClr val="212121"/>
+                </a:solidFill>
+                <a:latin typeface="Arial" pitchFamily="34" charset="0"/>
+                <a:ea typeface="Arial" pitchFamily="34" charset="-122"/>
+                <a:cs typeface="Arial" pitchFamily="34" charset="-120"/>
+              </a:rPr>
+              <a:t>Un código temporal, además de la contraseña, para operaciones sensibles. En el Learner Lab no lo configuras tú, pero en una cuenta real protege contra una contraseña filtrada.</a:t>
+            </a:r>
+            <a:endParaRPr lang="en-US" sz="1450" dirty="0"/>
+          </a:p>
+        </p:txBody>
+      </p:sp>
     </p:spTree>
   </p:cSld>
   <p:clrMapOvr>
@@ -8643,319 +10166,4 @@
     </a:ext>
   </a:extLst>
 </a:theme>
-</file>
-
-<file path=ppt/theme/theme2.xml><?xml version="1.0" encoding="utf-8"?>
-<a:theme xmlns:a="http://schemas.openxmlformats.org/drawingml/2006/main" name="Tema de Office">
-  <a:themeElements>
-    <a:clrScheme name="Office">
-      <a:dk1>
-        <a:sysClr val="windowText" lastClr="000000"/>
-      </a:dk1>
-      <a:lt1>
-        <a:sysClr val="window" lastClr="FFFFFF"/>
-      </a:lt1>
-      <a:dk2>
-        <a:srgbClr val="0E2841"/>
-      </a:dk2>
-      <a:lt2>
-        <a:srgbClr val="E8E8E8"/>
-      </a:lt2>
-      <a:accent1>
-        <a:srgbClr val="156082"/>
-      </a:accent1>
-      <a:accent2>
-        <a:srgbClr val="E97132"/>
-      </a:accent2>
-      <a:accent3>
-        <a:srgbClr val="196B24"/>
-      </a:accent3>
-      <a:accent4>
-        <a:srgbClr val="0F9ED5"/>
-      </a:accent4>
-      <a:accent5>
-        <a:srgbClr val="A02B93"/>
-      </a:accent5>
-      <a:accent6>
-        <a:srgbClr val="4EA72E"/>
-      </a:accent6>
-      <a:hlink>
-        <a:srgbClr val="467886"/>
-      </a:hlink>
-      <a:folHlink>
-        <a:srgbClr val="96607D"/>
-      </a:folHlink>
-    </a:clrScheme>
-    <a:fontScheme name="Office">
-      <a:majorFont>
-        <a:latin typeface="Aptos Display" panose="02110004020202020204"/>
-        <a:ea typeface=""/>
-        <a:cs typeface=""/>
-        <a:font script="Jpan" typeface="游ゴシック Light"/>
-        <a:font script="Hang" typeface="맑은 고딕"/>
-        <a:font script="Hans" typeface="等线 Light"/>
-        <a:font script="Hant" typeface="新細明體"/>
-        <a:font script="Arab" typeface="Times New Roman"/>
-        <a:font script="Hebr" typeface="Times New Roman"/>
-        <a:font script="Thai" typeface="Angsana New"/>
-        <a:font script="Ethi" typeface="Nyala"/>
-        <a:font script="Beng" typeface="Vrinda"/>
-        <a:font script="Gujr" typeface="Shruti"/>
-        <a:font script="Khmr" typeface="MoolBoran"/>
-        <a:font script="Knda" typeface="Tunga"/>
-        <a:font script="Guru" typeface="Raavi"/>
-        <a:font script="Cans" typeface="Euphemia"/>
-        <a:font script="Cher" typeface="Plantagenet Cherokee"/>
-        <a:font script="Yiii" typeface="Microsoft Yi Baiti"/>
-        <a:font script="Tibt" typeface="Microsoft Himalaya"/>
-        <a:font script="Thaa" typeface="MV Boli"/>
-        <a:font script="Deva" typeface="Mangal"/>
-        <a:font script="Telu" typeface="Gautami"/>
-        <a:font script="Taml" typeface="Latha"/>
-        <a:font script="Syrc" typeface="Estrangelo Edessa"/>
-        <a:font script="Orya" typeface="Kalinga"/>
-        <a:font script="Mlym" typeface="Kartika"/>
-        <a:font script="Laoo" typeface="DokChampa"/>
-        <a:font script="Sinh" typeface="Iskoola Pota"/>
-        <a:font script="Mong" typeface="Mongolian Baiti"/>
-        <a:font script="Viet" typeface="Times New Roman"/>
-        <a:font script="Uigh" typeface="Microsoft Uighur"/>
-        <a:font script="Geor" typeface="Sylfaen"/>
-        <a:font script="Armn" typeface="Arial"/>
-        <a:font script="Bugi" typeface="Leelawadee UI"/>
-        <a:font script="Bopo" typeface="Microsoft JhengHei"/>
-        <a:font script="Java" typeface="Javanese Text"/>
-        <a:font script="Lisu" typeface="Segoe UI"/>
-        <a:font script="Mymr" typeface="Myanmar Text"/>
-        <a:font script="Nkoo" typeface="Ebrima"/>
-        <a:font script="Olck" typeface="Nirmala UI"/>
-        <a:font script="Osma" typeface="Ebrima"/>
-        <a:font script="Phag" typeface="Phagspa"/>
-        <a:font script="Syrn" typeface="Estrangelo Edessa"/>
-        <a:font script="Syrj" typeface="Estrangelo Edessa"/>
-        <a:font script="Syre" typeface="Estrangelo Edessa"/>
-        <a:font script="Sora" typeface="Nirmala UI"/>
-        <a:font script="Tale" typeface="Microsoft Tai Le"/>
-        <a:font script="Talu" typeface="Microsoft New Tai Lue"/>
-        <a:font script="Tfng" typeface="Ebrima"/>
-      </a:majorFont>
-      <a:minorFont>
-        <a:latin typeface="Aptos" panose="02110004020202020204"/>
-        <a:ea typeface=""/>
-        <a:cs typeface=""/>
-        <a:font script="Jpan" typeface="游ゴシック"/>
-        <a:font script="Hang" typeface="맑은 고딕"/>
-        <a:font script="Hans" typeface="等线"/>
-        <a:font script="Hant" typeface="新細明體"/>
-        <a:font script="Arab" typeface="Arial"/>
-        <a:font script="Hebr" typeface="Arial"/>
-        <a:font script="Thai" typeface="Cordia New"/>
-        <a:font script="Ethi" typeface="Nyala"/>
-        <a:font script="Beng" typeface="Vrinda"/>
-        <a:font script="Gujr" typeface="Shruti"/>
-        <a:font script="Khmr" typeface="DaunPenh"/>
-        <a:font script="Knda" typeface="Tunga"/>
-        <a:font script="Guru" typeface="Raavi"/>
-        <a:font script="Cans" typeface="Euphemia"/>
-        <a:font script="Cher" typeface="Plantagenet Cherokee"/>
-        <a:font script="Yiii" typeface="Microsoft Yi Baiti"/>
-        <a:font script="Tibt" typeface="Microsoft Himalaya"/>
-        <a:font script="Thaa" typeface="MV Boli"/>
-        <a:font script="Deva" typeface="Mangal"/>
-        <a:font script="Telu" typeface="Gautami"/>
-        <a:font script="Taml" typeface="Latha"/>
-        <a:font script="Syrc" typeface="Estrangelo Edessa"/>
-        <a:font script="Orya" typeface="Kalinga"/>
-        <a:font script="Mlym" typeface="Kartika"/>
-        <a:font script="Laoo" typeface="DokChampa"/>
-        <a:font script="Sinh" typeface="Iskoola Pota"/>
-        <a:font script="Mong" typeface="Mongolian Baiti"/>
-        <a:font script="Viet" typeface="Arial"/>
-        <a:font script="Uigh" typeface="Microsoft Uighur"/>
-        <a:font script="Geor" typeface="Sylfaen"/>
-        <a:font script="Armn" typeface="Arial"/>
-        <a:font script="Bugi" typeface="Leelawadee UI"/>
-        <a:font script="Bopo" typeface="Microsoft JhengHei"/>
-        <a:font script="Java" typeface="Javanese Text"/>
-        <a:font script="Lisu" typeface="Segoe UI"/>
-        <a:font script="Mymr" typeface="Myanmar Text"/>
-        <a:font script="Nkoo" typeface="Ebrima"/>
-        <a:font script="Olck" typeface="Nirmala UI"/>
-        <a:font script="Osma" typeface="Ebrima"/>
-        <a:font script="Phag" typeface="Phagspa"/>
-        <a:font script="Syrn" typeface="Estrangelo Edessa"/>
-        <a:font script="Syrj" typeface="Estrangelo Edessa"/>
-        <a:font script="Syre" typeface="Estrangelo Edessa"/>
-        <a:font script="Sora" typeface="Nirmala UI"/>
-        <a:font script="Tale" typeface="Microsoft Tai Le"/>
-        <a:font script="Talu" typeface="Microsoft New Tai Lue"/>
-        <a:font script="Tfng" typeface="Ebrima"/>
-      </a:minorFont>
-    </a:fontScheme>
-    <a:fmtScheme name="Office">
-      <a:fillStyleLst>
-        <a:solidFill>
-          <a:schemeClr val="phClr"/>
-        </a:solidFill>
-        <a:gradFill rotWithShape="1">
-          <a:gsLst>
-            <a:gs pos="0">
-              <a:schemeClr val="phClr">
-                <a:lumMod val="110000"/>
-                <a:satMod val="105000"/>
-                <a:tint val="67000"/>
-              </a:schemeClr>
-            </a:gs>
-            <a:gs pos="50000">
-              <a:schemeClr val="phClr">
-                <a:lumMod val="105000"/>
-                <a:satMod val="103000"/>
-                <a:tint val="73000"/>
-              </a:schemeClr>
-            </a:gs>
-            <a:gs pos="100000">
-              <a:schemeClr val="phClr">
-                <a:lumMod val="105000"/>
-                <a:satMod val="109000"/>
-                <a:tint val="81000"/>
-              </a:schemeClr>
-            </a:gs>
-          </a:gsLst>
-          <a:lin ang="5400000" scaled="0"/>
-        </a:gradFill>
-        <a:gradFill rotWithShape="1">
-          <a:gsLst>
-            <a:gs pos="0">
-              <a:schemeClr val="phClr">
-                <a:satMod val="103000"/>
-                <a:lumMod val="102000"/>
-                <a:tint val="94000"/>
-              </a:schemeClr>
-            </a:gs>
-            <a:gs pos="50000">
-              <a:schemeClr val="phClr">
-                <a:satMod val="110000"/>
-                <a:lumMod val="100000"/>
-                <a:shade val="100000"/>
-              </a:schemeClr>
-            </a:gs>
-            <a:gs pos="100000">
-              <a:schemeClr val="phClr">
-                <a:lumMod val="99000"/>
-                <a:satMod val="120000"/>
-                <a:shade val="78000"/>
-              </a:schemeClr>
-            </a:gs>
-          </a:gsLst>
-          <a:lin ang="5400000" scaled="0"/>
-        </a:gradFill>
-      </a:fillStyleLst>
-      <a:lnStyleLst>
-        <a:ln w="12700" cap="flat" cmpd="sng" algn="ctr">
-          <a:solidFill>
-            <a:schemeClr val="phClr"/>
-          </a:solidFill>
-          <a:prstDash val="solid"/>
-          <a:miter lim="800000"/>
-        </a:ln>
-        <a:ln w="19050" cap="flat" cmpd="sng" algn="ctr">
-          <a:solidFill>
-            <a:schemeClr val="phClr"/>
-          </a:solidFill>
-          <a:prstDash val="solid"/>
-          <a:miter lim="800000"/>
-        </a:ln>
-        <a:ln w="25400" cap="flat" cmpd="sng" algn="ctr">
-          <a:solidFill>
-            <a:schemeClr val="phClr"/>
-          </a:solidFill>
-          <a:prstDash val="solid"/>
-          <a:miter lim="800000"/>
-        </a:ln>
-      </a:lnStyleLst>
-      <a:effectStyleLst>
-        <a:effectStyle>
-          <a:effectLst/>
-        </a:effectStyle>
-        <a:effectStyle>
-          <a:effectLst/>
-        </a:effectStyle>
-        <a:effectStyle>
-          <a:effectLst>
-            <a:outerShdw blurRad="57150" dist="19050" dir="5400000" algn="ctr" rotWithShape="0">
-              <a:srgbClr val="000000">
-                <a:alpha val="63000"/>
-              </a:srgbClr>
-            </a:outerShdw>
-          </a:effectLst>
-        </a:effectStyle>
-      </a:effectStyleLst>
-      <a:bgFillStyleLst>
-        <a:solidFill>
-          <a:schemeClr val="phClr"/>
-        </a:solidFill>
-        <a:solidFill>
-          <a:schemeClr val="phClr">
-            <a:tint val="95000"/>
-            <a:satMod val="170000"/>
-          </a:schemeClr>
-        </a:solidFill>
-        <a:gradFill rotWithShape="1">
-          <a:gsLst>
-            <a:gs pos="0">
-              <a:schemeClr val="phClr">
-                <a:tint val="93000"/>
-                <a:satMod val="150000"/>
-                <a:shade val="98000"/>
-                <a:lumMod val="102000"/>
-              </a:schemeClr>
-            </a:gs>
-            <a:gs pos="50000">
-              <a:schemeClr val="phClr">
-                <a:tint val="98000"/>
-                <a:satMod val="130000"/>
-                <a:shade val="90000"/>
-                <a:lumMod val="103000"/>
-              </a:schemeClr>
-            </a:gs>
-            <a:gs pos="100000">
-              <a:schemeClr val="phClr">
-                <a:shade val="63000"/>
-                <a:satMod val="120000"/>
-              </a:schemeClr>
-            </a:gs>
-          </a:gsLst>
-          <a:lin ang="5400000" scaled="0"/>
-        </a:gradFill>
-      </a:bgFillStyleLst>
-    </a:fmtScheme>
-  </a:themeElements>
-  <a:objectDefaults>
-    <a:lnDef>
-      <a:spPr/>
-      <a:bodyPr/>
-      <a:lstStyle/>
-      <a:style>
-        <a:lnRef idx="2">
-          <a:schemeClr val="accent1"/>
-        </a:lnRef>
-        <a:fillRef idx="0">
-          <a:schemeClr val="accent1"/>
-        </a:fillRef>
-        <a:effectRef idx="1">
-          <a:schemeClr val="accent1"/>
-        </a:effectRef>
-        <a:fontRef idx="minor">
-          <a:schemeClr val="tx1"/>
-        </a:fontRef>
-      </a:style>
-    </a:lnDef>
-  </a:objectDefaults>
-  <a:extraClrSchemeLst/>
-  <a:extLst>
-    <a:ext uri="{05A4C25C-085E-4340-85A3-A5531E510DB2}">
-      <thm15:themeFamily xmlns:thm15="http://schemas.microsoft.com/office/thememl/2012/main" name="Office Theme" id="{2E142A2C-CD16-42D6-873A-C26D2A0506FA}" vid="{1BDDFF52-6CD6-40A5-AB3C-68EB2F1E4D0A}"/>
-    </a:ext>
-  </a:extLst>
-</a:theme>
 </file>